--- a/10 класс/urok3/Презентация_занятие3_ред2.pptx
+++ b/10 класс/urok3/Презентация_занятие3_ред2.pptx
@@ -4,6 +4,9 @@
   <p:sldMasterIdLst>
     <p:sldMasterId id="2147483648" r:id="rId1"/>
   </p:sldMasterIdLst>
+  <p:notesMasterIdLst>
+    <p:notesMasterId r:id="rId28"/>
+  </p:notesMasterIdLst>
   <p:sldIdLst>
     <p:sldId id="256" r:id="rId2"/>
     <p:sldId id="257" r:id="rId3"/>
@@ -32,9 +35,6 @@
     <p:sldId id="280" r:id="rId26"/>
     <p:sldId id="281" r:id="rId27"/>
   </p:sldIdLst>
-  <p:notesMasterIdLst>
-    <p:notesMasterId r:id="rId28"/>
-  </p:notesMasterIdLst>
   <p:sldSz cx="12192000" cy="6858000"/>
   <p:notesSz cx="6858000" cy="12192000"/>
   <p:defaultTextStyle>
@@ -129,6 +129,11 @@
       </a:defRPr>
     </a:lvl9pPr>
   </p:defaultTextStyle>
+  <p:extLst>
+    <p:ext uri="{EFAFB233-063F-42B5-8137-9DF3F51BA10A}">
+      <p15:sldGuideLst xmlns:p15="http://schemas.microsoft.com/office/powerpoint/2012/main"/>
+    </p:ext>
+  </p:extLst>
 </p:presentation>
 </file>
 
@@ -154,234 +159,10 @@
           <a:chExt cx="0" cy="0"/>
         </a:xfrm>
       </p:grpSpPr>
-      <p:sp>
-        <p:nvSpPr>
-          <p:cNvPr id="2" name="Header Placeholder 1"/>
-          <p:cNvSpPr>
-            <a:spLocks noGrp="1"/>
-          </p:cNvSpPr>
-          <p:nvPr>
-            <p:ph type="hdr" sz="quarter"/>
-          </p:nvPr>
-        </p:nvSpPr>
-        <p:spPr>
-          <a:xfrm>
-            <a:off x="0" y="0"/>
-            <a:ext cx="2971800" cy="458788"/>
-          </a:xfrm>
-          <a:prstGeom prst="rect">
-            <a:avLst/>
-          </a:prstGeom>
-        </p:spPr>
-        <p:txBody>
-          <a:bodyPr vert="horz" lIns="91440" tIns="45720" rIns="91440" bIns="45720" rtlCol="0"/>
-          <a:lstStyle>
-            <a:lvl1pPr algn="l">
-              <a:defRPr sz="1200"/>
-            </a:lvl1pPr>
-          </a:lstStyle>
-          <a:p>
-            <a:endParaRPr lang="en-US"/>
-          </a:p>
-        </p:txBody>
-      </p:sp>
-      <p:sp>
-        <p:nvSpPr>
-          <p:cNvPr id="3" name="Date Placeholder 2"/>
-          <p:cNvSpPr>
-            <a:spLocks noGrp="1"/>
-          </p:cNvSpPr>
-          <p:nvPr>
-            <p:ph type="dt" idx="1"/>
-          </p:nvPr>
-        </p:nvSpPr>
-        <p:spPr>
-          <a:xfrm>
-            <a:off x="3884613" y="0"/>
-            <a:ext cx="2971800" cy="458788"/>
-          </a:xfrm>
-          <a:prstGeom prst="rect">
-            <a:avLst/>
-          </a:prstGeom>
-        </p:spPr>
-        <p:txBody>
-          <a:bodyPr vert="horz" lIns="91440" tIns="45720" rIns="91440" bIns="45720" rtlCol="0"/>
-          <a:lstStyle>
-            <a:lvl1pPr algn="r">
-              <a:defRPr sz="1200"/>
-            </a:lvl1pPr>
-          </a:lstStyle>
-          <a:p>
-            <a:fld id="{5282F153-3F37-0F45-9E97-73ACFA13230C}" type="datetimeFigureOut">
-              <a:rPr lang="en-US"/>
-              <a:t>7/23/19</a:t>
-            </a:fld>
-            <a:endParaRPr lang="en-US"/>
-          </a:p>
-        </p:txBody>
-      </p:sp>
-      <p:sp>
-        <p:nvSpPr>
-          <p:cNvPr id="4" name="Slide Image Placeholder 3"/>
-          <p:cNvSpPr>
-            <a:spLocks noGrp="1" noRot="1" noChangeAspect="1"/>
-          </p:cNvSpPr>
-          <p:nvPr>
-            <p:ph type="sldImg" idx="2"/>
-          </p:nvPr>
-        </p:nvSpPr>
-        <p:spPr>
-          <a:xfrm>
-            <a:off x="685800" y="1143000"/>
-            <a:ext cx="5486400" cy="3086100"/>
-          </a:xfrm>
-          <a:prstGeom prst="rect">
-            <a:avLst/>
-          </a:prstGeom>
-          <a:noFill/>
-          <a:ln w="12700">
-            <a:solidFill>
-              <a:prstClr val="black"/>
-            </a:solidFill>
-          </a:ln>
-        </p:spPr>
-        <p:txBody>
-          <a:bodyPr vert="horz" lIns="91440" tIns="45720" rIns="91440" bIns="45720" rtlCol="0" anchor="ctr"/>
-          <a:lstStyle/>
-          <a:p>
-            <a:endParaRPr lang="en-US"/>
-          </a:p>
-        </p:txBody>
-      </p:sp>
-      <p:sp>
-        <p:nvSpPr>
-          <p:cNvPr id="5" name="Notes Placeholder 4"/>
-          <p:cNvSpPr>
-            <a:spLocks noGrp="1"/>
-          </p:cNvSpPr>
-          <p:nvPr>
-            <p:ph type="body" sz="quarter" idx="3"/>
-          </p:nvPr>
-        </p:nvSpPr>
-        <p:spPr>
-          <a:xfrm>
-            <a:off x="685800" y="4400550"/>
-            <a:ext cx="5486400" cy="3600450"/>
-          </a:xfrm>
-          <a:prstGeom prst="rect">
-            <a:avLst/>
-          </a:prstGeom>
-        </p:spPr>
-        <p:txBody>
-          <a:bodyPr vert="horz" lIns="91440" tIns="45720" rIns="91440" bIns="45720" rtlCol="0"/>
-          <a:lstStyle/>
-          <a:p>
-            <a:pPr lvl="0"/>
-            <a:r>
-              <a:rPr lang="en-US"/>
-              <a:t>Click to edit Master text styles</a:t>
-            </a:r>
-          </a:p>
-          <a:p>
-            <a:pPr lvl="1"/>
-            <a:r>
-              <a:rPr lang="en-US"/>
-              <a:t>Second level</a:t>
-            </a:r>
-          </a:p>
-          <a:p>
-            <a:pPr lvl="2"/>
-            <a:r>
-              <a:rPr lang="en-US"/>
-              <a:t>Third level</a:t>
-            </a:r>
-          </a:p>
-          <a:p>
-            <a:pPr lvl="3"/>
-            <a:r>
-              <a:rPr lang="en-US"/>
-              <a:t>Fourth level</a:t>
-            </a:r>
-          </a:p>
-          <a:p>
-            <a:pPr lvl="4"/>
-            <a:r>
-              <a:rPr lang="en-US"/>
-              <a:t>Fifth level</a:t>
-            </a:r>
-          </a:p>
-        </p:txBody>
-      </p:sp>
-      <p:sp>
-        <p:nvSpPr>
-          <p:cNvPr id="6" name="Footer Placeholder 5"/>
-          <p:cNvSpPr>
-            <a:spLocks noGrp="1"/>
-          </p:cNvSpPr>
-          <p:nvPr>
-            <p:ph type="ftr" sz="quarter" idx="4"/>
-          </p:nvPr>
-        </p:nvSpPr>
-        <p:spPr>
-          <a:xfrm>
-            <a:off x="0" y="8685213"/>
-            <a:ext cx="2971800" cy="458787"/>
-          </a:xfrm>
-          <a:prstGeom prst="rect">
-            <a:avLst/>
-          </a:prstGeom>
-        </p:spPr>
-        <p:txBody>
-          <a:bodyPr vert="horz" lIns="91440" tIns="45720" rIns="91440" bIns="45720" rtlCol="0" anchor="b"/>
-          <a:lstStyle>
-            <a:lvl1pPr algn="l">
-              <a:defRPr sz="1200"/>
-            </a:lvl1pPr>
-          </a:lstStyle>
-          <a:p>
-            <a:endParaRPr lang="en-US"/>
-          </a:p>
-        </p:txBody>
-      </p:sp>
-      <p:sp>
-        <p:nvSpPr>
-          <p:cNvPr id="7" name="Slide Number Placeholder 6"/>
-          <p:cNvSpPr>
-            <a:spLocks noGrp="1"/>
-          </p:cNvSpPr>
-          <p:nvPr>
-            <p:ph type="sldNum" sz="quarter" idx="5"/>
-          </p:nvPr>
-        </p:nvSpPr>
-        <p:spPr>
-          <a:xfrm>
-            <a:off x="3884613" y="8685213"/>
-            <a:ext cx="2971800" cy="458787"/>
-          </a:xfrm>
-          <a:prstGeom prst="rect">
-            <a:avLst/>
-          </a:prstGeom>
-        </p:spPr>
-        <p:txBody>
-          <a:bodyPr vert="horz" lIns="91440" tIns="45720" rIns="91440" bIns="45720" rtlCol="0" anchor="b"/>
-          <a:lstStyle>
-            <a:lvl1pPr algn="r">
-              <a:defRPr sz="1200"/>
-            </a:lvl1pPr>
-          </a:lstStyle>
-          <a:p>
-            <a:fld id="{CE5E9CC1-C706-0F49-92D6-E571CC5EEA8F}" type="slidenum">
-              <a:rPr lang="en-US"/>
-              <a:t>‹#›</a:t>
-            </a:fld>
-            <a:endParaRPr lang="en-US"/>
-          </a:p>
-        </p:txBody>
-      </p:sp>
     </p:spTree>
     <p:extLst>
       <p:ext uri="{BB962C8B-B14F-4D97-AF65-F5344CB8AC3E}">
-        <p14:creationId xmlns:p14="http://schemas.microsoft.com/office/powerpoint/2010/main" val="1024086991"/>
+        <p14:creationId xmlns:p14="http://schemas.microsoft.com/office/powerpoint/2010/main" val="867562150"/>
       </p:ext>
     </p:extLst>
   </p:cSld>
@@ -529,7 +310,6 @@
               <a:rPr lang="en-US" dirty="0"/>
               <a:t>Блиц по домашнему заданию: способы записи алгоритма, выходы ромба, алгоритмический язык.</a:t>
             </a:r>
-            <a:endParaRPr lang="en-US" dirty="0"/>
           </a:p>
         </p:txBody>
       </p:sp>
@@ -617,7 +397,6 @@
               <a:rPr lang="en-US" dirty="0"/>
               <a:t>Показать на экране запуск. Затем изменить 11 на 101 — сумма станет 5050.</a:t>
             </a:r>
-            <a:endParaRPr lang="en-US" dirty="0"/>
           </a:p>
         </p:txBody>
       </p:sp>
@@ -705,7 +484,6 @@
               <a:rPr lang="en-US" dirty="0"/>
               <a:t>Запустить оба варианта на экране. Это задание есть в практической части — пусть сломают сами.</a:t>
             </a:r>
-            <a:endParaRPr lang="en-US" dirty="0"/>
           </a:p>
         </p:txBody>
       </p:sp>
@@ -793,7 +571,6 @@
               <a:rPr lang="en-US" dirty="0"/>
               <a:t>Ответ: обнуление внутри тела срабатывает на каждом шаге и стирает накопленное. На последнем шаге summa = 0, затем 0 + 10 = 10.</a:t>
             </a:r>
-            <a:endParaRPr lang="en-US" dirty="0"/>
           </a:p>
         </p:txBody>
       </p:sp>
@@ -881,7 +658,6 @@
               <a:rPr lang="en-US" dirty="0"/>
               <a:t>Запустить на экране. Затем убрать обнуление из тела — получится 55.</a:t>
             </a:r>
-            <a:endParaRPr lang="en-US" dirty="0"/>
           </a:p>
         </p:txBody>
       </p:sp>
@@ -969,7 +745,6 @@
               <a:rPr lang="en-US" dirty="0"/>
               <a:t>Связка с первым часом: разбираем те же величины, что только что были в цикле.</a:t>
             </a:r>
-            <a:endParaRPr lang="en-US" dirty="0"/>
           </a:p>
         </p:txBody>
       </p:sp>
@@ -1057,7 +832,6 @@
               <a:rPr lang="en-US" dirty="0"/>
               <a:t>Три признака записать в тетрадь. Дальше каждый разбирается отдельно.</a:t>
             </a:r>
-            <a:endParaRPr lang="en-US" dirty="0"/>
           </a:p>
         </p:txBody>
       </p:sp>
@@ -1145,7 +919,6 @@
               <a:rPr lang="en-US" dirty="0"/>
               <a:t>Язык сам константу не защищает — это соглашение между программистами. Но нарушать его не принято.</a:t>
             </a:r>
-            <a:endParaRPr lang="en-US" dirty="0"/>
           </a:p>
         </p:txBody>
       </p:sp>
@@ -1233,7 +1006,6 @@
               <a:rPr lang="en-US" dirty="0"/>
               <a:t>Задание в практике: объявить константу и три переменные разных типов, вывести значение и тип каждой.</a:t>
             </a:r>
-            <a:endParaRPr lang="en-US" dirty="0"/>
           </a:p>
         </p:txBody>
       </p:sp>
@@ -1321,7 +1093,6 @@
               <a:rPr lang="en-US" dirty="0"/>
               <a:t>Это понадобится на следующем занятии: ввод с клавиатуры приходит строкой, и его придётся преобразовывать.</a:t>
             </a:r>
-            <a:endParaRPr lang="en-US" dirty="0"/>
           </a:p>
         </p:txBody>
       </p:sp>
@@ -1409,7 +1180,6 @@
               <a:rPr lang="en-US" dirty="0"/>
               <a:t>Разобрать каждый случай на экране: запустить и показать сообщение.</a:t>
             </a:r>
-            <a:endParaRPr lang="en-US" dirty="0"/>
           </a:p>
         </p:txBody>
       </p:sp>
@@ -1497,7 +1267,6 @@
               <a:rPr lang="en-US" dirty="0"/>
               <a:t>Дать классу высказаться. Не давать ответ сразу.</a:t>
             </a:r>
-            <a:endParaRPr lang="en-US" dirty="0"/>
           </a:p>
         </p:txBody>
       </p:sp>
@@ -1585,7 +1354,6 @@
               <a:rPr lang="en-US" dirty="0"/>
               <a:t>Ответы: a — int, b — float, c — str, d — bool. a + b даёт 14.5. a + c — ошибка TypeError: складываются число и строка.</a:t>
             </a:r>
-            <a:endParaRPr lang="en-US" dirty="0"/>
           </a:p>
         </p:txBody>
       </p:sp>
@@ -1673,7 +1441,6 @@
               <a:rPr lang="en-US" dirty="0"/>
               <a:t>Ключевая мысль: "10" в кавычках и 10 без кавычек — разные величины.</a:t>
             </a:r>
-            <a:endParaRPr lang="en-US" dirty="0"/>
           </a:p>
         </p:txBody>
       </p:sp>
@@ -1761,7 +1528,6 @@
               <a:rPr lang="en-US" dirty="0"/>
               <a:t>Ответ: 6. Шаги: 0+1=1, 1+2=3, 3+3=6. range(1,4) даёт 1, 2, 3.</a:t>
             </a:r>
-            <a:endParaRPr lang="en-US" dirty="0"/>
           </a:p>
         </p:txBody>
       </p:sp>
@@ -1849,7 +1615,6 @@
               <a:rPr lang="en-US" dirty="0"/>
               <a:t>Ответ на задачу 6: тело выполнится один раз, цикла не будет. Раздать карточки.</a:t>
             </a:r>
-            <a:endParaRPr lang="en-US" dirty="0"/>
           </a:p>
         </p:txBody>
       </p:sp>
@@ -1937,7 +1702,6 @@
               <a:rPr lang="en-US" dirty="0"/>
               <a:t>Задание 6 намеренно ломающее: пусть получат 10 вместо 5050 и объяснят почему.</a:t>
             </a:r>
-            <a:endParaRPr lang="en-US" dirty="0"/>
           </a:p>
         </p:txBody>
       </p:sp>
@@ -2025,7 +1789,6 @@
               <a:rPr lang="en-US" dirty="0"/>
               <a:t>Учебник: параграф и страницы вписать.</a:t>
             </a:r>
-            <a:endParaRPr lang="en-US" dirty="0"/>
           </a:p>
         </p:txBody>
       </p:sp>
@@ -2113,7 +1876,6 @@
               <a:rPr lang="en-US" dirty="0"/>
               <a:t>Выставить отметки. Собрать тетради выборочно для проверки трассировок.</a:t>
             </a:r>
-            <a:endParaRPr lang="en-US" dirty="0"/>
           </a:p>
         </p:txBody>
       </p:sp>
@@ -2201,7 +1963,6 @@
               <a:rPr lang="en-US" dirty="0"/>
               <a:t>Бесконечный цикл — это и есть «программа зависла». Пример из жизни понятен всем.</a:t>
             </a:r>
-            <a:endParaRPr lang="en-US" dirty="0"/>
           </a:p>
         </p:txBody>
       </p:sp>
@@ -2289,7 +2050,6 @@
               <a:rPr lang="en-US" dirty="0"/>
               <a:t>Ответ: пять чисел — 1, 2, 3, 4, 5. Конечное значение 6 в диапазон не входит.</a:t>
             </a:r>
-            <a:endParaRPr lang="en-US" dirty="0"/>
           </a:p>
         </p:txBody>
       </p:sp>
@@ -2377,7 +2137,6 @@
               <a:rPr lang="en-US" dirty="0"/>
               <a:t>Проговорить вслух: конец не входит. Это источник самой частой ошибки на единицу.</a:t>
             </a:r>
-            <a:endParaRPr lang="en-US" dirty="0"/>
           </a:p>
         </p:txBody>
       </p:sp>
@@ -2465,7 +2224,6 @@
               <a:rPr lang="en-US" dirty="0"/>
               <a:t>Жёлтая линия — та самая линия возврата. По ней цикл и узнаётся на схеме.</a:t>
             </a:r>
-            <a:endParaRPr lang="en-US" dirty="0"/>
           </a:p>
         </p:txBody>
       </p:sp>
@@ -2553,7 +2311,6 @@
               <a:rPr lang="en-US" dirty="0"/>
               <a:t>Заполнять вместе с классом строку за строкой. Объяснить: i в строке — то значение, которое прибавляется на этом шаге.</a:t>
             </a:r>
-            <a:endParaRPr lang="en-US" dirty="0"/>
           </a:p>
         </p:txBody>
       </p:sp>
@@ -2641,7 +2398,6 @@
               <a:rPr lang="en-US" dirty="0"/>
               <a:t>Ответ: 10 раз. Проверка: 12 − 3 + 1 = 10. Частая ошибка — ответ 9.</a:t>
             </a:r>
-            <a:endParaRPr lang="en-US" dirty="0"/>
           </a:p>
         </p:txBody>
       </p:sp>
@@ -2729,7 +2485,6 @@
               <a:rPr lang="en-US" dirty="0"/>
               <a:t>Частый неверный ответ — 9. Разобрать на маленьком примере: от 3 до 5 это 3 раза, а не 2.</a:t>
             </a:r>
-            <a:endParaRPr lang="en-US" dirty="0"/>
           </a:p>
         </p:txBody>
       </p:sp>
@@ -2802,6 +2557,11 @@
 <file path=ppt/slideMasters/slideMaster1.xml><?xml version="1.0" encoding="utf-8"?>
 <p:sldMaster xmlns:a="http://schemas.openxmlformats.org/drawingml/2006/main" xmlns:r="http://schemas.openxmlformats.org/officeDocument/2006/relationships" xmlns:p="http://schemas.openxmlformats.org/presentationml/2006/main">
   <p:cSld>
+    <p:bg>
+      <p:bgRef idx="1001">
+        <a:schemeClr val="bg1"/>
+      </p:bgRef>
+    </p:bg>
     <p:spTree>
       <p:nvGrpSpPr>
         <p:cNvPr id="1" name=""/>
@@ -3084,6 +2844,7 @@
         <a:solidFill>
           <a:srgbClr val="17132E"/>
         </a:solidFill>
+        <a:effectLst/>
       </p:bgPr>
     </p:bg>
     <p:spTree>
@@ -3165,7 +2926,7 @@
           <a:bodyPr wrap="square" lIns="0" tIns="0" rIns="0" bIns="0" rtlCol="0" anchor="ctr"/>
           <a:lstStyle/>
           <a:p>
-            <a:pPr indent="0" marL="0">
+            <a:pPr marL="0" indent="0">
               <a:buNone/>
             </a:pPr>
             <a:r>
@@ -3204,7 +2965,7 @@
           <a:bodyPr wrap="square" lIns="0" tIns="0" rIns="0" bIns="0" rtlCol="0" anchor="ctr"/>
           <a:lstStyle/>
           <a:p>
-            <a:pPr indent="0" marL="0">
+            <a:pPr marL="0" indent="0">
               <a:lnSpc>
                 <a:spcPct val="105000"/>
               </a:lnSpc>
@@ -3246,7 +3007,7 @@
           <a:bodyPr wrap="square" lIns="0" tIns="0" rIns="0" bIns="0" rtlCol="0" anchor="ctr"/>
           <a:lstStyle/>
           <a:p>
-            <a:pPr indent="0" marL="0">
+            <a:pPr marL="0" indent="0">
               <a:buNone/>
             </a:pPr>
             <a:r>
@@ -3285,7 +3046,7 @@
           <a:bodyPr wrap="square" lIns="0" tIns="0" rIns="0" bIns="0" rtlCol="0" anchor="ctr"/>
           <a:lstStyle/>
           <a:p>
-            <a:pPr indent="0" marL="0">
+            <a:pPr marL="0" indent="0">
               <a:buNone/>
             </a:pPr>
             <a:r>
@@ -3319,6 +3080,7 @@
         <a:solidFill>
           <a:srgbClr val="17132E"/>
         </a:solidFill>
+        <a:effectLst/>
       </p:bgPr>
     </p:bg>
     <p:spTree>
@@ -3356,7 +3118,7 @@
           <a:bodyPr wrap="square" lIns="0" tIns="0" rIns="0" bIns="0" rtlCol="0" anchor="ctr"/>
           <a:lstStyle/>
           <a:p>
-            <a:pPr indent="0" marL="0">
+            <a:pPr marL="0" indent="0">
               <a:buNone/>
             </a:pPr>
             <a:r>
@@ -3382,8 +3144,8 @@
         </p:nvSpPr>
         <p:spPr>
           <a:xfrm>
-            <a:off x="640080" y="1737360"/>
-            <a:ext cx="6583680" cy="1938528"/>
+            <a:off x="640080" y="1483743"/>
+            <a:ext cx="6583680" cy="2484407"/>
           </a:xfrm>
           <a:prstGeom prst="roundRect">
             <a:avLst>
@@ -3422,16 +3184,16 @@
           <a:bodyPr wrap="square" lIns="0" tIns="0" rIns="0" bIns="0" rtlCol="0" anchor="ctr"/>
           <a:lstStyle/>
           <a:p>
-            <a:pPr indent="0" marL="0">
+            <a:pPr marL="0" indent="0">
               <a:lnSpc>
                 <a:spcPct val="110000"/>
               </a:lnSpc>
               <a:buNone/>
             </a:pPr>
             <a:r>
-              <a:rPr lang="en-US" sz="1700" dirty="0">
-                <a:solidFill>
-                  <a:srgbClr val="4FD1E0"/>
+              <a:rPr lang="en-US" sz="2400" b="1" dirty="0">
+                <a:solidFill>
+                  <a:schemeClr val="bg1"/>
                 </a:solidFill>
                 <a:latin typeface="Consolas" pitchFamily="34" charset="0"/>
                 <a:ea typeface="Consolas" pitchFamily="34" charset="-122"/>
@@ -3439,28 +3201,36 @@
               </a:rPr>
               <a:t>summa = 0</a:t>
             </a:r>
-            <a:endParaRPr lang="en-US" sz="1700" dirty="0"/>
-          </a:p>
-          <a:p>
-            <a:pPr indent="0" marL="0">
+            <a:endParaRPr lang="en-US" sz="2400" b="1" dirty="0">
+              <a:solidFill>
+                <a:schemeClr val="bg1"/>
+              </a:solidFill>
+            </a:endParaRPr>
+          </a:p>
+          <a:p>
+            <a:pPr marL="0" indent="0">
               <a:lnSpc>
                 <a:spcPct val="110000"/>
               </a:lnSpc>
               <a:buNone/>
             </a:pPr>
-            <a:endParaRPr lang="en-US" sz="1700" dirty="0"/>
-          </a:p>
-          <a:p>
-            <a:pPr indent="0" marL="0">
+            <a:endParaRPr lang="en-US" sz="2400" b="1" dirty="0">
+              <a:solidFill>
+                <a:schemeClr val="bg1"/>
+              </a:solidFill>
+            </a:endParaRPr>
+          </a:p>
+          <a:p>
+            <a:pPr marL="0" indent="0">
               <a:lnSpc>
                 <a:spcPct val="110000"/>
               </a:lnSpc>
               <a:buNone/>
             </a:pPr>
             <a:r>
-              <a:rPr lang="en-US" sz="1700" dirty="0">
-                <a:solidFill>
-                  <a:srgbClr val="4FD1E0"/>
+              <a:rPr lang="en-US" sz="2400" b="1" dirty="0">
+                <a:solidFill>
+                  <a:schemeClr val="bg1"/>
                 </a:solidFill>
                 <a:latin typeface="Consolas" pitchFamily="34" charset="0"/>
                 <a:ea typeface="Consolas" pitchFamily="34" charset="-122"/>
@@ -3468,19 +3238,23 @@
               </a:rPr>
               <a:t>for i in range(1, 11):</a:t>
             </a:r>
-            <a:endParaRPr lang="en-US" sz="1700" dirty="0"/>
-          </a:p>
-          <a:p>
-            <a:pPr indent="0" marL="0">
+            <a:endParaRPr lang="en-US" sz="2400" b="1" dirty="0">
+              <a:solidFill>
+                <a:schemeClr val="bg1"/>
+              </a:solidFill>
+            </a:endParaRPr>
+          </a:p>
+          <a:p>
+            <a:pPr marL="0" indent="0">
               <a:lnSpc>
                 <a:spcPct val="110000"/>
               </a:lnSpc>
               <a:buNone/>
             </a:pPr>
             <a:r>
-              <a:rPr lang="en-US" sz="1700" dirty="0">
-                <a:solidFill>
-                  <a:srgbClr val="4FD1E0"/>
+              <a:rPr lang="en-US" sz="2400" b="1" dirty="0">
+                <a:solidFill>
+                  <a:schemeClr val="bg1"/>
                 </a:solidFill>
                 <a:latin typeface="Consolas" pitchFamily="34" charset="0"/>
                 <a:ea typeface="Consolas" pitchFamily="34" charset="-122"/>
@@ -3488,28 +3262,36 @@
               </a:rPr>
               <a:t>    summa = summa + i</a:t>
             </a:r>
-            <a:endParaRPr lang="en-US" sz="1700" dirty="0"/>
-          </a:p>
-          <a:p>
-            <a:pPr indent="0" marL="0">
+            <a:endParaRPr lang="en-US" sz="2400" b="1" dirty="0">
+              <a:solidFill>
+                <a:schemeClr val="bg1"/>
+              </a:solidFill>
+            </a:endParaRPr>
+          </a:p>
+          <a:p>
+            <a:pPr marL="0" indent="0">
               <a:lnSpc>
                 <a:spcPct val="110000"/>
               </a:lnSpc>
               <a:buNone/>
             </a:pPr>
-            <a:endParaRPr lang="en-US" sz="1700" dirty="0"/>
-          </a:p>
-          <a:p>
-            <a:pPr indent="0" marL="0">
+            <a:endParaRPr lang="en-US" sz="2400" b="1" dirty="0">
+              <a:solidFill>
+                <a:schemeClr val="bg1"/>
+              </a:solidFill>
+            </a:endParaRPr>
+          </a:p>
+          <a:p>
+            <a:pPr marL="0" indent="0">
               <a:lnSpc>
                 <a:spcPct val="110000"/>
               </a:lnSpc>
               <a:buNone/>
             </a:pPr>
             <a:r>
-              <a:rPr lang="en-US" sz="1700" dirty="0">
-                <a:solidFill>
-                  <a:srgbClr val="4FD1E0"/>
+              <a:rPr lang="en-US" sz="2400" b="1" dirty="0">
+                <a:solidFill>
+                  <a:schemeClr val="bg1"/>
                 </a:solidFill>
                 <a:latin typeface="Consolas" pitchFamily="34" charset="0"/>
                 <a:ea typeface="Consolas" pitchFamily="34" charset="-122"/>
@@ -3517,7 +3299,11 @@
               </a:rPr>
               <a:t>print("Сумма:", summa)   # 55</a:t>
             </a:r>
-            <a:endParaRPr lang="en-US" sz="1700" dirty="0"/>
+            <a:endParaRPr lang="en-US" sz="2400" b="1" dirty="0">
+              <a:solidFill>
+                <a:schemeClr val="bg1"/>
+              </a:solidFill>
+            </a:endParaRPr>
           </a:p>
         </p:txBody>
       </p:sp>
@@ -3569,13 +3355,13 @@
           <a:bodyPr wrap="square" lIns="0" tIns="0" rIns="0" bIns="0" rtlCol="0" anchor="ctr"/>
           <a:lstStyle/>
           <a:p>
-            <a:pPr indent="0" marL="0">
-              <a:buNone/>
-            </a:pPr>
-            <a:r>
-              <a:rPr lang="en-US" sz="1700" b="1" dirty="0">
-                <a:solidFill>
-                  <a:srgbClr val="4FD1E0"/>
+            <a:pPr marL="0" indent="0">
+              <a:buNone/>
+            </a:pPr>
+            <a:r>
+              <a:rPr lang="en-US" sz="2000" b="1" dirty="0">
+                <a:solidFill>
+                  <a:schemeClr val="bg1"/>
                 </a:solidFill>
                 <a:latin typeface="Consolas" pitchFamily="34" charset="0"/>
                 <a:ea typeface="Consolas" pitchFamily="34" charset="-122"/>
@@ -3583,7 +3369,11 @@
               </a:rPr>
               <a:t>range(1, 11)</a:t>
             </a:r>
-            <a:endParaRPr lang="en-US" sz="1700" dirty="0"/>
+            <a:endParaRPr lang="en-US" sz="2000" b="1" dirty="0">
+              <a:solidFill>
+                <a:schemeClr val="bg1"/>
+              </a:solidFill>
+            </a:endParaRPr>
           </a:p>
         </p:txBody>
       </p:sp>
@@ -3608,13 +3398,13 @@
           <a:bodyPr wrap="square" lIns="0" tIns="0" rIns="0" bIns="0" rtlCol="0" anchor="ctr"/>
           <a:lstStyle/>
           <a:p>
-            <a:pPr indent="0" marL="0">
-              <a:buNone/>
-            </a:pPr>
-            <a:r>
-              <a:rPr lang="en-US" sz="1500" dirty="0">
-                <a:solidFill>
-                  <a:srgbClr val="FFFFFF"/>
+            <a:pPr marL="0" indent="0">
+              <a:buNone/>
+            </a:pPr>
+            <a:r>
+              <a:rPr lang="en-US" sz="2000" b="1" dirty="0">
+                <a:solidFill>
+                  <a:schemeClr val="bg1"/>
                 </a:solidFill>
                 <a:latin typeface="Calibri" pitchFamily="34" charset="0"/>
                 <a:ea typeface="Calibri" pitchFamily="34" charset="-122"/>
@@ -3622,16 +3412,20 @@
               </a:rPr>
               <a:t>Даёт числа от 1 до 10.</a:t>
             </a:r>
-            <a:endParaRPr lang="en-US" sz="1500" dirty="0"/>
-          </a:p>
-          <a:p>
-            <a:pPr indent="0" marL="0">
-              <a:buNone/>
-            </a:pPr>
-            <a:r>
-              <a:rPr lang="en-US" sz="1500" dirty="0">
-                <a:solidFill>
-                  <a:srgbClr val="FFFFFF"/>
+            <a:endParaRPr lang="en-US" sz="2000" b="1" dirty="0">
+              <a:solidFill>
+                <a:schemeClr val="bg1"/>
+              </a:solidFill>
+            </a:endParaRPr>
+          </a:p>
+          <a:p>
+            <a:pPr marL="0" indent="0">
+              <a:buNone/>
+            </a:pPr>
+            <a:r>
+              <a:rPr lang="en-US" sz="2000" b="1" dirty="0">
+                <a:solidFill>
+                  <a:schemeClr val="bg1"/>
                 </a:solidFill>
                 <a:latin typeface="Calibri" pitchFamily="34" charset="0"/>
                 <a:ea typeface="Calibri" pitchFamily="34" charset="-122"/>
@@ -3639,7 +3433,11 @@
               </a:rPr>
               <a:t>Конечное значение в диапазон не входит.</a:t>
             </a:r>
-            <a:endParaRPr lang="en-US" sz="1500" dirty="0"/>
+            <a:endParaRPr lang="en-US" sz="2000" b="1" dirty="0">
+              <a:solidFill>
+                <a:schemeClr val="bg1"/>
+              </a:solidFill>
+            </a:endParaRPr>
           </a:p>
         </p:txBody>
       </p:sp>
@@ -3691,13 +3489,13 @@
           <a:bodyPr wrap="square" lIns="0" tIns="0" rIns="0" bIns="0" rtlCol="0" anchor="ctr"/>
           <a:lstStyle/>
           <a:p>
-            <a:pPr indent="0" marL="0">
-              <a:buNone/>
-            </a:pPr>
-            <a:r>
-              <a:rPr lang="en-US" sz="1700" b="1" dirty="0">
-                <a:solidFill>
-                  <a:srgbClr val="3DD6A0"/>
+            <a:pPr marL="0" indent="0">
+              <a:buNone/>
+            </a:pPr>
+            <a:r>
+              <a:rPr lang="en-US" sz="2000" b="1" dirty="0">
+                <a:solidFill>
+                  <a:schemeClr val="bg1"/>
                 </a:solidFill>
                 <a:latin typeface="Calibri" pitchFamily="34" charset="0"/>
                 <a:ea typeface="Calibri" pitchFamily="34" charset="-122"/>
@@ -3705,7 +3503,11 @@
               </a:rPr>
               <a:t>Отступ</a:t>
             </a:r>
-            <a:endParaRPr lang="en-US" sz="1700" dirty="0"/>
+            <a:endParaRPr lang="en-US" sz="2000" dirty="0">
+              <a:solidFill>
+                <a:schemeClr val="bg1"/>
+              </a:solidFill>
+            </a:endParaRPr>
           </a:p>
         </p:txBody>
       </p:sp>
@@ -3730,11 +3532,11 @@
           <a:bodyPr wrap="square" lIns="0" tIns="0" rIns="0" bIns="0" rtlCol="0" anchor="ctr"/>
           <a:lstStyle/>
           <a:p>
-            <a:pPr indent="0" marL="0">
-              <a:buNone/>
-            </a:pPr>
-            <a:r>
-              <a:rPr lang="en-US" sz="1500" dirty="0">
+            <a:pPr marL="0" indent="0">
+              <a:buNone/>
+            </a:pPr>
+            <a:r>
+              <a:rPr lang="en-US" sz="2000" b="1" dirty="0">
                 <a:solidFill>
                   <a:srgbClr val="FFFFFF"/>
                 </a:solidFill>
@@ -3744,7 +3546,7 @@
               </a:rPr>
               <a:t>Строки с отступом — это тело цикла. По отступу язык понимает, что повторять, а что нет.</a:t>
             </a:r>
-            <a:endParaRPr lang="en-US" sz="1500" dirty="0"/>
+            <a:endParaRPr lang="en-US" sz="2000" b="1" dirty="0"/>
           </a:p>
         </p:txBody>
       </p:sp>
@@ -3769,13 +3571,13 @@
           <a:bodyPr wrap="square" lIns="0" tIns="0" rIns="0" bIns="0" rtlCol="0" anchor="ctr"/>
           <a:lstStyle/>
           <a:p>
-            <a:pPr indent="0" marL="0">
-              <a:buNone/>
-            </a:pPr>
-            <a:r>
-              <a:rPr lang="en-US" sz="1700" i="1" dirty="0">
-                <a:solidFill>
-                  <a:srgbClr val="4FD1E0"/>
+            <a:pPr marL="0" indent="0">
+              <a:buNone/>
+            </a:pPr>
+            <a:r>
+              <a:rPr lang="en-US" sz="2000" b="1" dirty="0">
+                <a:solidFill>
+                  <a:schemeClr val="bg1"/>
                 </a:solidFill>
                 <a:latin typeface="Calibri" pitchFamily="34" charset="0"/>
                 <a:ea typeface="Calibri" pitchFamily="34" charset="-122"/>
@@ -3783,7 +3585,11 @@
               </a:rPr>
               <a:t>Шесть строк вместо ста. Вот зачем нужен цикл.</a:t>
             </a:r>
-            <a:endParaRPr lang="en-US" sz="1700" dirty="0"/>
+            <a:endParaRPr lang="en-US" sz="2000" b="1" dirty="0">
+              <a:solidFill>
+                <a:schemeClr val="bg1"/>
+              </a:solidFill>
+            </a:endParaRPr>
           </a:p>
         </p:txBody>
       </p:sp>
@@ -3803,6 +3609,7 @@
         <a:solidFill>
           <a:srgbClr val="17132E"/>
         </a:solidFill>
+        <a:effectLst/>
       </p:bgPr>
     </p:bg>
     <p:spTree>
@@ -3840,7 +3647,7 @@
           <a:bodyPr wrap="square" lIns="0" tIns="0" rIns="0" bIns="0" rtlCol="0" anchor="ctr"/>
           <a:lstStyle/>
           <a:p>
-            <a:pPr indent="0" marL="0">
+            <a:pPr marL="0" indent="0">
               <a:buNone/>
             </a:pPr>
             <a:r>
@@ -3879,13 +3686,13 @@
           <a:bodyPr wrap="square" lIns="0" tIns="0" rIns="0" bIns="0" rtlCol="0" anchor="ctr"/>
           <a:lstStyle/>
           <a:p>
-            <a:pPr indent="0" marL="0">
-              <a:buNone/>
-            </a:pPr>
-            <a:r>
-              <a:rPr lang="en-US" sz="1600" i="1" dirty="0">
-                <a:solidFill>
-                  <a:srgbClr val="A9A3C4"/>
+            <a:pPr marL="0" indent="0">
+              <a:buNone/>
+            </a:pPr>
+            <a:r>
+              <a:rPr lang="en-US" sz="2000" b="1" i="1" dirty="0">
+                <a:solidFill>
+                  <a:schemeClr val="bg1"/>
                 </a:solidFill>
                 <a:latin typeface="Calibri" pitchFamily="34" charset="0"/>
                 <a:ea typeface="Calibri" pitchFamily="34" charset="-122"/>
@@ -3893,7 +3700,11 @@
               </a:rPr>
               <a:t>Где обнулять накопитель</a:t>
             </a:r>
-            <a:endParaRPr lang="en-US" sz="1600" dirty="0"/>
+            <a:endParaRPr lang="en-US" sz="2000" b="1" dirty="0">
+              <a:solidFill>
+                <a:schemeClr val="bg1"/>
+              </a:solidFill>
+            </a:endParaRPr>
           </a:p>
         </p:txBody>
       </p:sp>
@@ -3945,13 +3756,13 @@
           <a:bodyPr wrap="square" lIns="0" tIns="0" rIns="0" bIns="0" rtlCol="0" anchor="ctr"/>
           <a:lstStyle/>
           <a:p>
-            <a:pPr indent="0" marL="0">
+            <a:pPr marL="0" indent="0">
               <a:buNone/>
             </a:pPr>
             <a:r>
               <a:rPr lang="en-US" sz="1900" b="1" dirty="0">
                 <a:solidFill>
-                  <a:srgbClr val="3DD6A0"/>
+                  <a:schemeClr val="bg1"/>
                 </a:solidFill>
                 <a:latin typeface="Calibri" pitchFamily="34" charset="0"/>
                 <a:ea typeface="Calibri" pitchFamily="34" charset="-122"/>
@@ -3959,7 +3770,11 @@
               </a:rPr>
               <a:t>Верно</a:t>
             </a:r>
-            <a:endParaRPr lang="en-US" sz="1900" dirty="0"/>
+            <a:endParaRPr lang="en-US" sz="1900" dirty="0">
+              <a:solidFill>
+                <a:schemeClr val="bg1"/>
+              </a:solidFill>
+            </a:endParaRPr>
           </a:p>
         </p:txBody>
       </p:sp>
@@ -4011,16 +3826,16 @@
           <a:bodyPr wrap="square" lIns="0" tIns="0" rIns="0" bIns="0" rtlCol="0" anchor="ctr"/>
           <a:lstStyle/>
           <a:p>
-            <a:pPr indent="0" marL="0">
+            <a:pPr marL="0" indent="0">
               <a:lnSpc>
                 <a:spcPct val="110000"/>
               </a:lnSpc>
               <a:buNone/>
             </a:pPr>
             <a:r>
-              <a:rPr lang="en-US" sz="1500" dirty="0">
-                <a:solidFill>
-                  <a:srgbClr val="4FD1E0"/>
+              <a:rPr lang="en-US" sz="2000" b="1" dirty="0">
+                <a:solidFill>
+                  <a:schemeClr val="bg1"/>
                 </a:solidFill>
                 <a:latin typeface="Consolas" pitchFamily="34" charset="0"/>
                 <a:ea typeface="Consolas" pitchFamily="34" charset="-122"/>
@@ -4028,28 +3843,36 @@
               </a:rPr>
               <a:t>summa = 0</a:t>
             </a:r>
-            <a:endParaRPr lang="en-US" sz="1500" dirty="0"/>
-          </a:p>
-          <a:p>
-            <a:pPr indent="0" marL="0">
+            <a:endParaRPr lang="en-US" sz="2000" b="1" dirty="0">
+              <a:solidFill>
+                <a:schemeClr val="bg1"/>
+              </a:solidFill>
+            </a:endParaRPr>
+          </a:p>
+          <a:p>
+            <a:pPr marL="0" indent="0">
               <a:lnSpc>
                 <a:spcPct val="110000"/>
               </a:lnSpc>
               <a:buNone/>
             </a:pPr>
-            <a:endParaRPr lang="en-US" sz="1500" dirty="0"/>
-          </a:p>
-          <a:p>
-            <a:pPr indent="0" marL="0">
+            <a:endParaRPr lang="en-US" sz="2000" b="1" dirty="0">
+              <a:solidFill>
+                <a:schemeClr val="bg1"/>
+              </a:solidFill>
+            </a:endParaRPr>
+          </a:p>
+          <a:p>
+            <a:pPr marL="0" indent="0">
               <a:lnSpc>
                 <a:spcPct val="110000"/>
               </a:lnSpc>
               <a:buNone/>
             </a:pPr>
             <a:r>
-              <a:rPr lang="en-US" sz="1500" dirty="0">
-                <a:solidFill>
-                  <a:srgbClr val="4FD1E0"/>
+              <a:rPr lang="en-US" sz="2000" b="1" dirty="0">
+                <a:solidFill>
+                  <a:schemeClr val="bg1"/>
                 </a:solidFill>
                 <a:latin typeface="Consolas" pitchFamily="34" charset="0"/>
                 <a:ea typeface="Consolas" pitchFamily="34" charset="-122"/>
@@ -4057,19 +3880,23 @@
               </a:rPr>
               <a:t>for i in range(1, 11):</a:t>
             </a:r>
-            <a:endParaRPr lang="en-US" sz="1500" dirty="0"/>
-          </a:p>
-          <a:p>
-            <a:pPr indent="0" marL="0">
+            <a:endParaRPr lang="en-US" sz="2000" b="1" dirty="0">
+              <a:solidFill>
+                <a:schemeClr val="bg1"/>
+              </a:solidFill>
+            </a:endParaRPr>
+          </a:p>
+          <a:p>
+            <a:pPr marL="0" indent="0">
               <a:lnSpc>
                 <a:spcPct val="110000"/>
               </a:lnSpc>
               <a:buNone/>
             </a:pPr>
             <a:r>
-              <a:rPr lang="en-US" sz="1500" dirty="0">
-                <a:solidFill>
-                  <a:srgbClr val="4FD1E0"/>
+              <a:rPr lang="en-US" sz="2000" b="1" dirty="0">
+                <a:solidFill>
+                  <a:schemeClr val="bg1"/>
                 </a:solidFill>
                 <a:latin typeface="Consolas" pitchFamily="34" charset="0"/>
                 <a:ea typeface="Consolas" pitchFamily="34" charset="-122"/>
@@ -4077,28 +3904,36 @@
               </a:rPr>
               <a:t>    summa = summa + i</a:t>
             </a:r>
-            <a:endParaRPr lang="en-US" sz="1500" dirty="0"/>
-          </a:p>
-          <a:p>
-            <a:pPr indent="0" marL="0">
+            <a:endParaRPr lang="en-US" sz="2000" b="1" dirty="0">
+              <a:solidFill>
+                <a:schemeClr val="bg1"/>
+              </a:solidFill>
+            </a:endParaRPr>
+          </a:p>
+          <a:p>
+            <a:pPr marL="0" indent="0">
               <a:lnSpc>
                 <a:spcPct val="110000"/>
               </a:lnSpc>
               <a:buNone/>
             </a:pPr>
-            <a:endParaRPr lang="en-US" sz="1500" dirty="0"/>
-          </a:p>
-          <a:p>
-            <a:pPr indent="0" marL="0">
+            <a:endParaRPr lang="en-US" sz="2000" b="1" dirty="0">
+              <a:solidFill>
+                <a:schemeClr val="bg1"/>
+              </a:solidFill>
+            </a:endParaRPr>
+          </a:p>
+          <a:p>
+            <a:pPr marL="0" indent="0">
               <a:lnSpc>
                 <a:spcPct val="110000"/>
               </a:lnSpc>
               <a:buNone/>
             </a:pPr>
             <a:r>
-              <a:rPr lang="en-US" sz="1500" dirty="0">
-                <a:solidFill>
-                  <a:srgbClr val="4FD1E0"/>
+              <a:rPr lang="en-US" sz="2000" b="1" dirty="0">
+                <a:solidFill>
+                  <a:schemeClr val="bg1"/>
                 </a:solidFill>
                 <a:latin typeface="Consolas" pitchFamily="34" charset="0"/>
                 <a:ea typeface="Consolas" pitchFamily="34" charset="-122"/>
@@ -4106,7 +3941,11 @@
               </a:rPr>
               <a:t>print(summa)   # 55</a:t>
             </a:r>
-            <a:endParaRPr lang="en-US" sz="1500" dirty="0"/>
+            <a:endParaRPr lang="en-US" sz="2000" b="1" dirty="0">
+              <a:solidFill>
+                <a:schemeClr val="bg1"/>
+              </a:solidFill>
+            </a:endParaRPr>
           </a:p>
         </p:txBody>
       </p:sp>
@@ -4158,13 +3997,13 @@
           <a:bodyPr wrap="square" lIns="0" tIns="0" rIns="0" bIns="0" rtlCol="0" anchor="ctr"/>
           <a:lstStyle/>
           <a:p>
-            <a:pPr indent="0" marL="0">
+            <a:pPr marL="0" indent="0">
               <a:buNone/>
             </a:pPr>
             <a:r>
               <a:rPr lang="en-US" sz="1900" b="1" dirty="0">
                 <a:solidFill>
-                  <a:srgbClr val="F2789F"/>
+                  <a:schemeClr val="bg1"/>
                 </a:solidFill>
                 <a:latin typeface="Calibri" pitchFamily="34" charset="0"/>
                 <a:ea typeface="Calibri" pitchFamily="34" charset="-122"/>
@@ -4172,7 +4011,11 @@
               </a:rPr>
               <a:t>Неверно</a:t>
             </a:r>
-            <a:endParaRPr lang="en-US" sz="1900" dirty="0"/>
+            <a:endParaRPr lang="en-US" sz="1900" dirty="0">
+              <a:solidFill>
+                <a:schemeClr val="bg1"/>
+              </a:solidFill>
+            </a:endParaRPr>
           </a:p>
         </p:txBody>
       </p:sp>
@@ -4224,16 +4067,16 @@
           <a:bodyPr wrap="square" lIns="0" tIns="0" rIns="0" bIns="0" rtlCol="0" anchor="ctr"/>
           <a:lstStyle/>
           <a:p>
-            <a:pPr indent="0" marL="0">
+            <a:pPr marL="0" indent="0">
               <a:lnSpc>
                 <a:spcPct val="110000"/>
               </a:lnSpc>
               <a:buNone/>
             </a:pPr>
             <a:r>
-              <a:rPr lang="en-US" sz="1500" dirty="0">
-                <a:solidFill>
-                  <a:srgbClr val="4FD1E0"/>
+              <a:rPr lang="en-US" sz="2000" b="1" dirty="0">
+                <a:solidFill>
+                  <a:schemeClr val="bg1"/>
                 </a:solidFill>
                 <a:latin typeface="Consolas" pitchFamily="34" charset="0"/>
                 <a:ea typeface="Consolas" pitchFamily="34" charset="-122"/>
@@ -4241,19 +4084,23 @@
               </a:rPr>
               <a:t>for i in range(1, 11):</a:t>
             </a:r>
-            <a:endParaRPr lang="en-US" sz="1500" dirty="0"/>
-          </a:p>
-          <a:p>
-            <a:pPr indent="0" marL="0">
+            <a:endParaRPr lang="en-US" sz="2000" b="1" dirty="0">
+              <a:solidFill>
+                <a:schemeClr val="bg1"/>
+              </a:solidFill>
+            </a:endParaRPr>
+          </a:p>
+          <a:p>
+            <a:pPr marL="0" indent="0">
               <a:lnSpc>
                 <a:spcPct val="110000"/>
               </a:lnSpc>
               <a:buNone/>
             </a:pPr>
             <a:r>
-              <a:rPr lang="en-US" sz="1500" dirty="0">
-                <a:solidFill>
-                  <a:srgbClr val="4FD1E0"/>
+              <a:rPr lang="en-US" sz="2000" b="1" dirty="0">
+                <a:solidFill>
+                  <a:schemeClr val="bg1"/>
                 </a:solidFill>
                 <a:latin typeface="Consolas" pitchFamily="34" charset="0"/>
                 <a:ea typeface="Consolas" pitchFamily="34" charset="-122"/>
@@ -4261,19 +4108,23 @@
               </a:rPr>
               <a:t>    summa = 0</a:t>
             </a:r>
-            <a:endParaRPr lang="en-US" sz="1500" dirty="0"/>
-          </a:p>
-          <a:p>
-            <a:pPr indent="0" marL="0">
+            <a:endParaRPr lang="en-US" sz="2000" b="1" dirty="0">
+              <a:solidFill>
+                <a:schemeClr val="bg1"/>
+              </a:solidFill>
+            </a:endParaRPr>
+          </a:p>
+          <a:p>
+            <a:pPr marL="0" indent="0">
               <a:lnSpc>
                 <a:spcPct val="110000"/>
               </a:lnSpc>
               <a:buNone/>
             </a:pPr>
             <a:r>
-              <a:rPr lang="en-US" sz="1500" dirty="0">
-                <a:solidFill>
-                  <a:srgbClr val="4FD1E0"/>
+              <a:rPr lang="en-US" sz="2000" b="1" dirty="0">
+                <a:solidFill>
+                  <a:schemeClr val="bg1"/>
                 </a:solidFill>
                 <a:latin typeface="Consolas" pitchFamily="34" charset="0"/>
                 <a:ea typeface="Consolas" pitchFamily="34" charset="-122"/>
@@ -4281,28 +4132,36 @@
               </a:rPr>
               <a:t>    summa = summa + i</a:t>
             </a:r>
-            <a:endParaRPr lang="en-US" sz="1500" dirty="0"/>
-          </a:p>
-          <a:p>
-            <a:pPr indent="0" marL="0">
+            <a:endParaRPr lang="en-US" sz="2000" b="1" dirty="0">
+              <a:solidFill>
+                <a:schemeClr val="bg1"/>
+              </a:solidFill>
+            </a:endParaRPr>
+          </a:p>
+          <a:p>
+            <a:pPr marL="0" indent="0">
               <a:lnSpc>
                 <a:spcPct val="110000"/>
               </a:lnSpc>
               <a:buNone/>
             </a:pPr>
-            <a:endParaRPr lang="en-US" sz="1500" dirty="0"/>
-          </a:p>
-          <a:p>
-            <a:pPr indent="0" marL="0">
+            <a:endParaRPr lang="en-US" sz="2000" b="1" dirty="0">
+              <a:solidFill>
+                <a:schemeClr val="bg1"/>
+              </a:solidFill>
+            </a:endParaRPr>
+          </a:p>
+          <a:p>
+            <a:pPr marL="0" indent="0">
               <a:lnSpc>
                 <a:spcPct val="110000"/>
               </a:lnSpc>
               <a:buNone/>
             </a:pPr>
             <a:r>
-              <a:rPr lang="en-US" sz="1500" dirty="0">
-                <a:solidFill>
-                  <a:srgbClr val="4FD1E0"/>
+              <a:rPr lang="en-US" sz="2000" b="1" dirty="0">
+                <a:solidFill>
+                  <a:schemeClr val="bg1"/>
                 </a:solidFill>
                 <a:latin typeface="Consolas" pitchFamily="34" charset="0"/>
                 <a:ea typeface="Consolas" pitchFamily="34" charset="-122"/>
@@ -4310,7 +4169,11 @@
               </a:rPr>
               <a:t>print(summa)   # 10</a:t>
             </a:r>
-            <a:endParaRPr lang="en-US" sz="1500" dirty="0"/>
+            <a:endParaRPr lang="en-US" sz="2000" b="1" dirty="0">
+              <a:solidFill>
+                <a:schemeClr val="bg1"/>
+              </a:solidFill>
+            </a:endParaRPr>
           </a:p>
         </p:txBody>
       </p:sp>
@@ -4362,13 +4225,13 @@
           <a:bodyPr wrap="square" lIns="0" tIns="0" rIns="0" bIns="0" rtlCol="0" anchor="ctr"/>
           <a:lstStyle/>
           <a:p>
-            <a:pPr indent="0" marL="0">
+            <a:pPr marL="0" indent="0">
               <a:buNone/>
             </a:pPr>
             <a:r>
               <a:rPr lang="en-US" sz="1800" b="1" dirty="0">
                 <a:solidFill>
-                  <a:srgbClr val="E8B84B"/>
+                  <a:schemeClr val="bg1"/>
                 </a:solidFill>
                 <a:latin typeface="Calibri" pitchFamily="34" charset="0"/>
                 <a:ea typeface="Calibri" pitchFamily="34" charset="-122"/>
@@ -4376,7 +4239,11 @@
               </a:rPr>
               <a:t>Почему выходит 10, а не 55</a:t>
             </a:r>
-            <a:endParaRPr lang="en-US" sz="1800" dirty="0"/>
+            <a:endParaRPr lang="en-US" sz="1800" dirty="0">
+              <a:solidFill>
+                <a:schemeClr val="bg1"/>
+              </a:solidFill>
+            </a:endParaRPr>
           </a:p>
         </p:txBody>
       </p:sp>
@@ -4401,11 +4268,11 @@
           <a:bodyPr wrap="square" lIns="0" tIns="0" rIns="0" bIns="0" rtlCol="0" anchor="ctr"/>
           <a:lstStyle/>
           <a:p>
-            <a:pPr indent="0" marL="0">
-              <a:buNone/>
-            </a:pPr>
-            <a:r>
-              <a:rPr lang="en-US" sz="1600" dirty="0">
+            <a:pPr marL="0" indent="0">
+              <a:buNone/>
+            </a:pPr>
+            <a:r>
+              <a:rPr lang="en-US" sz="2000" b="1" dirty="0">
                 <a:solidFill>
                   <a:srgbClr val="FFFFFF"/>
                 </a:solidFill>
@@ -4415,7 +4282,7 @@
               </a:rPr>
               <a:t>Обнуление внутри тела срабатывает на каждом шаге. Накопленное стирается, и остаётся только последнее слагаемое — число 10.</a:t>
             </a:r>
-            <a:endParaRPr lang="en-US" sz="1600" dirty="0"/>
+            <a:endParaRPr lang="en-US" sz="2000" b="1" dirty="0"/>
           </a:p>
         </p:txBody>
       </p:sp>
@@ -4435,6 +4302,7 @@
         <a:solidFill>
           <a:srgbClr val="17132E"/>
         </a:solidFill>
+        <a:effectLst/>
       </p:bgPr>
     </p:bg>
     <p:spTree>
@@ -4494,11 +4362,11 @@
           <a:bodyPr wrap="square" lIns="0" tIns="0" rIns="0" bIns="0" rtlCol="0" anchor="ctr"/>
           <a:lstStyle/>
           <a:p>
-            <a:pPr algn="ctr" indent="0" marL="0">
-              <a:buNone/>
-            </a:pPr>
-            <a:r>
-              <a:rPr lang="en-US" sz="1400" b="1" spc="200" kern="0" dirty="0">
+            <a:pPr marL="0" indent="0" algn="ctr">
+              <a:buNone/>
+            </a:pPr>
+            <a:r>
+              <a:rPr lang="en-US" sz="1400" b="1" kern="0" spc="200" dirty="0">
                 <a:solidFill>
                   <a:srgbClr val="17132E"/>
                 </a:solidFill>
@@ -4560,7 +4428,7 @@
           <a:bodyPr wrap="square" lIns="0" tIns="0" rIns="0" bIns="0" rtlCol="0" anchor="ctr"/>
           <a:lstStyle/>
           <a:p>
-            <a:pPr algn="ctr" indent="0" marL="0">
+            <a:pPr marL="0" indent="0" algn="ctr">
               <a:buNone/>
             </a:pPr>
             <a:r>
@@ -4599,7 +4467,7 @@
           <a:bodyPr wrap="square" lIns="0" tIns="0" rIns="0" bIns="0" rtlCol="0" anchor="ctr"/>
           <a:lstStyle/>
           <a:p>
-            <a:pPr indent="0" marL="0">
+            <a:pPr marL="0" indent="0">
               <a:buNone/>
             </a:pPr>
             <a:r>
@@ -4638,13 +4506,13 @@
           <a:bodyPr wrap="square" lIns="0" tIns="0" rIns="0" bIns="0" rtlCol="0" anchor="ctr"/>
           <a:lstStyle/>
           <a:p>
-            <a:pPr indent="0" marL="0">
-              <a:buNone/>
-            </a:pPr>
-            <a:r>
-              <a:rPr lang="en-US" sz="1700" i="1" dirty="0">
-                <a:solidFill>
-                  <a:srgbClr val="F2789F"/>
+            <a:pPr marL="0" indent="0">
+              <a:buNone/>
+            </a:pPr>
+            <a:r>
+              <a:rPr lang="en-US" sz="2000" b="1" i="1" dirty="0">
+                <a:solidFill>
+                  <a:schemeClr val="bg1"/>
                 </a:solidFill>
                 <a:latin typeface="Calibri" pitchFamily="34" charset="0"/>
                 <a:ea typeface="Calibri" pitchFamily="34" charset="-122"/>
@@ -4652,7 +4520,11 @@
               </a:rPr>
               <a:t>Проследите, что происходит с величиной summa на каждом шаге.</a:t>
             </a:r>
-            <a:endParaRPr lang="en-US" sz="1700" dirty="0"/>
+            <a:endParaRPr lang="en-US" sz="2000" b="1" dirty="0">
+              <a:solidFill>
+                <a:schemeClr val="bg1"/>
+              </a:solidFill>
+            </a:endParaRPr>
           </a:p>
         </p:txBody>
       </p:sp>
@@ -4704,11 +4576,11 @@
           <a:bodyPr wrap="square" lIns="0" tIns="0" rIns="0" bIns="0" rtlCol="0" anchor="ctr"/>
           <a:lstStyle/>
           <a:p>
-            <a:pPr indent="0" marL="0">
-              <a:buNone/>
-            </a:pPr>
-            <a:r>
-              <a:rPr lang="en-US" sz="1400" b="1" spc="200" kern="0" dirty="0">
+            <a:pPr marL="0" indent="0">
+              <a:buNone/>
+            </a:pPr>
+            <a:r>
+              <a:rPr lang="en-US" sz="1400" b="1" kern="0" spc="200" dirty="0">
                 <a:solidFill>
                   <a:srgbClr val="A9A3C4"/>
                 </a:solidFill>
@@ -4738,6 +4610,7 @@
         <a:solidFill>
           <a:srgbClr val="17132E"/>
         </a:solidFill>
+        <a:effectLst/>
       </p:bgPr>
     </p:bg>
     <p:spTree>
@@ -4797,11 +4670,11 @@
           <a:bodyPr wrap="square" lIns="0" tIns="0" rIns="0" bIns="0" rtlCol="0" anchor="ctr"/>
           <a:lstStyle/>
           <a:p>
-            <a:pPr algn="ctr" indent="0" marL="0">
-              <a:buNone/>
-            </a:pPr>
-            <a:r>
-              <a:rPr lang="en-US" sz="1500" b="1" spc="200" kern="0" dirty="0">
+            <a:pPr marL="0" indent="0" algn="ctr">
+              <a:buNone/>
+            </a:pPr>
+            <a:r>
+              <a:rPr lang="en-US" sz="1500" b="1" kern="0" spc="200" dirty="0">
                 <a:solidFill>
                   <a:srgbClr val="17132E"/>
                 </a:solidFill>
@@ -4836,7 +4709,7 @@
           <a:bodyPr wrap="square" lIns="0" tIns="0" rIns="0" bIns="0" rtlCol="0" anchor="ctr"/>
           <a:lstStyle/>
           <a:p>
-            <a:pPr indent="0" marL="0">
+            <a:pPr marL="0" indent="0">
               <a:buNone/>
             </a:pPr>
             <a:r>
@@ -4902,7 +4775,7 @@
           <a:bodyPr wrap="square" lIns="0" tIns="0" rIns="0" bIns="0" rtlCol="0" anchor="ctr"/>
           <a:lstStyle/>
           <a:p>
-            <a:pPr indent="0" marL="0">
+            <a:pPr marL="0" indent="0">
               <a:lnSpc>
                 <a:spcPct val="110000"/>
               </a:lnSpc>
@@ -4922,7 +4795,7 @@
             <a:endParaRPr lang="en-US" sz="2400" dirty="0"/>
           </a:p>
           <a:p>
-            <a:pPr indent="0" marL="0">
+            <a:pPr marL="0" indent="0">
               <a:lnSpc>
                 <a:spcPct val="110000"/>
               </a:lnSpc>
@@ -4991,7 +4864,7 @@
           <a:bodyPr wrap="square" lIns="0" tIns="0" rIns="0" bIns="0" rtlCol="0" anchor="ctr"/>
           <a:lstStyle/>
           <a:p>
-            <a:pPr indent="0" marL="0">
+            <a:pPr marL="0" indent="0">
               <a:buNone/>
             </a:pPr>
             <a:r>
@@ -5025,6 +4898,7 @@
         <a:solidFill>
           <a:srgbClr val="17132E"/>
         </a:solidFill>
+        <a:effectLst/>
       </p:bgPr>
     </p:bg>
     <p:spTree>
@@ -5106,11 +4980,11 @@
           <a:bodyPr wrap="square" lIns="0" tIns="0" rIns="0" bIns="0" rtlCol="0" anchor="ctr"/>
           <a:lstStyle/>
           <a:p>
-            <a:pPr indent="0" marL="0">
-              <a:buNone/>
-            </a:pPr>
-            <a:r>
-              <a:rPr lang="en-US" sz="1500" b="1" spc="300" kern="0" dirty="0">
+            <a:pPr marL="0" indent="0">
+              <a:buNone/>
+            </a:pPr>
+            <a:r>
+              <a:rPr lang="en-US" sz="1500" b="1" kern="0" spc="300" dirty="0">
                 <a:solidFill>
                   <a:srgbClr val="3DD6A0"/>
                 </a:solidFill>
@@ -5145,7 +5019,7 @@
           <a:bodyPr wrap="square" lIns="0" tIns="0" rIns="0" bIns="0" rtlCol="0" anchor="ctr"/>
           <a:lstStyle/>
           <a:p>
-            <a:pPr indent="0" marL="0">
+            <a:pPr marL="0" indent="0">
               <a:lnSpc>
                 <a:spcPct val="105000"/>
               </a:lnSpc>
@@ -5187,13 +5061,13 @@
           <a:bodyPr wrap="square" lIns="0" tIns="0" rIns="0" bIns="0" rtlCol="0" anchor="ctr"/>
           <a:lstStyle/>
           <a:p>
-            <a:pPr indent="0" marL="0">
-              <a:buNone/>
-            </a:pPr>
-            <a:r>
-              <a:rPr lang="en-US" sz="1900" dirty="0">
-                <a:solidFill>
-                  <a:srgbClr val="A9A3C4"/>
+            <a:pPr marL="0" indent="0">
+              <a:buNone/>
+            </a:pPr>
+            <a:r>
+              <a:rPr lang="en-US" sz="2400" b="1" dirty="0">
+                <a:solidFill>
+                  <a:schemeClr val="bg1"/>
                 </a:solidFill>
                 <a:latin typeface="Calibri" pitchFamily="34" charset="0"/>
                 <a:ea typeface="Calibri" pitchFamily="34" charset="-122"/>
@@ -5201,7 +5075,11 @@
               </a:rPr>
               <a:t>В цикле у нас были summa и i. Их значения менялись. А бывают величины, которые меняться не должны?</a:t>
             </a:r>
-            <a:endParaRPr lang="en-US" sz="1900" dirty="0"/>
+            <a:endParaRPr lang="en-US" sz="2400" b="1" dirty="0">
+              <a:solidFill>
+                <a:schemeClr val="bg1"/>
+              </a:solidFill>
+            </a:endParaRPr>
           </a:p>
         </p:txBody>
       </p:sp>
@@ -5221,6 +5099,7 @@
         <a:solidFill>
           <a:srgbClr val="17132E"/>
         </a:solidFill>
+        <a:effectLst/>
       </p:bgPr>
     </p:bg>
     <p:spTree>
@@ -5258,7 +5137,7 @@
           <a:bodyPr wrap="square" lIns="0" tIns="0" rIns="0" bIns="0" rtlCol="0" anchor="ctr"/>
           <a:lstStyle/>
           <a:p>
-            <a:pPr indent="0" marL="0">
+            <a:pPr marL="0" indent="0">
               <a:buNone/>
             </a:pPr>
             <a:r>
@@ -5297,13 +5176,13 @@
           <a:bodyPr wrap="square" lIns="0" tIns="0" rIns="0" bIns="0" rtlCol="0" anchor="ctr"/>
           <a:lstStyle/>
           <a:p>
-            <a:pPr indent="0" marL="0">
-              <a:buNone/>
-            </a:pPr>
-            <a:r>
-              <a:rPr lang="en-US" sz="1600" i="1" dirty="0">
-                <a:solidFill>
-                  <a:srgbClr val="A9A3C4"/>
+            <a:pPr marL="0" indent="0">
+              <a:buNone/>
+            </a:pPr>
+            <a:r>
+              <a:rPr lang="en-US" sz="2400" b="1" i="1" dirty="0">
+                <a:solidFill>
+                  <a:schemeClr val="bg1"/>
                 </a:solidFill>
                 <a:latin typeface="Calibri" pitchFamily="34" charset="0"/>
                 <a:ea typeface="Calibri" pitchFamily="34" charset="-122"/>
@@ -5311,7 +5190,11 @@
               </a:rPr>
               <a:t>У каждой величины есть три признака</a:t>
             </a:r>
-            <a:endParaRPr lang="en-US" sz="1600" dirty="0"/>
+            <a:endParaRPr lang="en-US" sz="2400" b="1" dirty="0">
+              <a:solidFill>
+                <a:schemeClr val="bg1"/>
+              </a:solidFill>
+            </a:endParaRPr>
           </a:p>
         </p:txBody>
       </p:sp>
@@ -5363,13 +5246,13 @@
           <a:bodyPr wrap="square" lIns="0" tIns="0" rIns="0" bIns="0" rtlCol="0" anchor="ctr"/>
           <a:lstStyle/>
           <a:p>
-            <a:pPr indent="0" marL="0">
+            <a:pPr marL="0" indent="0">
               <a:buNone/>
             </a:pPr>
             <a:r>
               <a:rPr lang="en-US" sz="2200" b="1" dirty="0">
                 <a:solidFill>
-                  <a:srgbClr val="8B7CF6"/>
+                  <a:schemeClr val="bg1"/>
                 </a:solidFill>
                 <a:latin typeface="Calibri" pitchFamily="34" charset="0"/>
                 <a:ea typeface="Calibri" pitchFamily="34" charset="-122"/>
@@ -5377,7 +5260,11 @@
               </a:rPr>
               <a:t>Имя</a:t>
             </a:r>
-            <a:endParaRPr lang="en-US" sz="2200" dirty="0"/>
+            <a:endParaRPr lang="en-US" sz="2200" dirty="0">
+              <a:solidFill>
+                <a:schemeClr val="bg1"/>
+              </a:solidFill>
+            </a:endParaRPr>
           </a:p>
         </p:txBody>
       </p:sp>
@@ -5402,13 +5289,13 @@
           <a:bodyPr wrap="square" lIns="0" tIns="0" rIns="0" bIns="0" rtlCol="0" anchor="ctr"/>
           <a:lstStyle/>
           <a:p>
-            <a:pPr indent="0" marL="0">
-              <a:buNone/>
-            </a:pPr>
-            <a:r>
-              <a:rPr lang="en-US" sz="1500" dirty="0">
-                <a:solidFill>
-                  <a:srgbClr val="FFFFFF"/>
+            <a:pPr marL="0" indent="0">
+              <a:buNone/>
+            </a:pPr>
+            <a:r>
+              <a:rPr lang="en-US" sz="2400" b="1" dirty="0">
+                <a:solidFill>
+                  <a:schemeClr val="bg1"/>
                 </a:solidFill>
                 <a:latin typeface="Calibri" pitchFamily="34" charset="0"/>
                 <a:ea typeface="Calibri" pitchFamily="34" charset="-122"/>
@@ -5416,7 +5303,11 @@
               </a:rPr>
               <a:t>Как мы к ней обращаемся</a:t>
             </a:r>
-            <a:endParaRPr lang="en-US" sz="1500" dirty="0"/>
+            <a:endParaRPr lang="en-US" sz="2400" b="1" dirty="0">
+              <a:solidFill>
+                <a:schemeClr val="bg1"/>
+              </a:solidFill>
+            </a:endParaRPr>
           </a:p>
         </p:txBody>
       </p:sp>
@@ -5441,13 +5332,13 @@
           <a:bodyPr wrap="square" lIns="0" tIns="0" rIns="0" bIns="0" rtlCol="0" anchor="ctr"/>
           <a:lstStyle/>
           <a:p>
-            <a:pPr indent="0" marL="0">
-              <a:buNone/>
-            </a:pPr>
-            <a:r>
-              <a:rPr lang="en-US" sz="1500" dirty="0">
-                <a:solidFill>
-                  <a:srgbClr val="A9A3C4"/>
+            <a:pPr marL="0" indent="0">
+              <a:buNone/>
+            </a:pPr>
+            <a:r>
+              <a:rPr lang="en-US" sz="2000" b="1" dirty="0">
+                <a:solidFill>
+                  <a:schemeClr val="bg1"/>
                 </a:solidFill>
                 <a:latin typeface="Consolas" pitchFamily="34" charset="0"/>
                 <a:ea typeface="Consolas" pitchFamily="34" charset="-122"/>
@@ -5455,7 +5346,11 @@
               </a:rPr>
               <a:t>summa, ball, MAX_BALL</a:t>
             </a:r>
-            <a:endParaRPr lang="en-US" sz="1500" dirty="0"/>
+            <a:endParaRPr lang="en-US" sz="2000" b="1" dirty="0">
+              <a:solidFill>
+                <a:schemeClr val="bg1"/>
+              </a:solidFill>
+            </a:endParaRPr>
           </a:p>
         </p:txBody>
       </p:sp>
@@ -5507,13 +5402,13 @@
           <a:bodyPr wrap="square" lIns="0" tIns="0" rIns="0" bIns="0" rtlCol="0" anchor="ctr"/>
           <a:lstStyle/>
           <a:p>
-            <a:pPr indent="0" marL="0">
+            <a:pPr marL="0" indent="0">
               <a:buNone/>
             </a:pPr>
             <a:r>
               <a:rPr lang="en-US" sz="2200" b="1" dirty="0">
                 <a:solidFill>
-                  <a:srgbClr val="4FD1E0"/>
+                  <a:schemeClr val="bg1"/>
                 </a:solidFill>
                 <a:latin typeface="Calibri" pitchFamily="34" charset="0"/>
                 <a:ea typeface="Calibri" pitchFamily="34" charset="-122"/>
@@ -5521,7 +5416,11 @@
               </a:rPr>
               <a:t>Значение</a:t>
             </a:r>
-            <a:endParaRPr lang="en-US" sz="2200" dirty="0"/>
+            <a:endParaRPr lang="en-US" sz="2200" dirty="0">
+              <a:solidFill>
+                <a:schemeClr val="bg1"/>
+              </a:solidFill>
+            </a:endParaRPr>
           </a:p>
         </p:txBody>
       </p:sp>
@@ -5546,11 +5445,11 @@
           <a:bodyPr wrap="square" lIns="0" tIns="0" rIns="0" bIns="0" rtlCol="0" anchor="ctr"/>
           <a:lstStyle/>
           <a:p>
-            <a:pPr indent="0" marL="0">
-              <a:buNone/>
-            </a:pPr>
-            <a:r>
-              <a:rPr lang="en-US" sz="1500" dirty="0">
+            <a:pPr marL="0" indent="0">
+              <a:buNone/>
+            </a:pPr>
+            <a:r>
+              <a:rPr lang="en-US" sz="2000" dirty="0">
                 <a:solidFill>
                   <a:srgbClr val="FFFFFF"/>
                 </a:solidFill>
@@ -5560,7 +5459,7 @@
               </a:rPr>
               <a:t>Что в ней хранится сейчас</a:t>
             </a:r>
-            <a:endParaRPr lang="en-US" sz="1500" dirty="0"/>
+            <a:endParaRPr lang="en-US" sz="2000" dirty="0"/>
           </a:p>
         </p:txBody>
       </p:sp>
@@ -5585,13 +5484,13 @@
           <a:bodyPr wrap="square" lIns="0" tIns="0" rIns="0" bIns="0" rtlCol="0" anchor="ctr"/>
           <a:lstStyle/>
           <a:p>
-            <a:pPr indent="0" marL="0">
-              <a:buNone/>
-            </a:pPr>
-            <a:r>
-              <a:rPr lang="en-US" sz="1500" dirty="0">
-                <a:solidFill>
-                  <a:srgbClr val="A9A3C4"/>
+            <a:pPr marL="0" indent="0">
+              <a:buNone/>
+            </a:pPr>
+            <a:r>
+              <a:rPr lang="en-US" sz="2000" b="1" dirty="0">
+                <a:solidFill>
+                  <a:schemeClr val="bg1"/>
                 </a:solidFill>
                 <a:latin typeface="Consolas" pitchFamily="34" charset="0"/>
                 <a:ea typeface="Consolas" pitchFamily="34" charset="-122"/>
@@ -5599,7 +5498,11 @@
               </a:rPr>
               <a:t>0, 4.5, 5</a:t>
             </a:r>
-            <a:endParaRPr lang="en-US" sz="1500" dirty="0"/>
+            <a:endParaRPr lang="en-US" sz="2000" b="1" dirty="0">
+              <a:solidFill>
+                <a:schemeClr val="bg1"/>
+              </a:solidFill>
+            </a:endParaRPr>
           </a:p>
         </p:txBody>
       </p:sp>
@@ -5651,13 +5554,13 @@
           <a:bodyPr wrap="square" lIns="0" tIns="0" rIns="0" bIns="0" rtlCol="0" anchor="ctr"/>
           <a:lstStyle/>
           <a:p>
-            <a:pPr indent="0" marL="0">
+            <a:pPr marL="0" indent="0">
               <a:buNone/>
             </a:pPr>
             <a:r>
               <a:rPr lang="en-US" sz="2200" b="1" dirty="0">
                 <a:solidFill>
-                  <a:srgbClr val="3DD6A0"/>
+                  <a:schemeClr val="bg1"/>
                 </a:solidFill>
                 <a:latin typeface="Calibri" pitchFamily="34" charset="0"/>
                 <a:ea typeface="Calibri" pitchFamily="34" charset="-122"/>
@@ -5665,7 +5568,11 @@
               </a:rPr>
               <a:t>Тип</a:t>
             </a:r>
-            <a:endParaRPr lang="en-US" sz="2200" dirty="0"/>
+            <a:endParaRPr lang="en-US" sz="2200" dirty="0">
+              <a:solidFill>
+                <a:schemeClr val="bg1"/>
+              </a:solidFill>
+            </a:endParaRPr>
           </a:p>
         </p:txBody>
       </p:sp>
@@ -5690,11 +5597,11 @@
           <a:bodyPr wrap="square" lIns="0" tIns="0" rIns="0" bIns="0" rtlCol="0" anchor="ctr"/>
           <a:lstStyle/>
           <a:p>
-            <a:pPr indent="0" marL="0">
-              <a:buNone/>
-            </a:pPr>
-            <a:r>
-              <a:rPr lang="en-US" sz="1500" dirty="0">
+            <a:pPr marL="0" indent="0">
+              <a:buNone/>
+            </a:pPr>
+            <a:r>
+              <a:rPr lang="en-US" sz="2000" dirty="0">
                 <a:solidFill>
                   <a:srgbClr val="FFFFFF"/>
                 </a:solidFill>
@@ -5704,7 +5611,7 @@
               </a:rPr>
               <a:t>Какого рода это данное</a:t>
             </a:r>
-            <a:endParaRPr lang="en-US" sz="1500" dirty="0"/>
+            <a:endParaRPr lang="en-US" sz="2000" dirty="0"/>
           </a:p>
         </p:txBody>
       </p:sp>
@@ -5729,13 +5636,13 @@
           <a:bodyPr wrap="square" lIns="0" tIns="0" rIns="0" bIns="0" rtlCol="0" anchor="ctr"/>
           <a:lstStyle/>
           <a:p>
-            <a:pPr indent="0" marL="0">
-              <a:buNone/>
-            </a:pPr>
-            <a:r>
-              <a:rPr lang="en-US" sz="1500" dirty="0">
-                <a:solidFill>
-                  <a:srgbClr val="A9A3C4"/>
+            <a:pPr marL="0" indent="0">
+              <a:buNone/>
+            </a:pPr>
+            <a:r>
+              <a:rPr lang="en-US" sz="2000" b="1" dirty="0">
+                <a:solidFill>
+                  <a:schemeClr val="bg1"/>
                 </a:solidFill>
                 <a:latin typeface="Consolas" pitchFamily="34" charset="0"/>
                 <a:ea typeface="Consolas" pitchFamily="34" charset="-122"/>
@@ -5743,7 +5650,11 @@
               </a:rPr>
               <a:t>целое, дробное, строка</a:t>
             </a:r>
-            <a:endParaRPr lang="en-US" sz="1500" dirty="0"/>
+            <a:endParaRPr lang="en-US" sz="2000" b="1" dirty="0">
+              <a:solidFill>
+                <a:schemeClr val="bg1"/>
+              </a:solidFill>
+            </a:endParaRPr>
           </a:p>
         </p:txBody>
       </p:sp>
@@ -5795,16 +5706,16 @@
           <a:bodyPr wrap="square" lIns="0" tIns="0" rIns="0" bIns="0" rtlCol="0" anchor="ctr"/>
           <a:lstStyle/>
           <a:p>
-            <a:pPr indent="0" marL="0">
+            <a:pPr marL="0" indent="0">
               <a:lnSpc>
                 <a:spcPct val="110000"/>
               </a:lnSpc>
               <a:buNone/>
             </a:pPr>
             <a:r>
-              <a:rPr lang="en-US" sz="1700" dirty="0">
-                <a:solidFill>
-                  <a:srgbClr val="4FD1E0"/>
+              <a:rPr lang="en-US" sz="2000" b="1" dirty="0">
+                <a:solidFill>
+                  <a:schemeClr val="bg1"/>
                 </a:solidFill>
                 <a:latin typeface="Consolas" pitchFamily="34" charset="0"/>
                 <a:ea typeface="Consolas" pitchFamily="34" charset="-122"/>
@@ -5812,19 +5723,23 @@
               </a:rPr>
               <a:t>ball = 4.5</a:t>
             </a:r>
-            <a:endParaRPr lang="en-US" sz="1700" dirty="0"/>
-          </a:p>
-          <a:p>
-            <a:pPr indent="0" marL="0">
+            <a:endParaRPr lang="en-US" sz="2000" b="1" dirty="0">
+              <a:solidFill>
+                <a:schemeClr val="bg1"/>
+              </a:solidFill>
+            </a:endParaRPr>
+          </a:p>
+          <a:p>
+            <a:pPr marL="0" indent="0">
               <a:lnSpc>
                 <a:spcPct val="110000"/>
               </a:lnSpc>
               <a:buNone/>
             </a:pPr>
             <a:r>
-              <a:rPr lang="en-US" sz="1700" dirty="0">
-                <a:solidFill>
-                  <a:srgbClr val="4FD1E0"/>
+              <a:rPr lang="en-US" sz="2000" b="1" dirty="0">
+                <a:solidFill>
+                  <a:schemeClr val="bg1"/>
                 </a:solidFill>
                 <a:latin typeface="Consolas" pitchFamily="34" charset="0"/>
                 <a:ea typeface="Consolas" pitchFamily="34" charset="-122"/>
@@ -5832,19 +5747,23 @@
               </a:rPr>
               <a:t>#  ^     ^</a:t>
             </a:r>
-            <a:endParaRPr lang="en-US" sz="1700" dirty="0"/>
-          </a:p>
-          <a:p>
-            <a:pPr indent="0" marL="0">
+            <a:endParaRPr lang="en-US" sz="2000" b="1" dirty="0">
+              <a:solidFill>
+                <a:schemeClr val="bg1"/>
+              </a:solidFill>
+            </a:endParaRPr>
+          </a:p>
+          <a:p>
+            <a:pPr marL="0" indent="0">
               <a:lnSpc>
                 <a:spcPct val="110000"/>
               </a:lnSpc>
               <a:buNone/>
             </a:pPr>
             <a:r>
-              <a:rPr lang="en-US" sz="1700" dirty="0">
-                <a:solidFill>
-                  <a:srgbClr val="4FD1E0"/>
+              <a:rPr lang="en-US" sz="2000" b="1" dirty="0">
+                <a:solidFill>
+                  <a:schemeClr val="bg1"/>
                 </a:solidFill>
                 <a:latin typeface="Consolas" pitchFamily="34" charset="0"/>
                 <a:ea typeface="Consolas" pitchFamily="34" charset="-122"/>
@@ -5852,7 +5771,11 @@
               </a:rPr>
               <a:t># имя  значение,  тип — дробное</a:t>
             </a:r>
-            <a:endParaRPr lang="en-US" sz="1700" dirty="0"/>
+            <a:endParaRPr lang="en-US" sz="2000" b="1" dirty="0">
+              <a:solidFill>
+                <a:schemeClr val="bg1"/>
+              </a:solidFill>
+            </a:endParaRPr>
           </a:p>
         </p:txBody>
       </p:sp>
@@ -5877,13 +5800,13 @@
           <a:bodyPr wrap="square" lIns="0" tIns="0" rIns="0" bIns="0" rtlCol="0" anchor="ctr"/>
           <a:lstStyle/>
           <a:p>
-            <a:pPr indent="0" marL="0">
-              <a:buNone/>
-            </a:pPr>
-            <a:r>
-              <a:rPr lang="en-US" sz="1700" i="1" dirty="0">
-                <a:solidFill>
-                  <a:srgbClr val="4FD1E0"/>
+            <a:pPr marL="0" indent="0">
+              <a:buNone/>
+            </a:pPr>
+            <a:r>
+              <a:rPr lang="en-US" sz="2400" i="1" dirty="0">
+                <a:solidFill>
+                  <a:schemeClr val="bg1"/>
                 </a:solidFill>
                 <a:latin typeface="Calibri" pitchFamily="34" charset="0"/>
                 <a:ea typeface="Calibri" pitchFamily="34" charset="-122"/>
@@ -5891,7 +5814,11 @@
               </a:rPr>
               <a:t>Тип не указывают отдельно: язык определяет его сам по виду значения.</a:t>
             </a:r>
-            <a:endParaRPr lang="en-US" sz="1700" dirty="0"/>
+            <a:endParaRPr lang="en-US" sz="2400" dirty="0">
+              <a:solidFill>
+                <a:schemeClr val="bg1"/>
+              </a:solidFill>
+            </a:endParaRPr>
           </a:p>
         </p:txBody>
       </p:sp>
@@ -5911,6 +5838,7 @@
         <a:solidFill>
           <a:srgbClr val="17132E"/>
         </a:solidFill>
+        <a:effectLst/>
       </p:bgPr>
     </p:bg>
     <p:spTree>
@@ -5948,7 +5876,7 @@
           <a:bodyPr wrap="square" lIns="0" tIns="0" rIns="0" bIns="0" rtlCol="0" anchor="ctr"/>
           <a:lstStyle/>
           <a:p>
-            <a:pPr indent="0" marL="0">
+            <a:pPr marL="0" indent="0">
               <a:buNone/>
             </a:pPr>
             <a:r>
@@ -6014,13 +5942,13 @@
           <a:bodyPr wrap="square" lIns="0" tIns="0" rIns="0" bIns="0" rtlCol="0" anchor="ctr"/>
           <a:lstStyle/>
           <a:p>
-            <a:pPr indent="0" marL="0">
+            <a:pPr marL="0" indent="0">
               <a:buNone/>
             </a:pPr>
             <a:r>
               <a:rPr lang="en-US" sz="2100" b="1" dirty="0">
                 <a:solidFill>
-                  <a:srgbClr val="4FD1E0"/>
+                  <a:schemeClr val="bg1"/>
                 </a:solidFill>
                 <a:latin typeface="Calibri" pitchFamily="34" charset="0"/>
                 <a:ea typeface="Calibri" pitchFamily="34" charset="-122"/>
@@ -6028,7 +5956,11 @@
               </a:rPr>
               <a:t>Переменная</a:t>
             </a:r>
-            <a:endParaRPr lang="en-US" sz="2100" dirty="0"/>
+            <a:endParaRPr lang="en-US" sz="2100" dirty="0">
+              <a:solidFill>
+                <a:schemeClr val="bg1"/>
+              </a:solidFill>
+            </a:endParaRPr>
           </a:p>
         </p:txBody>
       </p:sp>
@@ -6053,11 +5985,11 @@
           <a:bodyPr wrap="square" lIns="0" tIns="0" rIns="0" bIns="0" rtlCol="0" anchor="ctr"/>
           <a:lstStyle/>
           <a:p>
-            <a:pPr indent="0" marL="0">
-              <a:buNone/>
-            </a:pPr>
-            <a:r>
-              <a:rPr lang="en-US" sz="1500" dirty="0">
+            <a:pPr marL="0" indent="0">
+              <a:buNone/>
+            </a:pPr>
+            <a:r>
+              <a:rPr lang="en-US" sz="2000" dirty="0">
                 <a:solidFill>
                   <a:srgbClr val="FFFFFF"/>
                 </a:solidFill>
@@ -6067,7 +5999,7 @@
               </a:rPr>
               <a:t>Значение меняется по ходу программы</a:t>
             </a:r>
-            <a:endParaRPr lang="en-US" sz="1500" dirty="0"/>
+            <a:endParaRPr lang="en-US" sz="2000" dirty="0"/>
           </a:p>
         </p:txBody>
       </p:sp>
@@ -6119,16 +6051,16 @@
           <a:bodyPr wrap="square" lIns="0" tIns="0" rIns="0" bIns="0" rtlCol="0" anchor="ctr"/>
           <a:lstStyle/>
           <a:p>
-            <a:pPr indent="0" marL="0">
+            <a:pPr marL="0" indent="0">
               <a:lnSpc>
                 <a:spcPct val="110000"/>
               </a:lnSpc>
               <a:buNone/>
             </a:pPr>
             <a:r>
-              <a:rPr lang="en-US" sz="1500" dirty="0">
-                <a:solidFill>
-                  <a:srgbClr val="4FD1E0"/>
+              <a:rPr lang="en-US" sz="2000" b="1" dirty="0">
+                <a:solidFill>
+                  <a:schemeClr val="bg1"/>
                 </a:solidFill>
                 <a:latin typeface="Consolas" pitchFamily="34" charset="0"/>
                 <a:ea typeface="Consolas" pitchFamily="34" charset="-122"/>
@@ -6136,19 +6068,23 @@
               </a:rPr>
               <a:t>summa = 0</a:t>
             </a:r>
-            <a:endParaRPr lang="en-US" sz="1500" dirty="0"/>
-          </a:p>
-          <a:p>
-            <a:pPr indent="0" marL="0">
+            <a:endParaRPr lang="en-US" sz="2000" b="1" dirty="0">
+              <a:solidFill>
+                <a:schemeClr val="bg1"/>
+              </a:solidFill>
+            </a:endParaRPr>
+          </a:p>
+          <a:p>
+            <a:pPr marL="0" indent="0">
               <a:lnSpc>
                 <a:spcPct val="110000"/>
               </a:lnSpc>
               <a:buNone/>
             </a:pPr>
             <a:r>
-              <a:rPr lang="en-US" sz="1500" dirty="0">
-                <a:solidFill>
-                  <a:srgbClr val="4FD1E0"/>
+              <a:rPr lang="en-US" sz="2000" b="1" dirty="0">
+                <a:solidFill>
+                  <a:schemeClr val="bg1"/>
                 </a:solidFill>
                 <a:latin typeface="Consolas" pitchFamily="34" charset="0"/>
                 <a:ea typeface="Consolas" pitchFamily="34" charset="-122"/>
@@ -6156,19 +6092,23 @@
               </a:rPr>
               <a:t>i = 1</a:t>
             </a:r>
-            <a:endParaRPr lang="en-US" sz="1500" dirty="0"/>
-          </a:p>
-          <a:p>
-            <a:pPr indent="0" marL="0">
+            <a:endParaRPr lang="en-US" sz="2000" b="1" dirty="0">
+              <a:solidFill>
+                <a:schemeClr val="bg1"/>
+              </a:solidFill>
+            </a:endParaRPr>
+          </a:p>
+          <a:p>
+            <a:pPr marL="0" indent="0">
               <a:lnSpc>
                 <a:spcPct val="110000"/>
               </a:lnSpc>
               <a:buNone/>
             </a:pPr>
             <a:r>
-              <a:rPr lang="en-US" sz="1500" dirty="0">
-                <a:solidFill>
-                  <a:srgbClr val="4FD1E0"/>
+              <a:rPr lang="en-US" sz="2000" b="1" dirty="0">
+                <a:solidFill>
+                  <a:schemeClr val="bg1"/>
                 </a:solidFill>
                 <a:latin typeface="Consolas" pitchFamily="34" charset="0"/>
                 <a:ea typeface="Consolas" pitchFamily="34" charset="-122"/>
@@ -6176,7 +6116,11 @@
               </a:rPr>
               <a:t>ball = 4.5</a:t>
             </a:r>
-            <a:endParaRPr lang="en-US" sz="1500" dirty="0"/>
+            <a:endParaRPr lang="en-US" sz="2000" b="1" dirty="0">
+              <a:solidFill>
+                <a:schemeClr val="bg1"/>
+              </a:solidFill>
+            </a:endParaRPr>
           </a:p>
         </p:txBody>
       </p:sp>
@@ -6228,13 +6172,13 @@
           <a:bodyPr wrap="square" lIns="0" tIns="0" rIns="0" bIns="0" rtlCol="0" anchor="ctr"/>
           <a:lstStyle/>
           <a:p>
-            <a:pPr indent="0" marL="0">
+            <a:pPr marL="0" indent="0">
               <a:buNone/>
             </a:pPr>
             <a:r>
               <a:rPr lang="en-US" sz="2100" b="1" dirty="0">
                 <a:solidFill>
-                  <a:srgbClr val="E8B84B"/>
+                  <a:schemeClr val="bg1"/>
                 </a:solidFill>
                 <a:latin typeface="Calibri" pitchFamily="34" charset="0"/>
                 <a:ea typeface="Calibri" pitchFamily="34" charset="-122"/>
@@ -6242,7 +6186,11 @@
               </a:rPr>
               <a:t>Константа</a:t>
             </a:r>
-            <a:endParaRPr lang="en-US" sz="2100" dirty="0"/>
+            <a:endParaRPr lang="en-US" sz="2100" dirty="0">
+              <a:solidFill>
+                <a:schemeClr val="bg1"/>
+              </a:solidFill>
+            </a:endParaRPr>
           </a:p>
         </p:txBody>
       </p:sp>
@@ -6267,11 +6215,11 @@
           <a:bodyPr wrap="square" lIns="0" tIns="0" rIns="0" bIns="0" rtlCol="0" anchor="ctr"/>
           <a:lstStyle/>
           <a:p>
-            <a:pPr indent="0" marL="0">
-              <a:buNone/>
-            </a:pPr>
-            <a:r>
-              <a:rPr lang="en-US" sz="1500" dirty="0">
+            <a:pPr marL="0" indent="0">
+              <a:buNone/>
+            </a:pPr>
+            <a:r>
+              <a:rPr lang="en-US" sz="2000" dirty="0">
                 <a:solidFill>
                   <a:srgbClr val="FFFFFF"/>
                 </a:solidFill>
@@ -6281,7 +6229,7 @@
               </a:rPr>
               <a:t>Значение остаётся неизменным</a:t>
             </a:r>
-            <a:endParaRPr lang="en-US" sz="1500" dirty="0"/>
+            <a:endParaRPr lang="en-US" sz="2000" dirty="0"/>
           </a:p>
         </p:txBody>
       </p:sp>
@@ -6333,16 +6281,16 @@
           <a:bodyPr wrap="square" lIns="0" tIns="0" rIns="0" bIns="0" rtlCol="0" anchor="ctr"/>
           <a:lstStyle/>
           <a:p>
-            <a:pPr indent="0" marL="0">
+            <a:pPr marL="0" indent="0">
               <a:lnSpc>
                 <a:spcPct val="110000"/>
               </a:lnSpc>
               <a:buNone/>
             </a:pPr>
             <a:r>
-              <a:rPr lang="en-US" sz="1500" dirty="0">
-                <a:solidFill>
-                  <a:srgbClr val="4FD1E0"/>
+              <a:rPr lang="en-US" sz="2000" dirty="0">
+                <a:solidFill>
+                  <a:schemeClr val="bg1"/>
                 </a:solidFill>
                 <a:latin typeface="Consolas" pitchFamily="34" charset="0"/>
                 <a:ea typeface="Consolas" pitchFamily="34" charset="-122"/>
@@ -6350,19 +6298,23 @@
               </a:rPr>
               <a:t>MAX_BALL = 5</a:t>
             </a:r>
-            <a:endParaRPr lang="en-US" sz="1500" dirty="0"/>
-          </a:p>
-          <a:p>
-            <a:pPr indent="0" marL="0">
+            <a:endParaRPr lang="en-US" sz="2000" dirty="0">
+              <a:solidFill>
+                <a:schemeClr val="bg1"/>
+              </a:solidFill>
+            </a:endParaRPr>
+          </a:p>
+          <a:p>
+            <a:pPr marL="0" indent="0">
               <a:lnSpc>
                 <a:spcPct val="110000"/>
               </a:lnSpc>
               <a:buNone/>
             </a:pPr>
             <a:r>
-              <a:rPr lang="en-US" sz="1500" dirty="0">
-                <a:solidFill>
-                  <a:srgbClr val="4FD1E0"/>
+              <a:rPr lang="en-US" sz="2000" dirty="0">
+                <a:solidFill>
+                  <a:schemeClr val="bg1"/>
                 </a:solidFill>
                 <a:latin typeface="Consolas" pitchFamily="34" charset="0"/>
                 <a:ea typeface="Consolas" pitchFamily="34" charset="-122"/>
@@ -6370,19 +6322,23 @@
               </a:rPr>
               <a:t>MINUT_V_CHASE = 60</a:t>
             </a:r>
-            <a:endParaRPr lang="en-US" sz="1500" dirty="0"/>
-          </a:p>
-          <a:p>
-            <a:pPr indent="0" marL="0">
+            <a:endParaRPr lang="en-US" sz="2000" dirty="0">
+              <a:solidFill>
+                <a:schemeClr val="bg1"/>
+              </a:solidFill>
+            </a:endParaRPr>
+          </a:p>
+          <a:p>
+            <a:pPr marL="0" indent="0">
               <a:lnSpc>
                 <a:spcPct val="110000"/>
               </a:lnSpc>
               <a:buNone/>
             </a:pPr>
             <a:r>
-              <a:rPr lang="en-US" sz="1500" dirty="0">
-                <a:solidFill>
-                  <a:srgbClr val="4FD1E0"/>
+              <a:rPr lang="en-US" sz="2000" dirty="0">
+                <a:solidFill>
+                  <a:schemeClr val="bg1"/>
                 </a:solidFill>
                 <a:latin typeface="Consolas" pitchFamily="34" charset="0"/>
                 <a:ea typeface="Consolas" pitchFamily="34" charset="-122"/>
@@ -6390,7 +6346,11 @@
               </a:rPr>
               <a:t>PI = 3.14</a:t>
             </a:r>
-            <a:endParaRPr lang="en-US" sz="1500" dirty="0"/>
+            <a:endParaRPr lang="en-US" sz="2000" dirty="0">
+              <a:solidFill>
+                <a:schemeClr val="bg1"/>
+              </a:solidFill>
+            </a:endParaRPr>
           </a:p>
         </p:txBody>
       </p:sp>
@@ -6442,13 +6402,13 @@
           <a:bodyPr wrap="square" lIns="0" tIns="0" rIns="0" bIns="0" rtlCol="0" anchor="ctr"/>
           <a:lstStyle/>
           <a:p>
-            <a:pPr indent="0" marL="0">
-              <a:buNone/>
-            </a:pPr>
-            <a:r>
-              <a:rPr lang="en-US" sz="1900" b="1" dirty="0">
-                <a:solidFill>
-                  <a:srgbClr val="3DD6A0"/>
+            <a:pPr marL="0" indent="0">
+              <a:buNone/>
+            </a:pPr>
+            <a:r>
+              <a:rPr lang="en-US" sz="2400" b="1" dirty="0">
+                <a:solidFill>
+                  <a:schemeClr val="bg1"/>
                 </a:solidFill>
                 <a:latin typeface="Calibri" pitchFamily="34" charset="0"/>
                 <a:ea typeface="Calibri" pitchFamily="34" charset="-122"/>
@@ -6456,7 +6416,11 @@
               </a:rPr>
               <a:t>Зачем нужны константы</a:t>
             </a:r>
-            <a:endParaRPr lang="en-US" sz="1900" dirty="0"/>
+            <a:endParaRPr lang="en-US" sz="2400" dirty="0">
+              <a:solidFill>
+                <a:schemeClr val="bg1"/>
+              </a:solidFill>
+            </a:endParaRPr>
           </a:p>
         </p:txBody>
       </p:sp>
@@ -6489,7 +6453,7 @@
               <a:buChar char="•"/>
             </a:pPr>
             <a:r>
-              <a:rPr lang="en-US" sz="1600" dirty="0">
+              <a:rPr lang="en-US" sz="2400" dirty="0">
                 <a:solidFill>
                   <a:srgbClr val="FFFFFF"/>
                 </a:solidFill>
@@ -6499,7 +6463,7 @@
               </a:rPr>
               <a:t>Величина названа, а не спрятана в коде числом: видно, что означает 60</a:t>
             </a:r>
-            <a:endParaRPr lang="en-US" sz="1600" dirty="0"/>
+            <a:endParaRPr lang="en-US" sz="2400" dirty="0"/>
           </a:p>
           <a:p>
             <a:pPr marL="342900" indent="-342900">
@@ -6510,7 +6474,7 @@
               <a:buChar char="•"/>
             </a:pPr>
             <a:r>
-              <a:rPr lang="en-US" sz="1600" dirty="0">
+              <a:rPr lang="en-US" sz="2400" dirty="0">
                 <a:solidFill>
                   <a:srgbClr val="FFFFFF"/>
                 </a:solidFill>
@@ -6520,7 +6484,7 @@
               </a:rPr>
               <a:t>Изменить достаточно в одном месте — а не искать число по всей программе</a:t>
             </a:r>
-            <a:endParaRPr lang="en-US" sz="1600" dirty="0"/>
+            <a:endParaRPr lang="en-US" sz="2400" dirty="0"/>
           </a:p>
           <a:p>
             <a:pPr marL="342900" indent="-342900">
@@ -6531,7 +6495,7 @@
               <a:buChar char="•"/>
             </a:pPr>
             <a:r>
-              <a:rPr lang="en-US" sz="1600" dirty="0">
+              <a:rPr lang="en-US" sz="2400" dirty="0">
                 <a:solidFill>
                   <a:srgbClr val="FFFFFF"/>
                 </a:solidFill>
@@ -6541,7 +6505,7 @@
               </a:rPr>
               <a:t>Заглавные буквы сообщают другому читателю: менять не следует</a:t>
             </a:r>
-            <a:endParaRPr lang="en-US" sz="1600" dirty="0"/>
+            <a:endParaRPr lang="en-US" sz="2400" dirty="0"/>
           </a:p>
         </p:txBody>
       </p:sp>
@@ -6561,6 +6525,7 @@
         <a:solidFill>
           <a:srgbClr val="17132E"/>
         </a:solidFill>
+        <a:effectLst/>
       </p:bgPr>
     </p:bg>
     <p:spTree>
@@ -6598,7 +6563,7 @@
           <a:bodyPr wrap="square" lIns="0" tIns="0" rIns="0" bIns="0" rtlCol="0" anchor="ctr"/>
           <a:lstStyle/>
           <a:p>
-            <a:pPr indent="0" marL="0">
+            <a:pPr marL="0" indent="0">
               <a:buNone/>
             </a:pPr>
             <a:r>
@@ -6637,13 +6602,13 @@
           <a:bodyPr wrap="square" lIns="0" tIns="0" rIns="0" bIns="0" rtlCol="0" anchor="ctr"/>
           <a:lstStyle/>
           <a:p>
-            <a:pPr indent="0" marL="0">
-              <a:buNone/>
-            </a:pPr>
-            <a:r>
-              <a:rPr lang="en-US" sz="1600" i="1" dirty="0">
-                <a:solidFill>
-                  <a:srgbClr val="A9A3C4"/>
+            <a:pPr marL="0" indent="0">
+              <a:buNone/>
+            </a:pPr>
+            <a:r>
+              <a:rPr lang="en-US" sz="2400" b="1" i="1" dirty="0">
+                <a:solidFill>
+                  <a:schemeClr val="bg1"/>
                 </a:solidFill>
                 <a:latin typeface="Calibri" pitchFamily="34" charset="0"/>
                 <a:ea typeface="Calibri" pitchFamily="34" charset="-122"/>
@@ -6651,7 +6616,11 @@
               </a:rPr>
               <a:t>Тип определяет, что с величиной можно делать</a:t>
             </a:r>
-            <a:endParaRPr lang="en-US" sz="1600" dirty="0"/>
+            <a:endParaRPr lang="en-US" sz="2400" b="1" dirty="0">
+              <a:solidFill>
+                <a:schemeClr val="bg1"/>
+              </a:solidFill>
+            </a:endParaRPr>
           </a:p>
         </p:txBody>
       </p:sp>
@@ -6703,13 +6672,13 @@
           <a:bodyPr wrap="square" lIns="0" tIns="0" rIns="0" bIns="0" rtlCol="0" anchor="ctr"/>
           <a:lstStyle/>
           <a:p>
-            <a:pPr indent="0" marL="0">
-              <a:buNone/>
-            </a:pPr>
-            <a:r>
-              <a:rPr lang="en-US" sz="1800" b="1" dirty="0">
-                <a:solidFill>
-                  <a:srgbClr val="4FD1E0"/>
+            <a:pPr marL="0" indent="0">
+              <a:buNone/>
+            </a:pPr>
+            <a:r>
+              <a:rPr lang="en-US" sz="2400" b="1" dirty="0">
+                <a:solidFill>
+                  <a:schemeClr val="bg1"/>
                 </a:solidFill>
                 <a:latin typeface="Calibri" pitchFamily="34" charset="0"/>
                 <a:ea typeface="Calibri" pitchFamily="34" charset="-122"/>
@@ -6717,7 +6686,11 @@
               </a:rPr>
               <a:t>Целый</a:t>
             </a:r>
-            <a:endParaRPr lang="en-US" sz="1800" dirty="0"/>
+            <a:endParaRPr lang="en-US" sz="2400" dirty="0">
+              <a:solidFill>
+                <a:schemeClr val="bg1"/>
+              </a:solidFill>
+            </a:endParaRPr>
           </a:p>
         </p:txBody>
       </p:sp>
@@ -6742,13 +6715,13 @@
           <a:bodyPr wrap="square" lIns="0" tIns="0" rIns="0" bIns="0" rtlCol="0" anchor="ctr"/>
           <a:lstStyle/>
           <a:p>
-            <a:pPr indent="0" marL="0">
-              <a:buNone/>
-            </a:pPr>
-            <a:r>
-              <a:rPr lang="en-US" sz="1600" dirty="0">
-                <a:solidFill>
-                  <a:srgbClr val="4FD1E0"/>
+            <a:pPr marL="0" indent="0">
+              <a:buNone/>
+            </a:pPr>
+            <a:r>
+              <a:rPr lang="en-US" sz="2400" dirty="0">
+                <a:solidFill>
+                  <a:schemeClr val="bg1"/>
                 </a:solidFill>
                 <a:latin typeface="Consolas" pitchFamily="34" charset="0"/>
                 <a:ea typeface="Consolas" pitchFamily="34" charset="-122"/>
@@ -6756,7 +6729,11 @@
               </a:rPr>
               <a:t>int</a:t>
             </a:r>
-            <a:endParaRPr lang="en-US" sz="1600" dirty="0"/>
+            <a:endParaRPr lang="en-US" sz="2400" dirty="0">
+              <a:solidFill>
+                <a:schemeClr val="bg1"/>
+              </a:solidFill>
+            </a:endParaRPr>
           </a:p>
         </p:txBody>
       </p:sp>
@@ -6781,13 +6758,13 @@
           <a:bodyPr wrap="square" lIns="0" tIns="0" rIns="0" bIns="0" rtlCol="0" anchor="ctr"/>
           <a:lstStyle/>
           <a:p>
-            <a:pPr indent="0" marL="0">
-              <a:buNone/>
-            </a:pPr>
-            <a:r>
-              <a:rPr lang="en-US" sz="1500" dirty="0">
-                <a:solidFill>
-                  <a:srgbClr val="FFFFFF"/>
+            <a:pPr marL="0" indent="0">
+              <a:buNone/>
+            </a:pPr>
+            <a:r>
+              <a:rPr lang="en-US" sz="2400" dirty="0">
+                <a:solidFill>
+                  <a:schemeClr val="bg1"/>
                 </a:solidFill>
                 <a:latin typeface="Consolas" pitchFamily="34" charset="0"/>
                 <a:ea typeface="Consolas" pitchFamily="34" charset="-122"/>
@@ -6795,7 +6772,11 @@
               </a:rPr>
               <a:t>10, -3, 0</a:t>
             </a:r>
-            <a:endParaRPr lang="en-US" sz="1500" dirty="0"/>
+            <a:endParaRPr lang="en-US" sz="2400" dirty="0">
+              <a:solidFill>
+                <a:schemeClr val="bg1"/>
+              </a:solidFill>
+            </a:endParaRPr>
           </a:p>
         </p:txBody>
       </p:sp>
@@ -6820,13 +6801,13 @@
           <a:bodyPr wrap="square" lIns="0" tIns="0" rIns="0" bIns="0" rtlCol="0" anchor="ctr"/>
           <a:lstStyle/>
           <a:p>
-            <a:pPr indent="0" marL="0">
-              <a:buNone/>
-            </a:pPr>
-            <a:r>
-              <a:rPr lang="en-US" sz="1400" dirty="0">
-                <a:solidFill>
-                  <a:srgbClr val="A9A3C4"/>
+            <a:pPr marL="0" indent="0">
+              <a:buNone/>
+            </a:pPr>
+            <a:r>
+              <a:rPr lang="en-US" sz="2400" dirty="0">
+                <a:solidFill>
+                  <a:schemeClr val="bg1"/>
                 </a:solidFill>
                 <a:latin typeface="Calibri" pitchFamily="34" charset="0"/>
                 <a:ea typeface="Calibri" pitchFamily="34" charset="-122"/>
@@ -6834,7 +6815,11 @@
               </a:rPr>
               <a:t>Складывать, умножать, делить нацело</a:t>
             </a:r>
-            <a:endParaRPr lang="en-US" sz="1400" dirty="0"/>
+            <a:endParaRPr lang="en-US" sz="2400" dirty="0">
+              <a:solidFill>
+                <a:schemeClr val="bg1"/>
+              </a:solidFill>
+            </a:endParaRPr>
           </a:p>
         </p:txBody>
       </p:sp>
@@ -6886,13 +6871,13 @@
           <a:bodyPr wrap="square" lIns="0" tIns="0" rIns="0" bIns="0" rtlCol="0" anchor="ctr"/>
           <a:lstStyle/>
           <a:p>
-            <a:pPr indent="0" marL="0">
-              <a:buNone/>
-            </a:pPr>
-            <a:r>
-              <a:rPr lang="en-US" sz="1800" b="1" dirty="0">
-                <a:solidFill>
-                  <a:srgbClr val="3DD6A0"/>
+            <a:pPr marL="0" indent="0">
+              <a:buNone/>
+            </a:pPr>
+            <a:r>
+              <a:rPr lang="en-US" sz="2400" b="1" dirty="0">
+                <a:solidFill>
+                  <a:schemeClr val="bg1"/>
                 </a:solidFill>
                 <a:latin typeface="Calibri" pitchFamily="34" charset="0"/>
                 <a:ea typeface="Calibri" pitchFamily="34" charset="-122"/>
@@ -6900,7 +6885,11 @@
               </a:rPr>
               <a:t>Вещественный</a:t>
             </a:r>
-            <a:endParaRPr lang="en-US" sz="1800" dirty="0"/>
+            <a:endParaRPr lang="en-US" sz="2400" dirty="0">
+              <a:solidFill>
+                <a:schemeClr val="bg1"/>
+              </a:solidFill>
+            </a:endParaRPr>
           </a:p>
         </p:txBody>
       </p:sp>
@@ -6925,13 +6914,13 @@
           <a:bodyPr wrap="square" lIns="0" tIns="0" rIns="0" bIns="0" rtlCol="0" anchor="ctr"/>
           <a:lstStyle/>
           <a:p>
-            <a:pPr indent="0" marL="0">
-              <a:buNone/>
-            </a:pPr>
-            <a:r>
-              <a:rPr lang="en-US" sz="1600" dirty="0">
-                <a:solidFill>
-                  <a:srgbClr val="4FD1E0"/>
+            <a:pPr marL="0" indent="0">
+              <a:buNone/>
+            </a:pPr>
+            <a:r>
+              <a:rPr lang="en-US" sz="2400" dirty="0">
+                <a:solidFill>
+                  <a:schemeClr val="bg1"/>
                 </a:solidFill>
                 <a:latin typeface="Consolas" pitchFamily="34" charset="0"/>
                 <a:ea typeface="Consolas" pitchFamily="34" charset="-122"/>
@@ -6939,7 +6928,11 @@
               </a:rPr>
               <a:t>float</a:t>
             </a:r>
-            <a:endParaRPr lang="en-US" sz="1600" dirty="0"/>
+            <a:endParaRPr lang="en-US" sz="2400" dirty="0">
+              <a:solidFill>
+                <a:schemeClr val="bg1"/>
+              </a:solidFill>
+            </a:endParaRPr>
           </a:p>
         </p:txBody>
       </p:sp>
@@ -6964,13 +6957,13 @@
           <a:bodyPr wrap="square" lIns="0" tIns="0" rIns="0" bIns="0" rtlCol="0" anchor="ctr"/>
           <a:lstStyle/>
           <a:p>
-            <a:pPr indent="0" marL="0">
-              <a:buNone/>
-            </a:pPr>
-            <a:r>
-              <a:rPr lang="en-US" sz="1500" dirty="0">
-                <a:solidFill>
-                  <a:srgbClr val="FFFFFF"/>
+            <a:pPr marL="0" indent="0">
+              <a:buNone/>
+            </a:pPr>
+            <a:r>
+              <a:rPr lang="en-US" sz="2400" dirty="0">
+                <a:solidFill>
+                  <a:schemeClr val="bg1"/>
                 </a:solidFill>
                 <a:latin typeface="Consolas" pitchFamily="34" charset="0"/>
                 <a:ea typeface="Consolas" pitchFamily="34" charset="-122"/>
@@ -6978,7 +6971,11 @@
               </a:rPr>
               <a:t>4.5, -0.75</a:t>
             </a:r>
-            <a:endParaRPr lang="en-US" sz="1500" dirty="0"/>
+            <a:endParaRPr lang="en-US" sz="2400" dirty="0">
+              <a:solidFill>
+                <a:schemeClr val="bg1"/>
+              </a:solidFill>
+            </a:endParaRPr>
           </a:p>
         </p:txBody>
       </p:sp>
@@ -7003,13 +7000,13 @@
           <a:bodyPr wrap="square" lIns="0" tIns="0" rIns="0" bIns="0" rtlCol="0" anchor="ctr"/>
           <a:lstStyle/>
           <a:p>
-            <a:pPr indent="0" marL="0">
-              <a:buNone/>
-            </a:pPr>
-            <a:r>
-              <a:rPr lang="en-US" sz="1400" dirty="0">
-                <a:solidFill>
-                  <a:srgbClr val="A9A3C4"/>
+            <a:pPr marL="0" indent="0">
+              <a:buNone/>
+            </a:pPr>
+            <a:r>
+              <a:rPr lang="en-US" sz="2400" dirty="0">
+                <a:solidFill>
+                  <a:schemeClr val="bg1"/>
                 </a:solidFill>
                 <a:latin typeface="Calibri" pitchFamily="34" charset="0"/>
                 <a:ea typeface="Calibri" pitchFamily="34" charset="-122"/>
@@ -7017,7 +7014,11 @@
               </a:rPr>
               <a:t>То же, но с дробной частью</a:t>
             </a:r>
-            <a:endParaRPr lang="en-US" sz="1400" dirty="0"/>
+            <a:endParaRPr lang="en-US" sz="2400" dirty="0">
+              <a:solidFill>
+                <a:schemeClr val="bg1"/>
+              </a:solidFill>
+            </a:endParaRPr>
           </a:p>
         </p:txBody>
       </p:sp>
@@ -7069,13 +7070,13 @@
           <a:bodyPr wrap="square" lIns="0" tIns="0" rIns="0" bIns="0" rtlCol="0" anchor="ctr"/>
           <a:lstStyle/>
           <a:p>
-            <a:pPr indent="0" marL="0">
-              <a:buNone/>
-            </a:pPr>
-            <a:r>
-              <a:rPr lang="en-US" sz="1800" b="1" dirty="0">
-                <a:solidFill>
-                  <a:srgbClr val="8B7CF6"/>
+            <a:pPr marL="0" indent="0">
+              <a:buNone/>
+            </a:pPr>
+            <a:r>
+              <a:rPr lang="en-US" sz="2400" b="1" dirty="0">
+                <a:solidFill>
+                  <a:schemeClr val="bg1"/>
                 </a:solidFill>
                 <a:latin typeface="Calibri" pitchFamily="34" charset="0"/>
                 <a:ea typeface="Calibri" pitchFamily="34" charset="-122"/>
@@ -7083,7 +7084,11 @@
               </a:rPr>
               <a:t>Строковый</a:t>
             </a:r>
-            <a:endParaRPr lang="en-US" sz="1800" dirty="0"/>
+            <a:endParaRPr lang="en-US" sz="2400" dirty="0">
+              <a:solidFill>
+                <a:schemeClr val="bg1"/>
+              </a:solidFill>
+            </a:endParaRPr>
           </a:p>
         </p:txBody>
       </p:sp>
@@ -7108,13 +7113,13 @@
           <a:bodyPr wrap="square" lIns="0" tIns="0" rIns="0" bIns="0" rtlCol="0" anchor="ctr"/>
           <a:lstStyle/>
           <a:p>
-            <a:pPr indent="0" marL="0">
-              <a:buNone/>
-            </a:pPr>
-            <a:r>
-              <a:rPr lang="en-US" sz="1600" dirty="0">
-                <a:solidFill>
-                  <a:srgbClr val="4FD1E0"/>
+            <a:pPr marL="0" indent="0">
+              <a:buNone/>
+            </a:pPr>
+            <a:r>
+              <a:rPr lang="en-US" sz="2400" dirty="0">
+                <a:solidFill>
+                  <a:schemeClr val="bg1"/>
                 </a:solidFill>
                 <a:latin typeface="Consolas" pitchFamily="34" charset="0"/>
                 <a:ea typeface="Consolas" pitchFamily="34" charset="-122"/>
@@ -7122,7 +7127,11 @@
               </a:rPr>
               <a:t>str</a:t>
             </a:r>
-            <a:endParaRPr lang="en-US" sz="1600" dirty="0"/>
+            <a:endParaRPr lang="en-US" sz="2400" dirty="0">
+              <a:solidFill>
+                <a:schemeClr val="bg1"/>
+              </a:solidFill>
+            </a:endParaRPr>
           </a:p>
         </p:txBody>
       </p:sp>
@@ -7147,13 +7156,13 @@
           <a:bodyPr wrap="square" lIns="0" tIns="0" rIns="0" bIns="0" rtlCol="0" anchor="ctr"/>
           <a:lstStyle/>
           <a:p>
-            <a:pPr indent="0" marL="0">
-              <a:buNone/>
-            </a:pPr>
-            <a:r>
-              <a:rPr lang="en-US" sz="1500" dirty="0">
-                <a:solidFill>
-                  <a:srgbClr val="FFFFFF"/>
+            <a:pPr marL="0" indent="0">
+              <a:buNone/>
+            </a:pPr>
+            <a:r>
+              <a:rPr lang="en-US" sz="2400" dirty="0">
+                <a:solidFill>
+                  <a:schemeClr val="bg1"/>
                 </a:solidFill>
                 <a:latin typeface="Consolas" pitchFamily="34" charset="0"/>
                 <a:ea typeface="Consolas" pitchFamily="34" charset="-122"/>
@@ -7161,7 +7170,11 @@
               </a:rPr>
               <a:t>"Фаррух", "10 класс"</a:t>
             </a:r>
-            <a:endParaRPr lang="en-US" sz="1500" dirty="0"/>
+            <a:endParaRPr lang="en-US" sz="2400" dirty="0">
+              <a:solidFill>
+                <a:schemeClr val="bg1"/>
+              </a:solidFill>
+            </a:endParaRPr>
           </a:p>
         </p:txBody>
       </p:sp>
@@ -7186,13 +7199,13 @@
           <a:bodyPr wrap="square" lIns="0" tIns="0" rIns="0" bIns="0" rtlCol="0" anchor="ctr"/>
           <a:lstStyle/>
           <a:p>
-            <a:pPr indent="0" marL="0">
-              <a:buNone/>
-            </a:pPr>
-            <a:r>
-              <a:rPr lang="en-US" sz="1400" dirty="0">
-                <a:solidFill>
-                  <a:srgbClr val="A9A3C4"/>
+            <a:pPr marL="0" indent="0">
+              <a:buNone/>
+            </a:pPr>
+            <a:r>
+              <a:rPr lang="en-US" sz="2400" dirty="0">
+                <a:solidFill>
+                  <a:schemeClr val="bg1"/>
                 </a:solidFill>
                 <a:latin typeface="Calibri" pitchFamily="34" charset="0"/>
                 <a:ea typeface="Calibri" pitchFamily="34" charset="-122"/>
@@ -7200,7 +7213,11 @@
               </a:rPr>
               <a:t>Соединять, измерять длину, брать часть</a:t>
             </a:r>
-            <a:endParaRPr lang="en-US" sz="1400" dirty="0"/>
+            <a:endParaRPr lang="en-US" sz="2400" dirty="0">
+              <a:solidFill>
+                <a:schemeClr val="bg1"/>
+              </a:solidFill>
+            </a:endParaRPr>
           </a:p>
         </p:txBody>
       </p:sp>
@@ -7252,13 +7269,13 @@
           <a:bodyPr wrap="square" lIns="0" tIns="0" rIns="0" bIns="0" rtlCol="0" anchor="ctr"/>
           <a:lstStyle/>
           <a:p>
-            <a:pPr indent="0" marL="0">
-              <a:buNone/>
-            </a:pPr>
-            <a:r>
-              <a:rPr lang="en-US" sz="1800" b="1" dirty="0">
-                <a:solidFill>
-                  <a:srgbClr val="F2789F"/>
+            <a:pPr marL="0" indent="0">
+              <a:buNone/>
+            </a:pPr>
+            <a:r>
+              <a:rPr lang="en-US" sz="2400" b="1" dirty="0">
+                <a:solidFill>
+                  <a:schemeClr val="bg1"/>
                 </a:solidFill>
                 <a:latin typeface="Calibri" pitchFamily="34" charset="0"/>
                 <a:ea typeface="Calibri" pitchFamily="34" charset="-122"/>
@@ -7266,7 +7283,11 @@
               </a:rPr>
               <a:t>Логический</a:t>
             </a:r>
-            <a:endParaRPr lang="en-US" sz="1800" dirty="0"/>
+            <a:endParaRPr lang="en-US" sz="2400" dirty="0">
+              <a:solidFill>
+                <a:schemeClr val="bg1"/>
+              </a:solidFill>
+            </a:endParaRPr>
           </a:p>
         </p:txBody>
       </p:sp>
@@ -7291,13 +7312,13 @@
           <a:bodyPr wrap="square" lIns="0" tIns="0" rIns="0" bIns="0" rtlCol="0" anchor="ctr"/>
           <a:lstStyle/>
           <a:p>
-            <a:pPr indent="0" marL="0">
-              <a:buNone/>
-            </a:pPr>
-            <a:r>
-              <a:rPr lang="en-US" sz="1600" dirty="0">
-                <a:solidFill>
-                  <a:srgbClr val="4FD1E0"/>
+            <a:pPr marL="0" indent="0">
+              <a:buNone/>
+            </a:pPr>
+            <a:r>
+              <a:rPr lang="en-US" sz="2400" dirty="0">
+                <a:solidFill>
+                  <a:schemeClr val="bg1"/>
                 </a:solidFill>
                 <a:latin typeface="Consolas" pitchFamily="34" charset="0"/>
                 <a:ea typeface="Consolas" pitchFamily="34" charset="-122"/>
@@ -7305,7 +7326,11 @@
               </a:rPr>
               <a:t>bool</a:t>
             </a:r>
-            <a:endParaRPr lang="en-US" sz="1600" dirty="0"/>
+            <a:endParaRPr lang="en-US" sz="2400" dirty="0">
+              <a:solidFill>
+                <a:schemeClr val="bg1"/>
+              </a:solidFill>
+            </a:endParaRPr>
           </a:p>
         </p:txBody>
       </p:sp>
@@ -7330,13 +7355,13 @@
           <a:bodyPr wrap="square" lIns="0" tIns="0" rIns="0" bIns="0" rtlCol="0" anchor="ctr"/>
           <a:lstStyle/>
           <a:p>
-            <a:pPr indent="0" marL="0">
-              <a:buNone/>
-            </a:pPr>
-            <a:r>
-              <a:rPr lang="en-US" sz="1500" dirty="0">
-                <a:solidFill>
-                  <a:srgbClr val="FFFFFF"/>
+            <a:pPr marL="0" indent="0">
+              <a:buNone/>
+            </a:pPr>
+            <a:r>
+              <a:rPr lang="en-US" sz="2400" dirty="0">
+                <a:solidFill>
+                  <a:schemeClr val="bg1"/>
                 </a:solidFill>
                 <a:latin typeface="Consolas" pitchFamily="34" charset="0"/>
                 <a:ea typeface="Consolas" pitchFamily="34" charset="-122"/>
@@ -7344,7 +7369,11 @@
               </a:rPr>
               <a:t>True, False</a:t>
             </a:r>
-            <a:endParaRPr lang="en-US" sz="1500" dirty="0"/>
+            <a:endParaRPr lang="en-US" sz="2400" dirty="0">
+              <a:solidFill>
+                <a:schemeClr val="bg1"/>
+              </a:solidFill>
+            </a:endParaRPr>
           </a:p>
         </p:txBody>
       </p:sp>
@@ -7369,13 +7398,13 @@
           <a:bodyPr wrap="square" lIns="0" tIns="0" rIns="0" bIns="0" rtlCol="0" anchor="ctr"/>
           <a:lstStyle/>
           <a:p>
-            <a:pPr indent="0" marL="0">
-              <a:buNone/>
-            </a:pPr>
-            <a:r>
-              <a:rPr lang="en-US" sz="1400" dirty="0">
-                <a:solidFill>
-                  <a:srgbClr val="A9A3C4"/>
+            <a:pPr marL="0" indent="0">
+              <a:buNone/>
+            </a:pPr>
+            <a:r>
+              <a:rPr lang="en-US" sz="2400" dirty="0">
+                <a:solidFill>
+                  <a:schemeClr val="bg1"/>
                 </a:solidFill>
                 <a:latin typeface="Calibri" pitchFamily="34" charset="0"/>
                 <a:ea typeface="Calibri" pitchFamily="34" charset="-122"/>
@@ -7383,7 +7412,11 @@
               </a:rPr>
               <a:t>Проверять условия</a:t>
             </a:r>
-            <a:endParaRPr lang="en-US" sz="1400" dirty="0"/>
+            <a:endParaRPr lang="en-US" sz="2400" dirty="0">
+              <a:solidFill>
+                <a:schemeClr val="bg1"/>
+              </a:solidFill>
+            </a:endParaRPr>
           </a:p>
         </p:txBody>
       </p:sp>
@@ -7408,13 +7441,13 @@
           <a:bodyPr wrap="square" lIns="0" tIns="0" rIns="0" bIns="0" rtlCol="0" anchor="ctr"/>
           <a:lstStyle/>
           <a:p>
-            <a:pPr indent="0" marL="0">
-              <a:buNone/>
-            </a:pPr>
-            <a:r>
-              <a:rPr lang="en-US" sz="1700" b="1" dirty="0">
-                <a:solidFill>
-                  <a:srgbClr val="FFFFFF"/>
+            <a:pPr marL="0" indent="0">
+              <a:buNone/>
+            </a:pPr>
+            <a:r>
+              <a:rPr lang="en-US" sz="2400" b="1" dirty="0">
+                <a:solidFill>
+                  <a:schemeClr val="bg1"/>
                 </a:solidFill>
                 <a:latin typeface="Calibri" pitchFamily="34" charset="0"/>
                 <a:ea typeface="Calibri" pitchFamily="34" charset="-122"/>
@@ -7422,7 +7455,11 @@
               </a:rPr>
               <a:t>Узнать тип: </a:t>
             </a:r>
-            <a:endParaRPr lang="en-US" sz="1700" dirty="0"/>
+            <a:endParaRPr lang="en-US" sz="2400" dirty="0">
+              <a:solidFill>
+                <a:schemeClr val="bg1"/>
+              </a:solidFill>
+            </a:endParaRPr>
           </a:p>
         </p:txBody>
       </p:sp>
@@ -7435,7 +7472,7 @@
         <p:spPr>
           <a:xfrm>
             <a:off x="2194560" y="5623560"/>
-            <a:ext cx="9326880" cy="566928"/>
+            <a:ext cx="9326880" cy="822960"/>
           </a:xfrm>
           <a:prstGeom prst="roundRect">
             <a:avLst>
@@ -7461,7 +7498,7 @@
         </p:nvSpPr>
         <p:spPr>
           <a:xfrm>
-            <a:off x="2377440" y="5751576"/>
+            <a:off x="2377440" y="5879592"/>
             <a:ext cx="8997696" cy="310896"/>
           </a:xfrm>
           <a:prstGeom prst="rect">
@@ -7474,16 +7511,16 @@
           <a:bodyPr wrap="square" lIns="0" tIns="0" rIns="0" bIns="0" rtlCol="0" anchor="ctr"/>
           <a:lstStyle/>
           <a:p>
-            <a:pPr indent="0" marL="0">
+            <a:pPr marL="0" indent="0">
               <a:lnSpc>
                 <a:spcPct val="110000"/>
               </a:lnSpc>
               <a:buNone/>
             </a:pPr>
             <a:r>
-              <a:rPr lang="en-US" sz="1500" dirty="0">
-                <a:solidFill>
-                  <a:srgbClr val="4FD1E0"/>
+              <a:rPr lang="en-US" sz="2400" dirty="0">
+                <a:solidFill>
+                  <a:schemeClr val="bg1"/>
                 </a:solidFill>
                 <a:latin typeface="Consolas" pitchFamily="34" charset="0"/>
                 <a:ea typeface="Consolas" pitchFamily="34" charset="-122"/>
@@ -7491,7 +7528,11 @@
               </a:rPr>
               <a:t>print(type(10))      # int          print(type("текст"))  # str</a:t>
             </a:r>
-            <a:endParaRPr lang="en-US" sz="1500" dirty="0"/>
+            <a:endParaRPr lang="en-US" sz="2400" dirty="0">
+              <a:solidFill>
+                <a:schemeClr val="bg1"/>
+              </a:solidFill>
+            </a:endParaRPr>
           </a:p>
         </p:txBody>
       </p:sp>
@@ -7511,6 +7552,7 @@
         <a:solidFill>
           <a:srgbClr val="17132E"/>
         </a:solidFill>
+        <a:effectLst/>
       </p:bgPr>
     </p:bg>
     <p:spTree>
@@ -7548,7 +7590,7 @@
           <a:bodyPr wrap="square" lIns="0" tIns="0" rIns="0" bIns="0" rtlCol="0" anchor="ctr"/>
           <a:lstStyle/>
           <a:p>
-            <a:pPr indent="0" marL="0">
+            <a:pPr marL="0" indent="0">
               <a:buNone/>
             </a:pPr>
             <a:r>
@@ -7587,13 +7629,13 @@
           <a:bodyPr wrap="square" lIns="0" tIns="0" rIns="0" bIns="0" rtlCol="0" anchor="ctr"/>
           <a:lstStyle/>
           <a:p>
-            <a:pPr indent="0" marL="0">
-              <a:buNone/>
-            </a:pPr>
-            <a:r>
-              <a:rPr lang="en-US" sz="1600" i="1" dirty="0">
-                <a:solidFill>
-                  <a:srgbClr val="A9A3C4"/>
+            <a:pPr marL="0" indent="0">
+              <a:buNone/>
+            </a:pPr>
+            <a:r>
+              <a:rPr lang="en-US" sz="2000" i="1" dirty="0">
+                <a:solidFill>
+                  <a:schemeClr val="bg1"/>
                 </a:solidFill>
                 <a:latin typeface="Calibri" pitchFamily="34" charset="0"/>
                 <a:ea typeface="Calibri" pitchFamily="34" charset="-122"/>
@@ -7601,7 +7643,11 @@
               </a:rPr>
               <a:t>Величину одного типа можно превратить в другой</a:t>
             </a:r>
-            <a:endParaRPr lang="en-US" sz="1600" dirty="0"/>
+            <a:endParaRPr lang="en-US" sz="2000" dirty="0">
+              <a:solidFill>
+                <a:schemeClr val="bg1"/>
+              </a:solidFill>
+            </a:endParaRPr>
           </a:p>
         </p:txBody>
       </p:sp>
@@ -7653,16 +7699,16 @@
           <a:bodyPr wrap="square" lIns="0" tIns="0" rIns="0" bIns="0" rtlCol="0" anchor="ctr"/>
           <a:lstStyle/>
           <a:p>
-            <a:pPr indent="0" marL="0">
+            <a:pPr marL="0" indent="0">
               <a:lnSpc>
                 <a:spcPct val="110000"/>
               </a:lnSpc>
               <a:buNone/>
             </a:pPr>
             <a:r>
-              <a:rPr lang="en-US" sz="1700" dirty="0">
-                <a:solidFill>
-                  <a:srgbClr val="4FD1E0"/>
+              <a:rPr lang="en-US" sz="2400" b="1" dirty="0">
+                <a:solidFill>
+                  <a:schemeClr val="bg1"/>
                 </a:solidFill>
                 <a:latin typeface="Consolas" pitchFamily="34" charset="0"/>
                 <a:ea typeface="Consolas" pitchFamily="34" charset="-122"/>
@@ -7670,19 +7716,23 @@
               </a:rPr>
               <a:t>int("25")     # строка "25"  →  число 25</a:t>
             </a:r>
-            <a:endParaRPr lang="en-US" sz="1700" dirty="0"/>
-          </a:p>
-          <a:p>
-            <a:pPr indent="0" marL="0">
+            <a:endParaRPr lang="en-US" sz="2400" b="1" dirty="0">
+              <a:solidFill>
+                <a:schemeClr val="bg1"/>
+              </a:solidFill>
+            </a:endParaRPr>
+          </a:p>
+          <a:p>
+            <a:pPr marL="0" indent="0">
               <a:lnSpc>
                 <a:spcPct val="110000"/>
               </a:lnSpc>
               <a:buNone/>
             </a:pPr>
             <a:r>
-              <a:rPr lang="en-US" sz="1700" dirty="0">
-                <a:solidFill>
-                  <a:srgbClr val="4FD1E0"/>
+              <a:rPr lang="en-US" sz="2400" b="1" dirty="0">
+                <a:solidFill>
+                  <a:schemeClr val="bg1"/>
                 </a:solidFill>
                 <a:latin typeface="Consolas" pitchFamily="34" charset="0"/>
                 <a:ea typeface="Consolas" pitchFamily="34" charset="-122"/>
@@ -7690,19 +7740,23 @@
               </a:rPr>
               <a:t>float("4.5")  # строка "4.5" →  число 4.5</a:t>
             </a:r>
-            <a:endParaRPr lang="en-US" sz="1700" dirty="0"/>
-          </a:p>
-          <a:p>
-            <a:pPr indent="0" marL="0">
+            <a:endParaRPr lang="en-US" sz="2400" b="1" dirty="0">
+              <a:solidFill>
+                <a:schemeClr val="bg1"/>
+              </a:solidFill>
+            </a:endParaRPr>
+          </a:p>
+          <a:p>
+            <a:pPr marL="0" indent="0">
               <a:lnSpc>
                 <a:spcPct val="110000"/>
               </a:lnSpc>
               <a:buNone/>
             </a:pPr>
             <a:r>
-              <a:rPr lang="en-US" sz="1700" dirty="0">
-                <a:solidFill>
-                  <a:srgbClr val="4FD1E0"/>
+              <a:rPr lang="en-US" sz="2400" b="1" dirty="0">
+                <a:solidFill>
+                  <a:schemeClr val="bg1"/>
                 </a:solidFill>
                 <a:latin typeface="Consolas" pitchFamily="34" charset="0"/>
                 <a:ea typeface="Consolas" pitchFamily="34" charset="-122"/>
@@ -7710,7 +7764,11 @@
               </a:rPr>
               <a:t>str(25)       # число 25     →  строка "25"</a:t>
             </a:r>
-            <a:endParaRPr lang="en-US" sz="1700" dirty="0"/>
+            <a:endParaRPr lang="en-US" sz="2400" b="1" dirty="0">
+              <a:solidFill>
+                <a:schemeClr val="bg1"/>
+              </a:solidFill>
+            </a:endParaRPr>
           </a:p>
         </p:txBody>
       </p:sp>
@@ -7762,13 +7820,13 @@
           <a:bodyPr wrap="square" lIns="0" tIns="0" rIns="0" bIns="0" rtlCol="0" anchor="ctr"/>
           <a:lstStyle/>
           <a:p>
-            <a:pPr indent="0" marL="0">
+            <a:pPr marL="0" indent="0">
               <a:buNone/>
             </a:pPr>
             <a:r>
               <a:rPr lang="en-US" sz="1900" b="1" dirty="0">
                 <a:solidFill>
-                  <a:srgbClr val="3DD6A0"/>
+                  <a:schemeClr val="bg1"/>
                 </a:solidFill>
                 <a:latin typeface="Calibri" pitchFamily="34" charset="0"/>
                 <a:ea typeface="Calibri" pitchFamily="34" charset="-122"/>
@@ -7776,7 +7834,11 @@
               </a:rPr>
               <a:t>Получится</a:t>
             </a:r>
-            <a:endParaRPr lang="en-US" sz="1900" dirty="0"/>
+            <a:endParaRPr lang="en-US" sz="1900" dirty="0">
+              <a:solidFill>
+                <a:schemeClr val="bg1"/>
+              </a:solidFill>
+            </a:endParaRPr>
           </a:p>
         </p:txBody>
       </p:sp>
@@ -7828,16 +7890,16 @@
           <a:bodyPr wrap="square" lIns="0" tIns="0" rIns="0" bIns="0" rtlCol="0" anchor="ctr"/>
           <a:lstStyle/>
           <a:p>
-            <a:pPr indent="0" marL="0">
+            <a:pPr marL="0" indent="0">
               <a:lnSpc>
                 <a:spcPct val="110000"/>
               </a:lnSpc>
               <a:buNone/>
             </a:pPr>
             <a:r>
-              <a:rPr lang="en-US" sz="1500" dirty="0">
-                <a:solidFill>
-                  <a:srgbClr val="4FD1E0"/>
+              <a:rPr lang="en-US" sz="2000" b="1" dirty="0">
+                <a:solidFill>
+                  <a:schemeClr val="bg1"/>
                 </a:solidFill>
                 <a:latin typeface="Consolas" pitchFamily="34" charset="0"/>
                 <a:ea typeface="Consolas" pitchFamily="34" charset="-122"/>
@@ -7845,19 +7907,23 @@
               </a:rPr>
               <a:t>int("25") + 5</a:t>
             </a:r>
-            <a:endParaRPr lang="en-US" sz="1500" dirty="0"/>
-          </a:p>
-          <a:p>
-            <a:pPr indent="0" marL="0">
+            <a:endParaRPr lang="en-US" sz="2000" b="1" dirty="0">
+              <a:solidFill>
+                <a:schemeClr val="bg1"/>
+              </a:solidFill>
+            </a:endParaRPr>
+          </a:p>
+          <a:p>
+            <a:pPr marL="0" indent="0">
               <a:lnSpc>
                 <a:spcPct val="110000"/>
               </a:lnSpc>
               <a:buNone/>
             </a:pPr>
             <a:r>
-              <a:rPr lang="en-US" sz="1500" dirty="0">
-                <a:solidFill>
-                  <a:srgbClr val="4FD1E0"/>
+              <a:rPr lang="en-US" sz="2000" b="1" dirty="0">
+                <a:solidFill>
+                  <a:schemeClr val="bg1"/>
                 </a:solidFill>
                 <a:latin typeface="Consolas" pitchFamily="34" charset="0"/>
                 <a:ea typeface="Consolas" pitchFamily="34" charset="-122"/>
@@ -7865,28 +7931,36 @@
               </a:rPr>
               <a:t># 30</a:t>
             </a:r>
-            <a:endParaRPr lang="en-US" sz="1500" dirty="0"/>
-          </a:p>
-          <a:p>
-            <a:pPr indent="0" marL="0">
+            <a:endParaRPr lang="en-US" sz="2000" b="1" dirty="0">
+              <a:solidFill>
+                <a:schemeClr val="bg1"/>
+              </a:solidFill>
+            </a:endParaRPr>
+          </a:p>
+          <a:p>
+            <a:pPr marL="0" indent="0">
               <a:lnSpc>
                 <a:spcPct val="110000"/>
               </a:lnSpc>
               <a:buNone/>
             </a:pPr>
-            <a:endParaRPr lang="en-US" sz="1500" dirty="0"/>
-          </a:p>
-          <a:p>
-            <a:pPr indent="0" marL="0">
+            <a:endParaRPr lang="en-US" sz="2000" b="1" dirty="0">
+              <a:solidFill>
+                <a:schemeClr val="bg1"/>
+              </a:solidFill>
+            </a:endParaRPr>
+          </a:p>
+          <a:p>
+            <a:pPr marL="0" indent="0">
               <a:lnSpc>
                 <a:spcPct val="110000"/>
               </a:lnSpc>
               <a:buNone/>
             </a:pPr>
             <a:r>
-              <a:rPr lang="en-US" sz="1500" dirty="0">
-                <a:solidFill>
-                  <a:srgbClr val="4FD1E0"/>
+              <a:rPr lang="en-US" sz="2000" b="1" dirty="0">
+                <a:solidFill>
+                  <a:schemeClr val="bg1"/>
                 </a:solidFill>
                 <a:latin typeface="Consolas" pitchFamily="34" charset="0"/>
                 <a:ea typeface="Consolas" pitchFamily="34" charset="-122"/>
@@ -7894,19 +7968,23 @@
               </a:rPr>
               <a:t>str(25) + " лет"</a:t>
             </a:r>
-            <a:endParaRPr lang="en-US" sz="1500" dirty="0"/>
-          </a:p>
-          <a:p>
-            <a:pPr indent="0" marL="0">
+            <a:endParaRPr lang="en-US" sz="2000" b="1" dirty="0">
+              <a:solidFill>
+                <a:schemeClr val="bg1"/>
+              </a:solidFill>
+            </a:endParaRPr>
+          </a:p>
+          <a:p>
+            <a:pPr marL="0" indent="0">
               <a:lnSpc>
                 <a:spcPct val="110000"/>
               </a:lnSpc>
               <a:buNone/>
             </a:pPr>
             <a:r>
-              <a:rPr lang="en-US" sz="1500" dirty="0">
-                <a:solidFill>
-                  <a:srgbClr val="4FD1E0"/>
+              <a:rPr lang="en-US" sz="2000" b="1" dirty="0">
+                <a:solidFill>
+                  <a:schemeClr val="bg1"/>
                 </a:solidFill>
                 <a:latin typeface="Consolas" pitchFamily="34" charset="0"/>
                 <a:ea typeface="Consolas" pitchFamily="34" charset="-122"/>
@@ -7914,7 +7992,11 @@
               </a:rPr>
               <a:t># "25 лет"</a:t>
             </a:r>
-            <a:endParaRPr lang="en-US" sz="1500" dirty="0"/>
+            <a:endParaRPr lang="en-US" sz="2000" b="1" dirty="0">
+              <a:solidFill>
+                <a:schemeClr val="bg1"/>
+              </a:solidFill>
+            </a:endParaRPr>
           </a:p>
         </p:txBody>
       </p:sp>
@@ -7966,13 +8048,13 @@
           <a:bodyPr wrap="square" lIns="0" tIns="0" rIns="0" bIns="0" rtlCol="0" anchor="ctr"/>
           <a:lstStyle/>
           <a:p>
-            <a:pPr indent="0" marL="0">
+            <a:pPr marL="0" indent="0">
               <a:buNone/>
             </a:pPr>
             <a:r>
               <a:rPr lang="en-US" sz="1900" b="1" dirty="0">
                 <a:solidFill>
-                  <a:srgbClr val="F2789F"/>
+                  <a:schemeClr val="bg1"/>
                 </a:solidFill>
                 <a:latin typeface="Calibri" pitchFamily="34" charset="0"/>
                 <a:ea typeface="Calibri" pitchFamily="34" charset="-122"/>
@@ -7980,7 +8062,11 @@
               </a:rPr>
               <a:t>Не получится</a:t>
             </a:r>
-            <a:endParaRPr lang="en-US" sz="1900" dirty="0"/>
+            <a:endParaRPr lang="en-US" sz="1900" dirty="0">
+              <a:solidFill>
+                <a:schemeClr val="bg1"/>
+              </a:solidFill>
+            </a:endParaRPr>
           </a:p>
         </p:txBody>
       </p:sp>
@@ -8032,16 +8118,16 @@
           <a:bodyPr wrap="square" lIns="0" tIns="0" rIns="0" bIns="0" rtlCol="0" anchor="ctr"/>
           <a:lstStyle/>
           <a:p>
-            <a:pPr indent="0" marL="0">
+            <a:pPr marL="0" indent="0">
               <a:lnSpc>
                 <a:spcPct val="110000"/>
               </a:lnSpc>
               <a:buNone/>
             </a:pPr>
             <a:r>
-              <a:rPr lang="en-US" sz="1500" dirty="0">
-                <a:solidFill>
-                  <a:srgbClr val="4FD1E0"/>
+              <a:rPr lang="en-US" sz="2000" dirty="0">
+                <a:solidFill>
+                  <a:schemeClr val="bg1"/>
                 </a:solidFill>
                 <a:latin typeface="Consolas" pitchFamily="34" charset="0"/>
                 <a:ea typeface="Consolas" pitchFamily="34" charset="-122"/>
@@ -8049,19 +8135,23 @@
               </a:rPr>
               <a:t>"25" + 5</a:t>
             </a:r>
-            <a:endParaRPr lang="en-US" sz="1500" dirty="0"/>
-          </a:p>
-          <a:p>
-            <a:pPr indent="0" marL="0">
+            <a:endParaRPr lang="en-US" sz="2000" dirty="0">
+              <a:solidFill>
+                <a:schemeClr val="bg1"/>
+              </a:solidFill>
+            </a:endParaRPr>
+          </a:p>
+          <a:p>
+            <a:pPr marL="0" indent="0">
               <a:lnSpc>
                 <a:spcPct val="110000"/>
               </a:lnSpc>
               <a:buNone/>
             </a:pPr>
             <a:r>
-              <a:rPr lang="en-US" sz="1500" dirty="0">
-                <a:solidFill>
-                  <a:srgbClr val="4FD1E0"/>
+              <a:rPr lang="en-US" sz="2000" dirty="0">
+                <a:solidFill>
+                  <a:schemeClr val="bg1"/>
                 </a:solidFill>
                 <a:latin typeface="Consolas" pitchFamily="34" charset="0"/>
                 <a:ea typeface="Consolas" pitchFamily="34" charset="-122"/>
@@ -8069,28 +8159,36 @@
               </a:rPr>
               <a:t># ошибка TypeError</a:t>
             </a:r>
-            <a:endParaRPr lang="en-US" sz="1500" dirty="0"/>
-          </a:p>
-          <a:p>
-            <a:pPr indent="0" marL="0">
+            <a:endParaRPr lang="en-US" sz="2000" dirty="0">
+              <a:solidFill>
+                <a:schemeClr val="bg1"/>
+              </a:solidFill>
+            </a:endParaRPr>
+          </a:p>
+          <a:p>
+            <a:pPr marL="0" indent="0">
               <a:lnSpc>
                 <a:spcPct val="110000"/>
               </a:lnSpc>
               <a:buNone/>
             </a:pPr>
-            <a:endParaRPr lang="en-US" sz="1500" dirty="0"/>
-          </a:p>
-          <a:p>
-            <a:pPr indent="0" marL="0">
+            <a:endParaRPr lang="en-US" sz="2000" dirty="0">
+              <a:solidFill>
+                <a:schemeClr val="bg1"/>
+              </a:solidFill>
+            </a:endParaRPr>
+          </a:p>
+          <a:p>
+            <a:pPr marL="0" indent="0">
               <a:lnSpc>
                 <a:spcPct val="110000"/>
               </a:lnSpc>
               <a:buNone/>
             </a:pPr>
             <a:r>
-              <a:rPr lang="en-US" sz="1500" dirty="0">
-                <a:solidFill>
-                  <a:srgbClr val="4FD1E0"/>
+              <a:rPr lang="en-US" sz="2000" dirty="0">
+                <a:solidFill>
+                  <a:schemeClr val="bg1"/>
                 </a:solidFill>
                 <a:latin typeface="Consolas" pitchFamily="34" charset="0"/>
                 <a:ea typeface="Consolas" pitchFamily="34" charset="-122"/>
@@ -8098,19 +8196,23 @@
               </a:rPr>
               <a:t>int("привет")</a:t>
             </a:r>
-            <a:endParaRPr lang="en-US" sz="1500" dirty="0"/>
-          </a:p>
-          <a:p>
-            <a:pPr indent="0" marL="0">
+            <a:endParaRPr lang="en-US" sz="2000" dirty="0">
+              <a:solidFill>
+                <a:schemeClr val="bg1"/>
+              </a:solidFill>
+            </a:endParaRPr>
+          </a:p>
+          <a:p>
+            <a:pPr marL="0" indent="0">
               <a:lnSpc>
                 <a:spcPct val="110000"/>
               </a:lnSpc>
               <a:buNone/>
             </a:pPr>
             <a:r>
-              <a:rPr lang="en-US" sz="1500" dirty="0">
-                <a:solidFill>
-                  <a:srgbClr val="4FD1E0"/>
+              <a:rPr lang="en-US" sz="2000" dirty="0">
+                <a:solidFill>
+                  <a:schemeClr val="bg1"/>
                 </a:solidFill>
                 <a:latin typeface="Consolas" pitchFamily="34" charset="0"/>
                 <a:ea typeface="Consolas" pitchFamily="34" charset="-122"/>
@@ -8118,7 +8220,11 @@
               </a:rPr>
               <a:t># ошибка ValueError</a:t>
             </a:r>
-            <a:endParaRPr lang="en-US" sz="1500" dirty="0"/>
+            <a:endParaRPr lang="en-US" sz="2000" dirty="0">
+              <a:solidFill>
+                <a:schemeClr val="bg1"/>
+              </a:solidFill>
+            </a:endParaRPr>
           </a:p>
         </p:txBody>
       </p:sp>
@@ -8130,7 +8236,7 @@
         </p:nvSpPr>
         <p:spPr>
           <a:xfrm>
-            <a:off x="640080" y="5440680"/>
+            <a:off x="658368" y="5586984"/>
             <a:ext cx="10881360" cy="457200"/>
           </a:xfrm>
           <a:prstGeom prst="rect">
@@ -8143,13 +8249,13 @@
           <a:bodyPr wrap="square" lIns="0" tIns="0" rIns="0" bIns="0" rtlCol="0" anchor="ctr"/>
           <a:lstStyle/>
           <a:p>
-            <a:pPr indent="0" marL="0">
-              <a:buNone/>
-            </a:pPr>
-            <a:r>
-              <a:rPr lang="en-US" sz="1700" i="1" dirty="0">
-                <a:solidFill>
-                  <a:srgbClr val="4FD1E0"/>
+            <a:pPr marL="0" indent="0">
+              <a:buNone/>
+            </a:pPr>
+            <a:r>
+              <a:rPr lang="en-US" sz="2000" b="1" i="1" dirty="0">
+                <a:solidFill>
+                  <a:schemeClr val="bg1"/>
                 </a:solidFill>
                 <a:latin typeface="Calibri" pitchFamily="34" charset="0"/>
                 <a:ea typeface="Calibri" pitchFamily="34" charset="-122"/>
@@ -8157,7 +8263,11 @@
               </a:rPr>
               <a:t>Не всякая строка превращается в число. Слово «привет» числом стать не может — отсюда ошибка.</a:t>
             </a:r>
-            <a:endParaRPr lang="en-US" sz="1700" dirty="0"/>
+            <a:endParaRPr lang="en-US" sz="2000" b="1" dirty="0">
+              <a:solidFill>
+                <a:schemeClr val="bg1"/>
+              </a:solidFill>
+            </a:endParaRPr>
           </a:p>
         </p:txBody>
       </p:sp>
@@ -8177,6 +8287,7 @@
         <a:solidFill>
           <a:srgbClr val="17132E"/>
         </a:solidFill>
+        <a:effectLst/>
       </p:bgPr>
     </p:bg>
     <p:spTree>
@@ -8214,7 +8325,7 @@
           <a:bodyPr wrap="square" lIns="0" tIns="0" rIns="0" bIns="0" rtlCol="0" anchor="ctr"/>
           <a:lstStyle/>
           <a:p>
-            <a:pPr indent="0" marL="0">
+            <a:pPr marL="0" indent="0">
               <a:buNone/>
             </a:pPr>
             <a:r>
@@ -8253,21 +8364,26 @@
           <a:bodyPr wrap="square" lIns="0" tIns="0" rIns="0" bIns="0" rtlCol="0" anchor="ctr"/>
           <a:lstStyle/>
           <a:p>
-            <a:pPr indent="0" marL="0">
+            <a:pPr marL="0" indent="0">
               <a:buNone/>
             </a:pPr>
             <a:r>
               <a:rPr lang="en-US" sz="1600" i="1" dirty="0">
                 <a:solidFill>
-                  <a:srgbClr val="A9A3C4"/>
-                </a:solidFill>
-                <a:latin typeface="Calibri" pitchFamily="34" charset="0"/>
+                  <a:schemeClr val="bg1"/>
+                </a:solidFill>
+                <a:latin typeface="Arial Black" panose="020B0A04020102020204" pitchFamily="34" charset="0"/>
                 <a:ea typeface="Calibri" pitchFamily="34" charset="-122"/>
                 <a:cs typeface="Calibri" pitchFamily="34" charset="-120"/>
               </a:rPr>
               <a:t>Четыре случая, которые встретятся на практике</a:t>
             </a:r>
-            <a:endParaRPr lang="en-US" sz="1600" dirty="0"/>
+            <a:endParaRPr lang="en-US" sz="1600" dirty="0">
+              <a:solidFill>
+                <a:schemeClr val="bg1"/>
+              </a:solidFill>
+              <a:latin typeface="Arial Black" panose="020B0A04020102020204" pitchFamily="34" charset="0"/>
+            </a:endParaRPr>
           </a:p>
         </p:txBody>
       </p:sp>
@@ -8319,13 +8435,13 @@
           <a:bodyPr wrap="square" lIns="0" tIns="0" rIns="0" bIns="0" rtlCol="0" anchor="ctr"/>
           <a:lstStyle/>
           <a:p>
-            <a:pPr indent="0" marL="0">
-              <a:buNone/>
-            </a:pPr>
-            <a:r>
-              <a:rPr lang="en-US" sz="1500" dirty="0">
-                <a:solidFill>
-                  <a:srgbClr val="4FD1E0"/>
+            <a:pPr marL="0" indent="0">
+              <a:buNone/>
+            </a:pPr>
+            <a:r>
+              <a:rPr lang="en-US" sz="2200" dirty="0">
+                <a:solidFill>
+                  <a:schemeClr val="bg1"/>
                 </a:solidFill>
                 <a:latin typeface="Consolas" pitchFamily="34" charset="0"/>
                 <a:ea typeface="Consolas" pitchFamily="34" charset="-122"/>
@@ -8333,7 +8449,11 @@
               </a:rPr>
               <a:t>"25" + 5</a:t>
             </a:r>
-            <a:endParaRPr lang="en-US" sz="1500" dirty="0"/>
+            <a:endParaRPr lang="en-US" sz="2200" dirty="0">
+              <a:solidFill>
+                <a:schemeClr val="bg1"/>
+              </a:solidFill>
+            </a:endParaRPr>
           </a:p>
         </p:txBody>
       </p:sp>
@@ -8358,13 +8478,13 @@
           <a:bodyPr wrap="square" lIns="0" tIns="0" rIns="0" bIns="0" rtlCol="0" anchor="ctr"/>
           <a:lstStyle/>
           <a:p>
-            <a:pPr indent="0" marL="0">
-              <a:buNone/>
-            </a:pPr>
-            <a:r>
-              <a:rPr lang="en-US" sz="1400" b="1" dirty="0">
-                <a:solidFill>
-                  <a:srgbClr val="F2789F"/>
+            <a:pPr marL="0" indent="0">
+              <a:buNone/>
+            </a:pPr>
+            <a:r>
+              <a:rPr lang="en-US" sz="2200" b="1" dirty="0">
+                <a:solidFill>
+                  <a:schemeClr val="bg1"/>
                 </a:solidFill>
                 <a:latin typeface="Consolas" pitchFamily="34" charset="0"/>
                 <a:ea typeface="Consolas" pitchFamily="34" charset="-122"/>
@@ -8372,7 +8492,11 @@
               </a:rPr>
               <a:t>TypeError</a:t>
             </a:r>
-            <a:endParaRPr lang="en-US" sz="1400" dirty="0"/>
+            <a:endParaRPr lang="en-US" sz="2200" dirty="0">
+              <a:solidFill>
+                <a:schemeClr val="bg1"/>
+              </a:solidFill>
+            </a:endParaRPr>
           </a:p>
         </p:txBody>
       </p:sp>
@@ -8397,13 +8521,13 @@
           <a:bodyPr wrap="square" lIns="0" tIns="0" rIns="0" bIns="0" rtlCol="0" anchor="ctr"/>
           <a:lstStyle/>
           <a:p>
-            <a:pPr indent="0" marL="0">
-              <a:buNone/>
-            </a:pPr>
-            <a:r>
-              <a:rPr lang="en-US" sz="1400" dirty="0">
-                <a:solidFill>
-                  <a:srgbClr val="FFFFFF"/>
+            <a:pPr marL="0" indent="0">
+              <a:buNone/>
+            </a:pPr>
+            <a:r>
+              <a:rPr lang="en-US" sz="2200" dirty="0">
+                <a:solidFill>
+                  <a:schemeClr val="bg1"/>
                 </a:solidFill>
                 <a:latin typeface="Calibri" pitchFamily="34" charset="0"/>
                 <a:ea typeface="Calibri" pitchFamily="34" charset="-122"/>
@@ -8411,7 +8535,11 @@
               </a:rPr>
               <a:t>Складываются строка и число</a:t>
             </a:r>
-            <a:endParaRPr lang="en-US" sz="1400" dirty="0"/>
+            <a:endParaRPr lang="en-US" sz="2200" dirty="0">
+              <a:solidFill>
+                <a:schemeClr val="bg1"/>
+              </a:solidFill>
+            </a:endParaRPr>
           </a:p>
         </p:txBody>
       </p:sp>
@@ -8436,13 +8564,13 @@
           <a:bodyPr wrap="square" lIns="0" tIns="0" rIns="0" bIns="0" rtlCol="0" anchor="ctr"/>
           <a:lstStyle/>
           <a:p>
-            <a:pPr indent="0" marL="0">
-              <a:buNone/>
-            </a:pPr>
-            <a:r>
-              <a:rPr lang="en-US" sz="1400" dirty="0">
-                <a:solidFill>
-                  <a:srgbClr val="A9A3C4"/>
+            <a:pPr marL="0" indent="0">
+              <a:buNone/>
+            </a:pPr>
+            <a:r>
+              <a:rPr lang="en-US" sz="2200" dirty="0">
+                <a:solidFill>
+                  <a:schemeClr val="bg1"/>
                 </a:solidFill>
                 <a:latin typeface="Calibri" pitchFamily="34" charset="0"/>
                 <a:ea typeface="Calibri" pitchFamily="34" charset="-122"/>
@@ -8450,7 +8578,11 @@
               </a:rPr>
               <a:t>Преобразовать: int("25") + 5</a:t>
             </a:r>
-            <a:endParaRPr lang="en-US" sz="1400" dirty="0"/>
+            <a:endParaRPr lang="en-US" sz="2200" dirty="0">
+              <a:solidFill>
+                <a:schemeClr val="bg1"/>
+              </a:solidFill>
+            </a:endParaRPr>
           </a:p>
         </p:txBody>
       </p:sp>
@@ -8502,13 +8634,13 @@
           <a:bodyPr wrap="square" lIns="0" tIns="0" rIns="0" bIns="0" rtlCol="0" anchor="ctr"/>
           <a:lstStyle/>
           <a:p>
-            <a:pPr indent="0" marL="0">
-              <a:buNone/>
-            </a:pPr>
-            <a:r>
-              <a:rPr lang="en-US" sz="1500" dirty="0">
-                <a:solidFill>
-                  <a:srgbClr val="4FD1E0"/>
+            <a:pPr marL="0" indent="0">
+              <a:buNone/>
+            </a:pPr>
+            <a:r>
+              <a:rPr lang="en-US" sz="2200" dirty="0">
+                <a:solidFill>
+                  <a:schemeClr val="bg1"/>
                 </a:solidFill>
                 <a:latin typeface="Consolas" pitchFamily="34" charset="0"/>
                 <a:ea typeface="Consolas" pitchFamily="34" charset="-122"/>
@@ -8516,7 +8648,11 @@
               </a:rPr>
               <a:t>int("привет")</a:t>
             </a:r>
-            <a:endParaRPr lang="en-US" sz="1500" dirty="0"/>
+            <a:endParaRPr lang="en-US" sz="2200" dirty="0">
+              <a:solidFill>
+                <a:schemeClr val="bg1"/>
+              </a:solidFill>
+            </a:endParaRPr>
           </a:p>
         </p:txBody>
       </p:sp>
@@ -8541,13 +8677,13 @@
           <a:bodyPr wrap="square" lIns="0" tIns="0" rIns="0" bIns="0" rtlCol="0" anchor="ctr"/>
           <a:lstStyle/>
           <a:p>
-            <a:pPr indent="0" marL="0">
-              <a:buNone/>
-            </a:pPr>
-            <a:r>
-              <a:rPr lang="en-US" sz="1400" b="1" dirty="0">
-                <a:solidFill>
-                  <a:srgbClr val="F2789F"/>
+            <a:pPr marL="0" indent="0">
+              <a:buNone/>
+            </a:pPr>
+            <a:r>
+              <a:rPr lang="en-US" sz="2200" b="1" dirty="0">
+                <a:solidFill>
+                  <a:schemeClr val="bg1"/>
                 </a:solidFill>
                 <a:latin typeface="Consolas" pitchFamily="34" charset="0"/>
                 <a:ea typeface="Consolas" pitchFamily="34" charset="-122"/>
@@ -8555,7 +8691,11 @@
               </a:rPr>
               <a:t>ValueError</a:t>
             </a:r>
-            <a:endParaRPr lang="en-US" sz="1400" dirty="0"/>
+            <a:endParaRPr lang="en-US" sz="2200" dirty="0">
+              <a:solidFill>
+                <a:schemeClr val="bg1"/>
+              </a:solidFill>
+            </a:endParaRPr>
           </a:p>
         </p:txBody>
       </p:sp>
@@ -8580,13 +8720,13 @@
           <a:bodyPr wrap="square" lIns="0" tIns="0" rIns="0" bIns="0" rtlCol="0" anchor="ctr"/>
           <a:lstStyle/>
           <a:p>
-            <a:pPr indent="0" marL="0">
-              <a:buNone/>
-            </a:pPr>
-            <a:r>
-              <a:rPr lang="en-US" sz="1400" dirty="0">
-                <a:solidFill>
-                  <a:srgbClr val="FFFFFF"/>
+            <a:pPr marL="0" indent="0">
+              <a:buNone/>
+            </a:pPr>
+            <a:r>
+              <a:rPr lang="en-US" sz="2200" dirty="0">
+                <a:solidFill>
+                  <a:schemeClr val="bg1"/>
                 </a:solidFill>
                 <a:latin typeface="Calibri" pitchFamily="34" charset="0"/>
                 <a:ea typeface="Calibri" pitchFamily="34" charset="-122"/>
@@ -8594,7 +8734,11 @@
               </a:rPr>
               <a:t>Строка не является числом</a:t>
             </a:r>
-            <a:endParaRPr lang="en-US" sz="1400" dirty="0"/>
+            <a:endParaRPr lang="en-US" sz="2200" dirty="0">
+              <a:solidFill>
+                <a:schemeClr val="bg1"/>
+              </a:solidFill>
+            </a:endParaRPr>
           </a:p>
         </p:txBody>
       </p:sp>
@@ -8619,13 +8763,13 @@
           <a:bodyPr wrap="square" lIns="0" tIns="0" rIns="0" bIns="0" rtlCol="0" anchor="ctr"/>
           <a:lstStyle/>
           <a:p>
-            <a:pPr indent="0" marL="0">
-              <a:buNone/>
-            </a:pPr>
-            <a:r>
-              <a:rPr lang="en-US" sz="1400" dirty="0">
-                <a:solidFill>
-                  <a:srgbClr val="A9A3C4"/>
+            <a:pPr marL="0" indent="0">
+              <a:buNone/>
+            </a:pPr>
+            <a:r>
+              <a:rPr lang="en-US" sz="2200" dirty="0">
+                <a:solidFill>
+                  <a:schemeClr val="bg1"/>
                 </a:solidFill>
                 <a:latin typeface="Calibri" pitchFamily="34" charset="0"/>
                 <a:ea typeface="Calibri" pitchFamily="34" charset="-122"/>
@@ -8633,7 +8777,11 @@
               </a:rPr>
               <a:t>Проверить, что в строке действительно число</a:t>
             </a:r>
-            <a:endParaRPr lang="en-US" sz="1400" dirty="0"/>
+            <a:endParaRPr lang="en-US" sz="2200" dirty="0">
+              <a:solidFill>
+                <a:schemeClr val="bg1"/>
+              </a:solidFill>
+            </a:endParaRPr>
           </a:p>
         </p:txBody>
       </p:sp>
@@ -8685,13 +8833,13 @@
           <a:bodyPr wrap="square" lIns="0" tIns="0" rIns="0" bIns="0" rtlCol="0" anchor="ctr"/>
           <a:lstStyle/>
           <a:p>
-            <a:pPr indent="0" marL="0">
-              <a:buNone/>
-            </a:pPr>
-            <a:r>
-              <a:rPr lang="en-US" sz="1500" dirty="0">
-                <a:solidFill>
-                  <a:srgbClr val="4FD1E0"/>
+            <a:pPr marL="0" indent="0">
+              <a:buNone/>
+            </a:pPr>
+            <a:r>
+              <a:rPr lang="en-US" sz="2200" dirty="0">
+                <a:solidFill>
+                  <a:schemeClr val="bg1"/>
                 </a:solidFill>
                 <a:latin typeface="Consolas" pitchFamily="34" charset="0"/>
                 <a:ea typeface="Consolas" pitchFamily="34" charset="-122"/>
@@ -8699,7 +8847,11 @@
               </a:rPr>
               <a:t>print("Итог: " + 60)</a:t>
             </a:r>
-            <a:endParaRPr lang="en-US" sz="1500" dirty="0"/>
+            <a:endParaRPr lang="en-US" sz="2200" dirty="0">
+              <a:solidFill>
+                <a:schemeClr val="bg1"/>
+              </a:solidFill>
+            </a:endParaRPr>
           </a:p>
         </p:txBody>
       </p:sp>
@@ -8724,13 +8876,13 @@
           <a:bodyPr wrap="square" lIns="0" tIns="0" rIns="0" bIns="0" rtlCol="0" anchor="ctr"/>
           <a:lstStyle/>
           <a:p>
-            <a:pPr indent="0" marL="0">
-              <a:buNone/>
-            </a:pPr>
-            <a:r>
-              <a:rPr lang="en-US" sz="1400" b="1" dirty="0">
-                <a:solidFill>
-                  <a:srgbClr val="8B7CF6"/>
+            <a:pPr marL="0" indent="0">
+              <a:buNone/>
+            </a:pPr>
+            <a:r>
+              <a:rPr lang="en-US" sz="2200" b="1" dirty="0">
+                <a:solidFill>
+                  <a:schemeClr val="bg1"/>
                 </a:solidFill>
                 <a:latin typeface="Consolas" pitchFamily="34" charset="0"/>
                 <a:ea typeface="Consolas" pitchFamily="34" charset="-122"/>
@@ -8738,7 +8890,11 @@
               </a:rPr>
               <a:t>TypeError</a:t>
             </a:r>
-            <a:endParaRPr lang="en-US" sz="1400" dirty="0"/>
+            <a:endParaRPr lang="en-US" sz="2200" dirty="0">
+              <a:solidFill>
+                <a:schemeClr val="bg1"/>
+              </a:solidFill>
+            </a:endParaRPr>
           </a:p>
         </p:txBody>
       </p:sp>
@@ -8763,13 +8919,13 @@
           <a:bodyPr wrap="square" lIns="0" tIns="0" rIns="0" bIns="0" rtlCol="0" anchor="ctr"/>
           <a:lstStyle/>
           <a:p>
-            <a:pPr indent="0" marL="0">
-              <a:buNone/>
-            </a:pPr>
-            <a:r>
-              <a:rPr lang="en-US" sz="1400" dirty="0">
-                <a:solidFill>
-                  <a:srgbClr val="FFFFFF"/>
+            <a:pPr marL="0" indent="0">
+              <a:buNone/>
+            </a:pPr>
+            <a:r>
+              <a:rPr lang="en-US" sz="2200" dirty="0">
+                <a:solidFill>
+                  <a:schemeClr val="bg1"/>
                 </a:solidFill>
                 <a:latin typeface="Calibri" pitchFamily="34" charset="0"/>
                 <a:ea typeface="Calibri" pitchFamily="34" charset="-122"/>
@@ -8777,7 +8933,11 @@
               </a:rPr>
               <a:t>Текст соединяется с числом</a:t>
             </a:r>
-            <a:endParaRPr lang="en-US" sz="1400" dirty="0"/>
+            <a:endParaRPr lang="en-US" sz="2200" dirty="0">
+              <a:solidFill>
+                <a:schemeClr val="bg1"/>
+              </a:solidFill>
+            </a:endParaRPr>
           </a:p>
         </p:txBody>
       </p:sp>
@@ -8802,13 +8962,13 @@
           <a:bodyPr wrap="square" lIns="0" tIns="0" rIns="0" bIns="0" rtlCol="0" anchor="ctr"/>
           <a:lstStyle/>
           <a:p>
-            <a:pPr indent="0" marL="0">
-              <a:buNone/>
-            </a:pPr>
-            <a:r>
-              <a:rPr lang="en-US" sz="1400" dirty="0">
-                <a:solidFill>
-                  <a:srgbClr val="A9A3C4"/>
+            <a:pPr marL="0" indent="0">
+              <a:buNone/>
+            </a:pPr>
+            <a:r>
+              <a:rPr lang="en-US" sz="2200" dirty="0">
+                <a:solidFill>
+                  <a:schemeClr val="bg1"/>
                 </a:solidFill>
                 <a:latin typeface="Calibri" pitchFamily="34" charset="0"/>
                 <a:ea typeface="Calibri" pitchFamily="34" charset="-122"/>
@@ -8816,7 +8976,11 @@
               </a:rPr>
               <a:t>Писать через запятую: print("Итог:", 60)</a:t>
             </a:r>
-            <a:endParaRPr lang="en-US" sz="1400" dirty="0"/>
+            <a:endParaRPr lang="en-US" sz="2200" dirty="0">
+              <a:solidFill>
+                <a:schemeClr val="bg1"/>
+              </a:solidFill>
+            </a:endParaRPr>
           </a:p>
         </p:txBody>
       </p:sp>
@@ -8868,13 +9032,13 @@
           <a:bodyPr wrap="square" lIns="0" tIns="0" rIns="0" bIns="0" rtlCol="0" anchor="ctr"/>
           <a:lstStyle/>
           <a:p>
-            <a:pPr indent="0" marL="0">
-              <a:buNone/>
-            </a:pPr>
-            <a:r>
-              <a:rPr lang="en-US" sz="1500" dirty="0">
-                <a:solidFill>
-                  <a:srgbClr val="4FD1E0"/>
+            <a:pPr marL="0" indent="0">
+              <a:buNone/>
+            </a:pPr>
+            <a:r>
+              <a:rPr lang="en-US" sz="2200" dirty="0">
+                <a:solidFill>
+                  <a:schemeClr val="bg1"/>
                 </a:solidFill>
                 <a:latin typeface="Consolas" pitchFamily="34" charset="0"/>
                 <a:ea typeface="Consolas" pitchFamily="34" charset="-122"/>
@@ -8882,7 +9046,11 @@
               </a:rPr>
               <a:t>10 / 5</a:t>
             </a:r>
-            <a:endParaRPr lang="en-US" sz="1500" dirty="0"/>
+            <a:endParaRPr lang="en-US" sz="2200" dirty="0">
+              <a:solidFill>
+                <a:schemeClr val="bg1"/>
+              </a:solidFill>
+            </a:endParaRPr>
           </a:p>
         </p:txBody>
       </p:sp>
@@ -8907,13 +9075,13 @@
           <a:bodyPr wrap="square" lIns="0" tIns="0" rIns="0" bIns="0" rtlCol="0" anchor="ctr"/>
           <a:lstStyle/>
           <a:p>
-            <a:pPr indent="0" marL="0">
-              <a:buNone/>
-            </a:pPr>
-            <a:r>
-              <a:rPr lang="en-US" sz="1400" b="1" dirty="0">
-                <a:solidFill>
-                  <a:srgbClr val="E8B84B"/>
+            <a:pPr marL="0" indent="0">
+              <a:buNone/>
+            </a:pPr>
+            <a:r>
+              <a:rPr lang="en-US" sz="2200" b="1" dirty="0">
+                <a:solidFill>
+                  <a:schemeClr val="bg1"/>
                 </a:solidFill>
                 <a:latin typeface="Consolas" pitchFamily="34" charset="0"/>
                 <a:ea typeface="Consolas" pitchFamily="34" charset="-122"/>
@@ -8921,7 +9089,11 @@
               </a:rPr>
               <a:t>2.0, а не 2</a:t>
             </a:r>
-            <a:endParaRPr lang="en-US" sz="1400" dirty="0"/>
+            <a:endParaRPr lang="en-US" sz="2200" dirty="0">
+              <a:solidFill>
+                <a:schemeClr val="bg1"/>
+              </a:solidFill>
+            </a:endParaRPr>
           </a:p>
         </p:txBody>
       </p:sp>
@@ -8946,13 +9118,13 @@
           <a:bodyPr wrap="square" lIns="0" tIns="0" rIns="0" bIns="0" rtlCol="0" anchor="ctr"/>
           <a:lstStyle/>
           <a:p>
-            <a:pPr indent="0" marL="0">
-              <a:buNone/>
-            </a:pPr>
-            <a:r>
-              <a:rPr lang="en-US" sz="1400" dirty="0">
-                <a:solidFill>
-                  <a:srgbClr val="FFFFFF"/>
+            <a:pPr marL="0" indent="0">
+              <a:buNone/>
+            </a:pPr>
+            <a:r>
+              <a:rPr lang="en-US" sz="2200" dirty="0">
+                <a:solidFill>
+                  <a:schemeClr val="bg1"/>
                 </a:solidFill>
                 <a:latin typeface="Calibri" pitchFamily="34" charset="0"/>
                 <a:ea typeface="Calibri" pitchFamily="34" charset="-122"/>
@@ -8960,7 +9132,11 @@
               </a:rPr>
               <a:t>Обычное деление даёт дробное всегда</a:t>
             </a:r>
-            <a:endParaRPr lang="en-US" sz="1400" dirty="0"/>
+            <a:endParaRPr lang="en-US" sz="2200" dirty="0">
+              <a:solidFill>
+                <a:schemeClr val="bg1"/>
+              </a:solidFill>
+            </a:endParaRPr>
           </a:p>
         </p:txBody>
       </p:sp>
@@ -8985,13 +9161,13 @@
           <a:bodyPr wrap="square" lIns="0" tIns="0" rIns="0" bIns="0" rtlCol="0" anchor="ctr"/>
           <a:lstStyle/>
           <a:p>
-            <a:pPr indent="0" marL="0">
-              <a:buNone/>
-            </a:pPr>
-            <a:r>
-              <a:rPr lang="en-US" sz="1400" dirty="0">
-                <a:solidFill>
-                  <a:srgbClr val="A9A3C4"/>
+            <a:pPr marL="0" indent="0">
+              <a:buNone/>
+            </a:pPr>
+            <a:r>
+              <a:rPr lang="en-US" sz="2200" dirty="0">
+                <a:solidFill>
+                  <a:schemeClr val="bg1"/>
                 </a:solidFill>
                 <a:latin typeface="Calibri" pitchFamily="34" charset="0"/>
                 <a:ea typeface="Calibri" pitchFamily="34" charset="-122"/>
@@ -8999,7 +9175,11 @@
               </a:rPr>
               <a:t>Нужно целое — применять //</a:t>
             </a:r>
-            <a:endParaRPr lang="en-US" sz="1400" dirty="0"/>
+            <a:endParaRPr lang="en-US" sz="2200" dirty="0">
+              <a:solidFill>
+                <a:schemeClr val="bg1"/>
+              </a:solidFill>
+            </a:endParaRPr>
           </a:p>
         </p:txBody>
       </p:sp>
@@ -9024,13 +9204,13 @@
           <a:bodyPr wrap="square" lIns="0" tIns="0" rIns="0" bIns="0" rtlCol="0" anchor="ctr"/>
           <a:lstStyle/>
           <a:p>
-            <a:pPr indent="0" marL="0">
-              <a:buNone/>
-            </a:pPr>
-            <a:r>
-              <a:rPr lang="en-US" sz="1600" i="1" dirty="0">
-                <a:solidFill>
-                  <a:srgbClr val="4FD1E0"/>
+            <a:pPr marL="0" indent="0">
+              <a:buNone/>
+            </a:pPr>
+            <a:r>
+              <a:rPr lang="en-US" sz="2000" b="1" i="1" dirty="0">
+                <a:solidFill>
+                  <a:schemeClr val="bg1"/>
                 </a:solidFill>
                 <a:latin typeface="Calibri" pitchFamily="34" charset="0"/>
                 <a:ea typeface="Calibri" pitchFamily="34" charset="-122"/>
@@ -9038,7 +9218,11 @@
               </a:rPr>
               <a:t>Тип — не формальность. Половина ошибок новичка связана именно с тем, что типы перепутаны.</a:t>
             </a:r>
-            <a:endParaRPr lang="en-US" sz="1600" dirty="0"/>
+            <a:endParaRPr lang="en-US" sz="2000" b="1" dirty="0">
+              <a:solidFill>
+                <a:schemeClr val="bg1"/>
+              </a:solidFill>
+            </a:endParaRPr>
           </a:p>
         </p:txBody>
       </p:sp>
@@ -9058,6 +9242,7 @@
         <a:solidFill>
           <a:srgbClr val="17132E"/>
         </a:solidFill>
+        <a:effectLst/>
       </p:bgPr>
     </p:bg>
     <p:spTree>
@@ -9095,7 +9280,7 @@
           <a:bodyPr wrap="square" lIns="0" tIns="0" rIns="0" bIns="0" rtlCol="0" anchor="ctr"/>
           <a:lstStyle/>
           <a:p>
-            <a:pPr indent="0" marL="0">
+            <a:pPr marL="0" indent="0">
               <a:buNone/>
             </a:pPr>
             <a:r>
@@ -9161,11 +9346,11 @@
           <a:bodyPr wrap="square" lIns="0" tIns="0" rIns="0" bIns="0" rtlCol="0" anchor="ctr"/>
           <a:lstStyle/>
           <a:p>
-            <a:pPr indent="0" marL="0">
-              <a:buNone/>
-            </a:pPr>
-            <a:r>
-              <a:rPr lang="en-US" sz="2100" dirty="0">
+            <a:pPr marL="0" indent="0">
+              <a:buNone/>
+            </a:pPr>
+            <a:r>
+              <a:rPr lang="en-US" sz="2100" b="1" dirty="0">
                 <a:solidFill>
                   <a:srgbClr val="FFFFFF"/>
                 </a:solidFill>
@@ -9175,7 +9360,7 @@
               </a:rPr>
               <a:t>Нужно вывести таблицу умножения на 7. Пять строк — напишем пять команд print. А если потребуется вывести числа от 1 до 1000?</a:t>
             </a:r>
-            <a:endParaRPr lang="en-US" sz="2100" dirty="0"/>
+            <a:endParaRPr lang="en-US" sz="2100" b="1" dirty="0"/>
           </a:p>
         </p:txBody>
       </p:sp>
@@ -9227,13 +9412,13 @@
           <a:bodyPr wrap="square" lIns="0" tIns="0" rIns="0" bIns="0" rtlCol="0" anchor="ctr"/>
           <a:lstStyle/>
           <a:p>
-            <a:pPr indent="0" marL="0">
+            <a:pPr marL="0" indent="0">
               <a:buNone/>
             </a:pPr>
             <a:r>
               <a:rPr lang="en-US" sz="2100" b="1" dirty="0">
                 <a:solidFill>
-                  <a:srgbClr val="4FD1E0"/>
+                  <a:schemeClr val="bg1"/>
                 </a:solidFill>
                 <a:latin typeface="Calibri" pitchFamily="34" charset="0"/>
                 <a:ea typeface="Calibri" pitchFamily="34" charset="-122"/>
@@ -9241,7 +9426,11 @@
               </a:rPr>
               <a:t>И вторая задача: найти сумму всех чисел от 1 до 100. Записывать сто сложений подряд?</a:t>
             </a:r>
-            <a:endParaRPr lang="en-US" sz="2100" dirty="0"/>
+            <a:endParaRPr lang="en-US" sz="2100" dirty="0">
+              <a:solidFill>
+                <a:schemeClr val="bg1"/>
+              </a:solidFill>
+            </a:endParaRPr>
           </a:p>
         </p:txBody>
       </p:sp>
@@ -9266,7 +9455,7 @@
           <a:bodyPr wrap="square" lIns="0" tIns="0" rIns="0" bIns="0" rtlCol="0" anchor="ctr"/>
           <a:lstStyle/>
           <a:p>
-            <a:pPr indent="0" marL="0">
+            <a:pPr marL="0" indent="0">
               <a:buNone/>
             </a:pPr>
             <a:r>
@@ -9300,6 +9489,7 @@
         <a:solidFill>
           <a:srgbClr val="17132E"/>
         </a:solidFill>
+        <a:effectLst/>
       </p:bgPr>
     </p:bg>
     <p:spTree>
@@ -9359,11 +9549,11 @@
           <a:bodyPr wrap="square" lIns="0" tIns="0" rIns="0" bIns="0" rtlCol="0" anchor="ctr"/>
           <a:lstStyle/>
           <a:p>
-            <a:pPr algn="ctr" indent="0" marL="0">
-              <a:buNone/>
-            </a:pPr>
-            <a:r>
-              <a:rPr lang="en-US" sz="1400" b="1" spc="200" kern="0" dirty="0">
+            <a:pPr marL="0" indent="0" algn="ctr">
+              <a:buNone/>
+            </a:pPr>
+            <a:r>
+              <a:rPr lang="en-US" sz="1400" b="1" kern="0" spc="200" dirty="0">
                 <a:solidFill>
                   <a:srgbClr val="17132E"/>
                 </a:solidFill>
@@ -9425,7 +9615,7 @@
           <a:bodyPr wrap="square" lIns="0" tIns="0" rIns="0" bIns="0" rtlCol="0" anchor="ctr"/>
           <a:lstStyle/>
           <a:p>
-            <a:pPr algn="ctr" indent="0" marL="0">
+            <a:pPr marL="0" indent="0" algn="ctr">
               <a:buNone/>
             </a:pPr>
             <a:r>
@@ -9464,7 +9654,7 @@
           <a:bodyPr wrap="square" lIns="0" tIns="0" rIns="0" bIns="0" rtlCol="0" anchor="ctr"/>
           <a:lstStyle/>
           <a:p>
-            <a:pPr indent="0" marL="0">
+            <a:pPr marL="0" indent="0">
               <a:buNone/>
             </a:pPr>
             <a:r>
@@ -9491,7 +9681,7 @@
         <p:spPr>
           <a:xfrm>
             <a:off x="640080" y="2788920"/>
-            <a:ext cx="6766560" cy="1389888"/>
+            <a:ext cx="6890780" cy="1618488"/>
           </a:xfrm>
           <a:prstGeom prst="roundRect">
             <a:avLst>
@@ -9530,16 +9720,16 @@
           <a:bodyPr wrap="square" lIns="0" tIns="0" rIns="0" bIns="0" rtlCol="0" anchor="ctr"/>
           <a:lstStyle/>
           <a:p>
-            <a:pPr indent="0" marL="0">
+            <a:pPr marL="0" indent="0">
               <a:lnSpc>
                 <a:spcPct val="110000"/>
               </a:lnSpc>
               <a:buNone/>
             </a:pPr>
             <a:r>
-              <a:rPr lang="en-US" sz="1700" dirty="0">
-                <a:solidFill>
-                  <a:srgbClr val="4FD1E0"/>
+              <a:rPr lang="en-US" sz="2400" b="1" dirty="0">
+                <a:solidFill>
+                  <a:schemeClr val="bg1"/>
                 </a:solidFill>
                 <a:latin typeface="Consolas" pitchFamily="34" charset="0"/>
                 <a:ea typeface="Consolas" pitchFamily="34" charset="-122"/>
@@ -9547,19 +9737,23 @@
               </a:rPr>
               <a:t>a = 10</a:t>
             </a:r>
-            <a:endParaRPr lang="en-US" sz="1700" dirty="0"/>
-          </a:p>
-          <a:p>
-            <a:pPr indent="0" marL="0">
+            <a:endParaRPr lang="en-US" sz="2400" b="1" dirty="0">
+              <a:solidFill>
+                <a:schemeClr val="bg1"/>
+              </a:solidFill>
+            </a:endParaRPr>
+          </a:p>
+          <a:p>
+            <a:pPr marL="0" indent="0">
               <a:lnSpc>
                 <a:spcPct val="110000"/>
               </a:lnSpc>
               <a:buNone/>
             </a:pPr>
             <a:r>
-              <a:rPr lang="en-US" sz="1700" dirty="0">
-                <a:solidFill>
-                  <a:srgbClr val="4FD1E0"/>
+              <a:rPr lang="en-US" sz="2400" b="1" dirty="0">
+                <a:solidFill>
+                  <a:schemeClr val="bg1"/>
                 </a:solidFill>
                 <a:latin typeface="Consolas" pitchFamily="34" charset="0"/>
                 <a:ea typeface="Consolas" pitchFamily="34" charset="-122"/>
@@ -9567,19 +9761,23 @@
               </a:rPr>
               <a:t>b = 4.5</a:t>
             </a:r>
-            <a:endParaRPr lang="en-US" sz="1700" dirty="0"/>
-          </a:p>
-          <a:p>
-            <a:pPr indent="0" marL="0">
+            <a:endParaRPr lang="en-US" sz="2400" b="1" dirty="0">
+              <a:solidFill>
+                <a:schemeClr val="bg1"/>
+              </a:solidFill>
+            </a:endParaRPr>
+          </a:p>
+          <a:p>
+            <a:pPr marL="0" indent="0">
               <a:lnSpc>
                 <a:spcPct val="110000"/>
               </a:lnSpc>
               <a:buNone/>
             </a:pPr>
             <a:r>
-              <a:rPr lang="en-US" sz="1700" dirty="0">
-                <a:solidFill>
-                  <a:srgbClr val="4FD1E0"/>
+              <a:rPr lang="en-US" sz="2400" b="1" dirty="0">
+                <a:solidFill>
+                  <a:schemeClr val="bg1"/>
                 </a:solidFill>
                 <a:latin typeface="Consolas" pitchFamily="34" charset="0"/>
                 <a:ea typeface="Consolas" pitchFamily="34" charset="-122"/>
@@ -9587,19 +9785,23 @@
               </a:rPr>
               <a:t>c = "10"</a:t>
             </a:r>
-            <a:endParaRPr lang="en-US" sz="1700" dirty="0"/>
-          </a:p>
-          <a:p>
-            <a:pPr indent="0" marL="0">
+            <a:endParaRPr lang="en-US" sz="2400" b="1" dirty="0">
+              <a:solidFill>
+                <a:schemeClr val="bg1"/>
+              </a:solidFill>
+            </a:endParaRPr>
+          </a:p>
+          <a:p>
+            <a:pPr marL="0" indent="0">
               <a:lnSpc>
                 <a:spcPct val="110000"/>
               </a:lnSpc>
               <a:buNone/>
             </a:pPr>
             <a:r>
-              <a:rPr lang="en-US" sz="1700" dirty="0">
-                <a:solidFill>
-                  <a:srgbClr val="4FD1E0"/>
+              <a:rPr lang="en-US" sz="2400" b="1" dirty="0">
+                <a:solidFill>
+                  <a:schemeClr val="bg1"/>
                 </a:solidFill>
                 <a:latin typeface="Consolas" pitchFamily="34" charset="0"/>
                 <a:ea typeface="Consolas" pitchFamily="34" charset="-122"/>
@@ -9607,7 +9809,11 @@
               </a:rPr>
               <a:t>d = True</a:t>
             </a:r>
-            <a:endParaRPr lang="en-US" sz="1700" dirty="0"/>
+            <a:endParaRPr lang="en-US" sz="2400" b="1" dirty="0">
+              <a:solidFill>
+                <a:schemeClr val="bg1"/>
+              </a:solidFill>
+            </a:endParaRPr>
           </a:p>
         </p:txBody>
       </p:sp>
@@ -9632,13 +9838,13 @@
           <a:bodyPr wrap="square" lIns="0" tIns="0" rIns="0" bIns="0" rtlCol="0" anchor="ctr"/>
           <a:lstStyle/>
           <a:p>
-            <a:pPr indent="0" marL="0">
-              <a:buNone/>
-            </a:pPr>
-            <a:r>
-              <a:rPr lang="en-US" sz="1700" i="1" dirty="0">
-                <a:solidFill>
-                  <a:srgbClr val="8B7CF6"/>
+            <a:pPr marL="0" indent="0">
+              <a:buNone/>
+            </a:pPr>
+            <a:r>
+              <a:rPr lang="en-US" sz="2400" i="1" dirty="0">
+                <a:solidFill>
+                  <a:schemeClr val="bg1"/>
                 </a:solidFill>
                 <a:latin typeface="Calibri" pitchFamily="34" charset="0"/>
                 <a:ea typeface="Calibri" pitchFamily="34" charset="-122"/>
@@ -9646,7 +9852,11 @@
               </a:rPr>
               <a:t>И второй вопрос: что выведет a + b, и что выведет a + c?</a:t>
             </a:r>
-            <a:endParaRPr lang="en-US" sz="1700" dirty="0"/>
+            <a:endParaRPr lang="en-US" sz="2400" dirty="0">
+              <a:solidFill>
+                <a:schemeClr val="bg1"/>
+              </a:solidFill>
+            </a:endParaRPr>
           </a:p>
         </p:txBody>
       </p:sp>
@@ -9666,6 +9876,7 @@
         <a:solidFill>
           <a:srgbClr val="17132E"/>
         </a:solidFill>
+        <a:effectLst/>
       </p:bgPr>
     </p:bg>
     <p:spTree>
@@ -9725,11 +9936,11 @@
           <a:bodyPr wrap="square" lIns="0" tIns="0" rIns="0" bIns="0" rtlCol="0" anchor="ctr"/>
           <a:lstStyle/>
           <a:p>
-            <a:pPr algn="ctr" indent="0" marL="0">
-              <a:buNone/>
-            </a:pPr>
-            <a:r>
-              <a:rPr lang="en-US" sz="1500" b="1" spc="200" kern="0" dirty="0">
+            <a:pPr marL="0" indent="0" algn="ctr">
+              <a:buNone/>
+            </a:pPr>
+            <a:r>
+              <a:rPr lang="en-US" sz="1500" b="1" kern="0" spc="200" dirty="0">
                 <a:solidFill>
                   <a:srgbClr val="17132E"/>
                 </a:solidFill>
@@ -9764,7 +9975,7 @@
           <a:bodyPr wrap="square" lIns="0" tIns="0" rIns="0" bIns="0" rtlCol="0" anchor="ctr"/>
           <a:lstStyle/>
           <a:p>
-            <a:pPr indent="0" marL="0">
+            <a:pPr marL="0" indent="0">
               <a:buNone/>
             </a:pPr>
             <a:r>
@@ -9830,7 +10041,7 @@
           <a:bodyPr wrap="square" lIns="0" tIns="0" rIns="0" bIns="0" rtlCol="0" anchor="ctr"/>
           <a:lstStyle/>
           <a:p>
-            <a:pPr indent="0" marL="0">
+            <a:pPr marL="0" indent="0">
               <a:lnSpc>
                 <a:spcPct val="110000"/>
               </a:lnSpc>
@@ -9850,7 +10061,7 @@
             <a:endParaRPr lang="en-US" sz="2400" dirty="0"/>
           </a:p>
           <a:p>
-            <a:pPr indent="0" marL="0">
+            <a:pPr marL="0" indent="0">
               <a:lnSpc>
                 <a:spcPct val="110000"/>
               </a:lnSpc>
@@ -9870,7 +10081,7 @@
             <a:endParaRPr lang="en-US" sz="2400" dirty="0"/>
           </a:p>
           <a:p>
-            <a:pPr indent="0" marL="0">
+            <a:pPr marL="0" indent="0">
               <a:lnSpc>
                 <a:spcPct val="110000"/>
               </a:lnSpc>
@@ -9890,7 +10101,7 @@
             <a:endParaRPr lang="en-US" sz="2400" dirty="0"/>
           </a:p>
           <a:p>
-            <a:pPr indent="0" marL="0">
+            <a:pPr marL="0" indent="0">
               <a:lnSpc>
                 <a:spcPct val="110000"/>
               </a:lnSpc>
@@ -9959,7 +10170,7 @@
           <a:bodyPr wrap="square" lIns="0" tIns="0" rIns="0" bIns="0" rtlCol="0" anchor="ctr"/>
           <a:lstStyle/>
           <a:p>
-            <a:pPr indent="0" marL="0">
+            <a:pPr marL="0" indent="0">
               <a:buNone/>
             </a:pPr>
             <a:r>
@@ -9993,6 +10204,7 @@
         <a:solidFill>
           <a:srgbClr val="17132E"/>
         </a:solidFill>
+        <a:effectLst/>
       </p:bgPr>
     </p:bg>
     <p:spTree>
@@ -10052,11 +10264,11 @@
           <a:bodyPr wrap="square" lIns="0" tIns="0" rIns="0" bIns="0" rtlCol="0" anchor="ctr"/>
           <a:lstStyle/>
           <a:p>
-            <a:pPr algn="ctr" indent="0" marL="0">
-              <a:buNone/>
-            </a:pPr>
-            <a:r>
-              <a:rPr lang="en-US" sz="1400" b="1" spc="200" kern="0" dirty="0">
+            <a:pPr marL="0" indent="0" algn="ctr">
+              <a:buNone/>
+            </a:pPr>
+            <a:r>
+              <a:rPr lang="en-US" sz="1400" b="1" kern="0" spc="200" dirty="0">
                 <a:solidFill>
                   <a:srgbClr val="17132E"/>
                 </a:solidFill>
@@ -10118,7 +10330,7 @@
           <a:bodyPr wrap="square" lIns="0" tIns="0" rIns="0" bIns="0" rtlCol="0" anchor="ctr"/>
           <a:lstStyle/>
           <a:p>
-            <a:pPr algn="ctr" indent="0" marL="0">
+            <a:pPr marL="0" indent="0" algn="ctr">
               <a:buNone/>
             </a:pPr>
             <a:r>
@@ -10157,7 +10369,7 @@
           <a:bodyPr wrap="square" lIns="0" tIns="0" rIns="0" bIns="0" rtlCol="0" anchor="ctr"/>
           <a:lstStyle/>
           <a:p>
-            <a:pPr indent="0" marL="0">
+            <a:pPr marL="0" indent="0">
               <a:buNone/>
             </a:pPr>
             <a:r>
@@ -10183,8 +10395,8 @@
         </p:nvSpPr>
         <p:spPr>
           <a:xfrm>
-            <a:off x="640080" y="2788920"/>
-            <a:ext cx="6766560" cy="1938528"/>
+            <a:off x="640079" y="2493034"/>
+            <a:ext cx="6899407" cy="2463014"/>
           </a:xfrm>
           <a:prstGeom prst="roundRect">
             <a:avLst>
@@ -10223,14 +10435,14 @@
           <a:bodyPr wrap="square" lIns="0" tIns="0" rIns="0" bIns="0" rtlCol="0" anchor="ctr"/>
           <a:lstStyle/>
           <a:p>
-            <a:pPr indent="0" marL="0">
+            <a:pPr marL="0" indent="0">
               <a:lnSpc>
                 <a:spcPct val="110000"/>
               </a:lnSpc>
               <a:buNone/>
             </a:pPr>
             <a:r>
-              <a:rPr lang="en-US" sz="1700" dirty="0">
+              <a:rPr lang="en-US" sz="2400" dirty="0">
                 <a:solidFill>
                   <a:srgbClr val="4FD1E0"/>
                 </a:solidFill>
@@ -10240,26 +10452,26 @@
               </a:rPr>
               <a:t>summa = 0</a:t>
             </a:r>
-            <a:endParaRPr lang="en-US" sz="1700" dirty="0"/>
-          </a:p>
-          <a:p>
-            <a:pPr indent="0" marL="0">
+            <a:endParaRPr lang="en-US" sz="2400" dirty="0"/>
+          </a:p>
+          <a:p>
+            <a:pPr marL="0" indent="0">
               <a:lnSpc>
                 <a:spcPct val="110000"/>
               </a:lnSpc>
               <a:buNone/>
             </a:pPr>
-            <a:endParaRPr lang="en-US" sz="1700" dirty="0"/>
-          </a:p>
-          <a:p>
-            <a:pPr indent="0" marL="0">
+            <a:endParaRPr lang="en-US" sz="2400" dirty="0"/>
+          </a:p>
+          <a:p>
+            <a:pPr marL="0" indent="0">
               <a:lnSpc>
                 <a:spcPct val="110000"/>
               </a:lnSpc>
               <a:buNone/>
             </a:pPr>
             <a:r>
-              <a:rPr lang="en-US" sz="1700" dirty="0">
+              <a:rPr lang="en-US" sz="2400" dirty="0">
                 <a:solidFill>
                   <a:srgbClr val="4FD1E0"/>
                 </a:solidFill>
@@ -10269,17 +10481,17 @@
               </a:rPr>
               <a:t>for i in range(1, 4):</a:t>
             </a:r>
-            <a:endParaRPr lang="en-US" sz="1700" dirty="0"/>
-          </a:p>
-          <a:p>
-            <a:pPr indent="0" marL="0">
+            <a:endParaRPr lang="en-US" sz="2400" dirty="0"/>
+          </a:p>
+          <a:p>
+            <a:pPr marL="0" indent="0">
               <a:lnSpc>
                 <a:spcPct val="110000"/>
               </a:lnSpc>
               <a:buNone/>
             </a:pPr>
             <a:r>
-              <a:rPr lang="en-US" sz="1700" dirty="0">
+              <a:rPr lang="en-US" sz="2400" dirty="0">
                 <a:solidFill>
                   <a:srgbClr val="4FD1E0"/>
                 </a:solidFill>
@@ -10289,26 +10501,26 @@
               </a:rPr>
               <a:t>    summa = summa + i</a:t>
             </a:r>
-            <a:endParaRPr lang="en-US" sz="1700" dirty="0"/>
-          </a:p>
-          <a:p>
-            <a:pPr indent="0" marL="0">
+            <a:endParaRPr lang="en-US" sz="2400" dirty="0"/>
+          </a:p>
+          <a:p>
+            <a:pPr marL="0" indent="0">
               <a:lnSpc>
                 <a:spcPct val="110000"/>
               </a:lnSpc>
               <a:buNone/>
             </a:pPr>
-            <a:endParaRPr lang="en-US" sz="1700" dirty="0"/>
-          </a:p>
-          <a:p>
-            <a:pPr indent="0" marL="0">
+            <a:endParaRPr lang="en-US" sz="2400" dirty="0"/>
+          </a:p>
+          <a:p>
+            <a:pPr marL="0" indent="0">
               <a:lnSpc>
                 <a:spcPct val="110000"/>
               </a:lnSpc>
               <a:buNone/>
             </a:pPr>
             <a:r>
-              <a:rPr lang="en-US" sz="1700" dirty="0">
+              <a:rPr lang="en-US" sz="2400" dirty="0">
                 <a:solidFill>
                   <a:srgbClr val="4FD1E0"/>
                 </a:solidFill>
@@ -10318,7 +10530,7 @@
               </a:rPr>
               <a:t>print(summa)</a:t>
             </a:r>
-            <a:endParaRPr lang="en-US" sz="1700" dirty="0"/>
+            <a:endParaRPr lang="en-US" sz="2400" dirty="0"/>
           </a:p>
         </p:txBody>
       </p:sp>
@@ -10343,13 +10555,13 @@
           <a:bodyPr wrap="square" lIns="0" tIns="0" rIns="0" bIns="0" rtlCol="0" anchor="ctr"/>
           <a:lstStyle/>
           <a:p>
-            <a:pPr indent="0" marL="0">
-              <a:buNone/>
-            </a:pPr>
-            <a:r>
-              <a:rPr lang="en-US" sz="1700" i="1" dirty="0">
-                <a:solidFill>
-                  <a:srgbClr val="8B7CF6"/>
+            <a:pPr marL="0" indent="0">
+              <a:buNone/>
+            </a:pPr>
+            <a:r>
+              <a:rPr lang="en-US" sz="2400" b="1" i="1" dirty="0">
+                <a:solidFill>
+                  <a:schemeClr val="bg1"/>
                 </a:solidFill>
                 <a:latin typeface="Calibri" pitchFamily="34" charset="0"/>
                 <a:ea typeface="Calibri" pitchFamily="34" charset="-122"/>
@@ -10357,7 +10569,11 @@
               </a:rPr>
               <a:t>Заполните таблицу трассировки: шаг, i, сумма.</a:t>
             </a:r>
-            <a:endParaRPr lang="en-US" sz="1700" dirty="0"/>
+            <a:endParaRPr lang="en-US" sz="2400" b="1" dirty="0">
+              <a:solidFill>
+                <a:schemeClr val="bg1"/>
+              </a:solidFill>
+            </a:endParaRPr>
           </a:p>
         </p:txBody>
       </p:sp>
@@ -10377,6 +10593,7 @@
         <a:solidFill>
           <a:srgbClr val="17132E"/>
         </a:solidFill>
+        <a:effectLst/>
       </p:bgPr>
     </p:bg>
     <p:spTree>
@@ -10414,7 +10631,7 @@
           <a:bodyPr wrap="square" lIns="0" tIns="0" rIns="0" bIns="0" rtlCol="0" anchor="ctr"/>
           <a:lstStyle/>
           <a:p>
-            <a:pPr indent="0" marL="0">
+            <a:pPr marL="0" indent="0">
               <a:buNone/>
             </a:pPr>
             <a:r>
@@ -10453,7 +10670,7 @@
           <a:bodyPr wrap="square" lIns="0" tIns="0" rIns="0" bIns="0" rtlCol="0" anchor="ctr"/>
           <a:lstStyle/>
           <a:p>
-            <a:pPr indent="0" marL="0">
+            <a:pPr marL="0" indent="0">
               <a:buNone/>
             </a:pPr>
             <a:r>
@@ -10519,7 +10736,7 @@
           <a:bodyPr wrap="square" lIns="0" tIns="0" rIns="0" bIns="0" rtlCol="0" anchor="ctr"/>
           <a:lstStyle/>
           <a:p>
-            <a:pPr indent="0" marL="0">
+            <a:pPr marL="0" indent="0">
               <a:buNone/>
             </a:pPr>
             <a:r>
@@ -10670,7 +10887,7 @@
           <a:bodyPr wrap="square" lIns="0" tIns="0" rIns="0" bIns="0" rtlCol="0" anchor="ctr"/>
           <a:lstStyle/>
           <a:p>
-            <a:pPr indent="0" marL="0">
+            <a:pPr marL="0" indent="0">
               <a:buNone/>
             </a:pPr>
             <a:r>
@@ -10709,7 +10926,7 @@
           <a:bodyPr wrap="square" lIns="0" tIns="0" rIns="0" bIns="0" rtlCol="0" anchor="ctr"/>
           <a:lstStyle/>
           <a:p>
-            <a:pPr indent="0" marL="0">
+            <a:pPr marL="0" indent="0">
               <a:buNone/>
             </a:pPr>
             <a:r>
@@ -10726,13 +10943,13 @@
             <a:endParaRPr lang="en-US" sz="1500" dirty="0"/>
           </a:p>
           <a:p>
-            <a:pPr indent="0" marL="0">
+            <a:pPr marL="0" indent="0">
               <a:buNone/>
             </a:pPr>
             <a:endParaRPr lang="en-US" sz="1500" dirty="0"/>
           </a:p>
           <a:p>
-            <a:pPr indent="0" marL="0">
+            <a:pPr marL="0" indent="0">
               <a:buNone/>
             </a:pPr>
             <a:r>
@@ -10798,7 +11015,7 @@
           <a:bodyPr wrap="square" lIns="0" tIns="0" rIns="0" bIns="0" rtlCol="0" anchor="ctr"/>
           <a:lstStyle/>
           <a:p>
-            <a:pPr indent="0" marL="0">
+            <a:pPr marL="0" indent="0">
               <a:buNone/>
             </a:pPr>
             <a:r>
@@ -10837,7 +11054,7 @@
           <a:bodyPr wrap="square" lIns="0" tIns="0" rIns="0" bIns="0" rtlCol="0" anchor="ctr"/>
           <a:lstStyle/>
           <a:p>
-            <a:pPr indent="0" marL="0">
+            <a:pPr marL="0" indent="0">
               <a:buNone/>
             </a:pPr>
             <a:r>
@@ -10871,6 +11088,7 @@
         <a:solidFill>
           <a:srgbClr val="17132E"/>
         </a:solidFill>
+        <a:effectLst/>
       </p:bgPr>
     </p:bg>
     <p:spTree>
@@ -10908,7 +11126,7 @@
           <a:bodyPr wrap="square" lIns="0" tIns="0" rIns="0" bIns="0" rtlCol="0" anchor="ctr"/>
           <a:lstStyle/>
           <a:p>
-            <a:pPr indent="0" marL="0">
+            <a:pPr marL="0" indent="0">
               <a:buNone/>
             </a:pPr>
             <a:r>
@@ -10994,7 +11212,7 @@
           <a:bodyPr wrap="square" lIns="0" tIns="0" rIns="0" bIns="0" rtlCol="0" anchor="ctr"/>
           <a:lstStyle/>
           <a:p>
-            <a:pPr algn="ctr" indent="0" marL="0">
+            <a:pPr marL="0" indent="0" algn="ctr">
               <a:buNone/>
             </a:pPr>
             <a:r>
@@ -11033,7 +11251,7 @@
           <a:bodyPr wrap="square" lIns="0" tIns="0" rIns="0" bIns="0" rtlCol="0" anchor="ctr"/>
           <a:lstStyle/>
           <a:p>
-            <a:pPr indent="0" marL="0">
+            <a:pPr marL="0" indent="0">
               <a:buNone/>
             </a:pPr>
             <a:r>
@@ -11119,7 +11337,7 @@
           <a:bodyPr wrap="square" lIns="0" tIns="0" rIns="0" bIns="0" rtlCol="0" anchor="ctr"/>
           <a:lstStyle/>
           <a:p>
-            <a:pPr algn="ctr" indent="0" marL="0">
+            <a:pPr marL="0" indent="0" algn="ctr">
               <a:buNone/>
             </a:pPr>
             <a:r>
@@ -11158,7 +11376,7 @@
           <a:bodyPr wrap="square" lIns="0" tIns="0" rIns="0" bIns="0" rtlCol="0" anchor="ctr"/>
           <a:lstStyle/>
           <a:p>
-            <a:pPr indent="0" marL="0">
+            <a:pPr marL="0" indent="0">
               <a:buNone/>
             </a:pPr>
             <a:r>
@@ -11244,7 +11462,7 @@
           <a:bodyPr wrap="square" lIns="0" tIns="0" rIns="0" bIns="0" rtlCol="0" anchor="ctr"/>
           <a:lstStyle/>
           <a:p>
-            <a:pPr algn="ctr" indent="0" marL="0">
+            <a:pPr marL="0" indent="0" algn="ctr">
               <a:buNone/>
             </a:pPr>
             <a:r>
@@ -11283,7 +11501,7 @@
           <a:bodyPr wrap="square" lIns="0" tIns="0" rIns="0" bIns="0" rtlCol="0" anchor="ctr"/>
           <a:lstStyle/>
           <a:p>
-            <a:pPr indent="0" marL="0">
+            <a:pPr marL="0" indent="0">
               <a:buNone/>
             </a:pPr>
             <a:r>
@@ -11369,7 +11587,7 @@
           <a:bodyPr wrap="square" lIns="0" tIns="0" rIns="0" bIns="0" rtlCol="0" anchor="ctr"/>
           <a:lstStyle/>
           <a:p>
-            <a:pPr algn="ctr" indent="0" marL="0">
+            <a:pPr marL="0" indent="0" algn="ctr">
               <a:buNone/>
             </a:pPr>
             <a:r>
@@ -11408,7 +11626,7 @@
           <a:bodyPr wrap="square" lIns="0" tIns="0" rIns="0" bIns="0" rtlCol="0" anchor="ctr"/>
           <a:lstStyle/>
           <a:p>
-            <a:pPr indent="0" marL="0">
+            <a:pPr marL="0" indent="0">
               <a:buNone/>
             </a:pPr>
             <a:r>
@@ -11494,7 +11712,7 @@
           <a:bodyPr wrap="square" lIns="0" tIns="0" rIns="0" bIns="0" rtlCol="0" anchor="ctr"/>
           <a:lstStyle/>
           <a:p>
-            <a:pPr algn="ctr" indent="0" marL="0">
+            <a:pPr marL="0" indent="0" algn="ctr">
               <a:buNone/>
             </a:pPr>
             <a:r>
@@ -11533,7 +11751,7 @@
           <a:bodyPr wrap="square" lIns="0" tIns="0" rIns="0" bIns="0" rtlCol="0" anchor="ctr"/>
           <a:lstStyle/>
           <a:p>
-            <a:pPr indent="0" marL="0">
+            <a:pPr marL="0" indent="0">
               <a:buNone/>
             </a:pPr>
             <a:r>
@@ -11619,7 +11837,7 @@
           <a:bodyPr wrap="square" lIns="0" tIns="0" rIns="0" bIns="0" rtlCol="0" anchor="ctr"/>
           <a:lstStyle/>
           <a:p>
-            <a:pPr algn="ctr" indent="0" marL="0">
+            <a:pPr marL="0" indent="0" algn="ctr">
               <a:buNone/>
             </a:pPr>
             <a:r>
@@ -11658,7 +11876,7 @@
           <a:bodyPr wrap="square" lIns="0" tIns="0" rIns="0" bIns="0" rtlCol="0" anchor="ctr"/>
           <a:lstStyle/>
           <a:p>
-            <a:pPr indent="0" marL="0">
+            <a:pPr marL="0" indent="0">
               <a:buNone/>
             </a:pPr>
             <a:r>
@@ -11697,7 +11915,7 @@
           <a:bodyPr wrap="square" lIns="0" tIns="0" rIns="0" bIns="0" rtlCol="0" anchor="ctr"/>
           <a:lstStyle/>
           <a:p>
-            <a:pPr indent="0" marL="0">
+            <a:pPr marL="0" indent="0">
               <a:buNone/>
             </a:pPr>
             <a:r>
@@ -11763,7 +11981,7 @@
           <a:bodyPr wrap="square" lIns="0" tIns="0" rIns="0" bIns="0" rtlCol="0" anchor="ctr"/>
           <a:lstStyle/>
           <a:p>
-            <a:pPr indent="0" marL="0">
+            <a:pPr marL="0" indent="0">
               <a:lnSpc>
                 <a:spcPct val="110000"/>
               </a:lnSpc>
@@ -11783,7 +12001,7 @@
             <a:endParaRPr lang="en-US" sz="1500" dirty="0"/>
           </a:p>
           <a:p>
-            <a:pPr indent="0" marL="0">
+            <a:pPr marL="0" indent="0">
               <a:lnSpc>
                 <a:spcPct val="110000"/>
               </a:lnSpc>
@@ -11825,7 +12043,7 @@
           <a:bodyPr wrap="square" lIns="0" tIns="0" rIns="0" bIns="0" rtlCol="0" anchor="ctr"/>
           <a:lstStyle/>
           <a:p>
-            <a:pPr indent="0" marL="0">
+            <a:pPr marL="0" indent="0">
               <a:buNone/>
             </a:pPr>
             <a:r>
@@ -11891,7 +12109,7 @@
           <a:bodyPr wrap="square" lIns="0" tIns="0" rIns="0" bIns="0" rtlCol="0" anchor="ctr"/>
           <a:lstStyle/>
           <a:p>
-            <a:pPr indent="0" marL="0">
+            <a:pPr marL="0" indent="0">
               <a:lnSpc>
                 <a:spcPct val="110000"/>
               </a:lnSpc>
@@ -11911,7 +12129,7 @@
             <a:endParaRPr lang="en-US" sz="1400" dirty="0"/>
           </a:p>
           <a:p>
-            <a:pPr indent="0" marL="0">
+            <a:pPr marL="0" indent="0">
               <a:lnSpc>
                 <a:spcPct val="110000"/>
               </a:lnSpc>
@@ -11931,7 +12149,7 @@
             <a:endParaRPr lang="en-US" sz="1400" dirty="0"/>
           </a:p>
           <a:p>
-            <a:pPr indent="0" marL="0">
+            <a:pPr marL="0" indent="0">
               <a:lnSpc>
                 <a:spcPct val="110000"/>
               </a:lnSpc>
@@ -11951,7 +12169,7 @@
             <a:endParaRPr lang="en-US" sz="1400" dirty="0"/>
           </a:p>
           <a:p>
-            <a:pPr indent="0" marL="0">
+            <a:pPr marL="0" indent="0">
               <a:lnSpc>
                 <a:spcPct val="110000"/>
               </a:lnSpc>
@@ -11993,7 +12211,7 @@
           <a:bodyPr wrap="square" lIns="0" tIns="0" rIns="0" bIns="0" rtlCol="0" anchor="ctr"/>
           <a:lstStyle/>
           <a:p>
-            <a:pPr indent="0" marL="0">
+            <a:pPr marL="0" indent="0">
               <a:buNone/>
             </a:pPr>
             <a:r>
@@ -12027,6 +12245,7 @@
         <a:solidFill>
           <a:srgbClr val="17132E"/>
         </a:solidFill>
+        <a:effectLst/>
       </p:bgPr>
     </p:bg>
     <p:spTree>
@@ -12064,7 +12283,7 @@
           <a:bodyPr wrap="square" lIns="0" tIns="0" rIns="0" bIns="0" rtlCol="0" anchor="ctr"/>
           <a:lstStyle/>
           <a:p>
-            <a:pPr indent="0" marL="0">
+            <a:pPr marL="0" indent="0">
               <a:buNone/>
             </a:pPr>
             <a:r>
@@ -12130,13 +12349,13 @@
           <a:bodyPr wrap="square" lIns="0" tIns="0" rIns="0" bIns="0" rtlCol="0" anchor="ctr"/>
           <a:lstStyle/>
           <a:p>
-            <a:pPr indent="0" marL="0">
-              <a:buNone/>
-            </a:pPr>
-            <a:r>
-              <a:rPr lang="en-US" sz="1600" b="1" dirty="0">
-                <a:solidFill>
-                  <a:srgbClr val="8B7CF6"/>
+            <a:pPr marL="0" indent="0">
+              <a:buNone/>
+            </a:pPr>
+            <a:r>
+              <a:rPr lang="en-US" sz="2000" b="1" dirty="0">
+                <a:solidFill>
+                  <a:schemeClr val="bg1"/>
                 </a:solidFill>
                 <a:latin typeface="Calibri" pitchFamily="34" charset="0"/>
                 <a:ea typeface="Calibri" pitchFamily="34" charset="-122"/>
@@ -12144,7 +12363,11 @@
               </a:rPr>
               <a:t>Всем</a:t>
             </a:r>
-            <a:endParaRPr lang="en-US" sz="1600" dirty="0"/>
+            <a:endParaRPr lang="en-US" sz="2000" dirty="0">
+              <a:solidFill>
+                <a:schemeClr val="bg1"/>
+              </a:solidFill>
+            </a:endParaRPr>
           </a:p>
         </p:txBody>
       </p:sp>
@@ -12169,13 +12392,13 @@
           <a:bodyPr wrap="square" lIns="0" tIns="0" rIns="0" bIns="0" rtlCol="0" anchor="ctr"/>
           <a:lstStyle/>
           <a:p>
-            <a:pPr indent="0" marL="0">
-              <a:buNone/>
-            </a:pPr>
-            <a:r>
-              <a:rPr lang="en-US" sz="1500" dirty="0">
-                <a:solidFill>
-                  <a:srgbClr val="FFFFFF"/>
+            <a:pPr marL="0" indent="0">
+              <a:buNone/>
+            </a:pPr>
+            <a:r>
+              <a:rPr lang="en-US" sz="2000" b="1" dirty="0">
+                <a:solidFill>
+                  <a:schemeClr val="bg1"/>
                 </a:solidFill>
                 <a:latin typeface="Calibri" pitchFamily="34" charset="0"/>
                 <a:ea typeface="Calibri" pitchFamily="34" charset="-122"/>
@@ -12183,7 +12406,11 @@
               </a:rPr>
               <a:t>Блок-схема цикла вывода чисел от 1 до 10 и его трассировка в таблице</a:t>
             </a:r>
-            <a:endParaRPr lang="en-US" sz="1500" dirty="0"/>
+            <a:endParaRPr lang="en-US" sz="2000" b="1" dirty="0">
+              <a:solidFill>
+                <a:schemeClr val="bg1"/>
+              </a:solidFill>
+            </a:endParaRPr>
           </a:p>
         </p:txBody>
       </p:sp>
@@ -12235,13 +12462,13 @@
           <a:bodyPr wrap="square" lIns="0" tIns="0" rIns="0" bIns="0" rtlCol="0" anchor="ctr"/>
           <a:lstStyle/>
           <a:p>
-            <a:pPr indent="0" marL="0">
-              <a:buNone/>
-            </a:pPr>
-            <a:r>
-              <a:rPr lang="en-US" sz="1600" b="1" dirty="0">
-                <a:solidFill>
-                  <a:srgbClr val="4FD1E0"/>
+            <a:pPr marL="0" indent="0">
+              <a:buNone/>
+            </a:pPr>
+            <a:r>
+              <a:rPr lang="en-US" sz="2000" b="1" dirty="0">
+                <a:solidFill>
+                  <a:schemeClr val="bg1"/>
                 </a:solidFill>
                 <a:latin typeface="Calibri" pitchFamily="34" charset="0"/>
                 <a:ea typeface="Calibri" pitchFamily="34" charset="-122"/>
@@ -12249,7 +12476,11 @@
               </a:rPr>
               <a:t>Всем</a:t>
             </a:r>
-            <a:endParaRPr lang="en-US" sz="1600" dirty="0"/>
+            <a:endParaRPr lang="en-US" sz="2000" dirty="0">
+              <a:solidFill>
+                <a:schemeClr val="bg1"/>
+              </a:solidFill>
+            </a:endParaRPr>
           </a:p>
         </p:txBody>
       </p:sp>
@@ -12274,11 +12505,11 @@
           <a:bodyPr wrap="square" lIns="0" tIns="0" rIns="0" bIns="0" rtlCol="0" anchor="ctr"/>
           <a:lstStyle/>
           <a:p>
-            <a:pPr indent="0" marL="0">
-              <a:buNone/>
-            </a:pPr>
-            <a:r>
-              <a:rPr lang="en-US" sz="1500" dirty="0">
+            <a:pPr marL="0" indent="0">
+              <a:buNone/>
+            </a:pPr>
+            <a:r>
+              <a:rPr lang="en-US" sz="2000" dirty="0">
                 <a:solidFill>
                   <a:srgbClr val="FFFFFF"/>
                 </a:solidFill>
@@ -12288,7 +12519,7 @@
               </a:rPr>
               <a:t>Записать, какие величины в задаче о стоимости покупки постоянные, а какие переменные</a:t>
             </a:r>
-            <a:endParaRPr lang="en-US" sz="1500" dirty="0"/>
+            <a:endParaRPr lang="en-US" sz="2000" dirty="0"/>
           </a:p>
         </p:txBody>
       </p:sp>
@@ -12340,13 +12571,13 @@
           <a:bodyPr wrap="square" lIns="0" tIns="0" rIns="0" bIns="0" rtlCol="0" anchor="ctr"/>
           <a:lstStyle/>
           <a:p>
-            <a:pPr indent="0" marL="0">
-              <a:buNone/>
-            </a:pPr>
-            <a:r>
-              <a:rPr lang="en-US" sz="1600" b="1" dirty="0">
-                <a:solidFill>
-                  <a:srgbClr val="3DD6A0"/>
+            <a:pPr marL="0" indent="0">
+              <a:buNone/>
+            </a:pPr>
+            <a:r>
+              <a:rPr lang="en-US" sz="2000" b="1" dirty="0">
+                <a:solidFill>
+                  <a:schemeClr val="bg1"/>
                 </a:solidFill>
                 <a:latin typeface="Calibri" pitchFamily="34" charset="0"/>
                 <a:ea typeface="Calibri" pitchFamily="34" charset="-122"/>
@@ -12354,7 +12585,11 @@
               </a:rPr>
               <a:t>Если есть компьютер</a:t>
             </a:r>
-            <a:endParaRPr lang="en-US" sz="1600" dirty="0"/>
+            <a:endParaRPr lang="en-US" sz="2000" dirty="0">
+              <a:solidFill>
+                <a:schemeClr val="bg1"/>
+              </a:solidFill>
+            </a:endParaRPr>
           </a:p>
         </p:txBody>
       </p:sp>
@@ -12379,11 +12614,11 @@
           <a:bodyPr wrap="square" lIns="0" tIns="0" rIns="0" bIns="0" rtlCol="0" anchor="ctr"/>
           <a:lstStyle/>
           <a:p>
-            <a:pPr indent="0" marL="0">
-              <a:buNone/>
-            </a:pPr>
-            <a:r>
-              <a:rPr lang="en-US" sz="1500" dirty="0">
+            <a:pPr marL="0" indent="0">
+              <a:buNone/>
+            </a:pPr>
+            <a:r>
+              <a:rPr lang="en-US" sz="2000" dirty="0">
                 <a:solidFill>
                   <a:srgbClr val="FFFFFF"/>
                 </a:solidFill>
@@ -12393,7 +12628,7 @@
               </a:rPr>
               <a:t>Программа суммы чисел от 1 до 50; проверить результат</a:t>
             </a:r>
-            <a:endParaRPr lang="en-US" sz="1500" dirty="0"/>
+            <a:endParaRPr lang="en-US" sz="2000" dirty="0"/>
           </a:p>
         </p:txBody>
       </p:sp>
@@ -12418,13 +12653,13 @@
           <a:bodyPr wrap="square" lIns="0" tIns="0" rIns="0" bIns="0" rtlCol="0" anchor="ctr"/>
           <a:lstStyle/>
           <a:p>
-            <a:pPr indent="0" marL="0">
-              <a:buNone/>
-            </a:pPr>
-            <a:r>
-              <a:rPr lang="en-US" sz="1600" i="1" dirty="0">
-                <a:solidFill>
-                  <a:srgbClr val="A9A3C4"/>
+            <a:pPr marL="0" indent="0">
+              <a:buNone/>
+            </a:pPr>
+            <a:r>
+              <a:rPr lang="en-US" sz="2000" b="1" i="1" dirty="0">
+                <a:solidFill>
+                  <a:schemeClr val="bg1"/>
                 </a:solidFill>
                 <a:latin typeface="Calibri" pitchFamily="34" charset="0"/>
                 <a:ea typeface="Calibri" pitchFamily="34" charset="-122"/>
@@ -12432,7 +12667,11 @@
               </a:rPr>
               <a:t>Первые два задания выполняются в тетради — компьютер не нужен.</a:t>
             </a:r>
-            <a:endParaRPr lang="en-US" sz="1600" dirty="0"/>
+            <a:endParaRPr lang="en-US" sz="2000" b="1" dirty="0">
+              <a:solidFill>
+                <a:schemeClr val="bg1"/>
+              </a:solidFill>
+            </a:endParaRPr>
           </a:p>
         </p:txBody>
       </p:sp>
@@ -12452,6 +12691,7 @@
         <a:solidFill>
           <a:srgbClr val="17132E"/>
         </a:solidFill>
+        <a:effectLst/>
       </p:bgPr>
     </p:bg>
     <p:spTree>
@@ -12511,7 +12751,7 @@
           <a:bodyPr wrap="square" lIns="0" tIns="0" rIns="0" bIns="0" rtlCol="0" anchor="ctr"/>
           <a:lstStyle/>
           <a:p>
-            <a:pPr indent="0" marL="0">
+            <a:pPr marL="0" indent="0">
               <a:buNone/>
             </a:pPr>
             <a:r>
@@ -12677,7 +12917,7 @@
           <a:bodyPr wrap="square" lIns="0" tIns="0" rIns="0" bIns="0" rtlCol="0" anchor="ctr"/>
           <a:lstStyle/>
           <a:p>
-            <a:pPr indent="0" marL="0">
+            <a:pPr marL="0" indent="0">
               <a:buNone/>
             </a:pPr>
             <a:r>
@@ -12711,6 +12951,7 @@
         <a:solidFill>
           <a:srgbClr val="17132E"/>
         </a:solidFill>
+        <a:effectLst/>
       </p:bgPr>
     </p:bg>
     <p:spTree>
@@ -12748,7 +12989,7 @@
           <a:bodyPr wrap="square" lIns="0" tIns="0" rIns="0" bIns="0" rtlCol="0" anchor="ctr"/>
           <a:lstStyle/>
           <a:p>
-            <a:pPr indent="0" marL="0">
+            <a:pPr marL="0" indent="0">
               <a:buNone/>
             </a:pPr>
             <a:r>
@@ -12814,21 +13055,23 @@
           <a:bodyPr wrap="square" lIns="0" tIns="0" rIns="0" bIns="0" rtlCol="0" anchor="ctr"/>
           <a:lstStyle/>
           <a:p>
-            <a:pPr indent="0" marL="0">
-              <a:buNone/>
-            </a:pPr>
-            <a:r>
-              <a:rPr lang="en-US" sz="2000" dirty="0">
+            <a:pPr marL="0" indent="0">
+              <a:buNone/>
+            </a:pPr>
+            <a:r>
+              <a:rPr lang="en-US" sz="2400" dirty="0">
                 <a:solidFill>
                   <a:srgbClr val="FFFFFF"/>
                 </a:solidFill>
-                <a:latin typeface="Calibri" pitchFamily="34" charset="0"/>
+                <a:latin typeface="Arial Black" panose="020B0A04020102020204" pitchFamily="34" charset="0"/>
                 <a:ea typeface="Calibri" pitchFamily="34" charset="-122"/>
                 <a:cs typeface="Calibri" pitchFamily="34" charset="-120"/>
               </a:rPr>
               <a:t>Цикл — алгоритмическая структура, при которой одна и та же группа действий выполняется несколько раз. Повторяемые действия называются телом цикла.</a:t>
             </a:r>
-            <a:endParaRPr lang="en-US" sz="2000" dirty="0"/>
+            <a:endParaRPr lang="en-US" sz="2400" dirty="0">
+              <a:latin typeface="Arial Black" panose="020B0A04020102020204" pitchFamily="34" charset="0"/>
+            </a:endParaRPr>
           </a:p>
         </p:txBody>
       </p:sp>
@@ -12880,138 +13123,151 @@
           <a:bodyPr wrap="square" lIns="0" tIns="0" rIns="0" bIns="0" rtlCol="0" anchor="ctr"/>
           <a:lstStyle/>
           <a:p>
-            <a:pPr indent="0" marL="0">
+            <a:pPr marL="0" indent="0">
               <a:buNone/>
             </a:pPr>
             <a:r>
               <a:rPr lang="en-US" sz="1900" b="1" dirty="0">
                 <a:solidFill>
-                  <a:srgbClr val="4FD1E0"/>
+                  <a:schemeClr val="bg1"/>
+                </a:solidFill>
+                <a:latin typeface="Arial Black" panose="020B0A04020102020204" pitchFamily="34" charset="0"/>
+                <a:ea typeface="Calibri" pitchFamily="34" charset="-122"/>
+                <a:cs typeface="Calibri" pitchFamily="34" charset="-120"/>
+              </a:rPr>
+              <a:t>С известным числом повторений</a:t>
+            </a:r>
+            <a:endParaRPr lang="en-US" sz="1900" dirty="0">
+              <a:solidFill>
+                <a:schemeClr val="bg1"/>
+              </a:solidFill>
+              <a:latin typeface="Arial Black" panose="020B0A04020102020204" pitchFamily="34" charset="0"/>
+            </a:endParaRPr>
+          </a:p>
+        </p:txBody>
+      </p:sp>
+      <p:sp>
+        <p:nvSpPr>
+          <p:cNvPr id="7" name="Text 5"/>
+          <p:cNvSpPr txBox="1"/>
+          <p:nvPr/>
+        </p:nvSpPr>
+        <p:spPr>
+          <a:xfrm>
+            <a:off x="914400" y="3886200"/>
+            <a:ext cx="4754880" cy="320040"/>
+          </a:xfrm>
+          <a:prstGeom prst="rect">
+            <a:avLst/>
+          </a:prstGeom>
+          <a:noFill/>
+          <a:ln/>
+        </p:spPr>
+        <p:txBody>
+          <a:bodyPr wrap="square" lIns="0" tIns="0" rIns="0" bIns="0" rtlCol="0" anchor="ctr"/>
+          <a:lstStyle/>
+          <a:p>
+            <a:pPr marL="0" indent="0">
+              <a:buNone/>
+            </a:pPr>
+            <a:r>
+              <a:rPr lang="en-US" sz="2000" b="1" dirty="0">
+                <a:solidFill>
+                  <a:srgbClr val="FFFFFF"/>
                 </a:solidFill>
                 <a:latin typeface="Calibri" pitchFamily="34" charset="0"/>
                 <a:ea typeface="Calibri" pitchFamily="34" charset="-122"/>
                 <a:cs typeface="Calibri" pitchFamily="34" charset="-120"/>
               </a:rPr>
-              <a:t>С известным числом повторений</a:t>
-            </a:r>
-            <a:endParaRPr lang="en-US" sz="1900" dirty="0"/>
-          </a:p>
-        </p:txBody>
-      </p:sp>
-      <p:sp>
-        <p:nvSpPr>
-          <p:cNvPr id="7" name="Text 5"/>
-          <p:cNvSpPr txBox="1"/>
-          <p:nvPr/>
-        </p:nvSpPr>
-        <p:spPr>
-          <a:xfrm>
-            <a:off x="914400" y="3886200"/>
-            <a:ext cx="4754880" cy="320040"/>
-          </a:xfrm>
-          <a:prstGeom prst="rect">
-            <a:avLst/>
-          </a:prstGeom>
-          <a:noFill/>
-          <a:ln/>
-        </p:spPr>
-        <p:txBody>
-          <a:bodyPr wrap="square" lIns="0" tIns="0" rIns="0" bIns="0" rtlCol="0" anchor="ctr"/>
-          <a:lstStyle/>
-          <a:p>
-            <a:pPr indent="0" marL="0">
-              <a:buNone/>
-            </a:pPr>
-            <a:r>
-              <a:rPr lang="en-US" sz="1500" dirty="0">
-                <a:solidFill>
-                  <a:srgbClr val="FFFFFF"/>
+              <a:t>Знаем заранее, сколько раз</a:t>
+            </a:r>
+            <a:endParaRPr lang="en-US" sz="2000" b="1" dirty="0"/>
+          </a:p>
+        </p:txBody>
+      </p:sp>
+      <p:sp>
+        <p:nvSpPr>
+          <p:cNvPr id="8" name="Text 6"/>
+          <p:cNvSpPr txBox="1"/>
+          <p:nvPr/>
+        </p:nvSpPr>
+        <p:spPr>
+          <a:xfrm>
+            <a:off x="914400" y="4251960"/>
+            <a:ext cx="4754880" cy="777240"/>
+          </a:xfrm>
+          <a:prstGeom prst="rect">
+            <a:avLst/>
+          </a:prstGeom>
+          <a:noFill/>
+          <a:ln/>
+        </p:spPr>
+        <p:txBody>
+          <a:bodyPr wrap="square" lIns="0" tIns="0" rIns="0" bIns="0" rtlCol="0" anchor="ctr"/>
+          <a:lstStyle/>
+          <a:p>
+            <a:pPr marL="0" indent="0">
+              <a:buNone/>
+            </a:pPr>
+            <a:r>
+              <a:rPr lang="en-US" sz="2000" b="1" dirty="0">
+                <a:solidFill>
+                  <a:schemeClr val="bg1"/>
                 </a:solidFill>
                 <a:latin typeface="Calibri" pitchFamily="34" charset="0"/>
                 <a:ea typeface="Calibri" pitchFamily="34" charset="-122"/>
                 <a:cs typeface="Calibri" pitchFamily="34" charset="-120"/>
               </a:rPr>
-              <a:t>Знаем заранее, сколько раз</a:t>
-            </a:r>
-            <a:endParaRPr lang="en-US" sz="1500" dirty="0"/>
-          </a:p>
-        </p:txBody>
-      </p:sp>
-      <p:sp>
-        <p:nvSpPr>
-          <p:cNvPr id="8" name="Text 6"/>
-          <p:cNvSpPr txBox="1"/>
-          <p:nvPr/>
-        </p:nvSpPr>
-        <p:spPr>
-          <a:xfrm>
-            <a:off x="914400" y="4251960"/>
-            <a:ext cx="4754880" cy="777240"/>
-          </a:xfrm>
-          <a:prstGeom prst="rect">
-            <a:avLst/>
-          </a:prstGeom>
-          <a:noFill/>
-          <a:ln/>
-        </p:spPr>
-        <p:txBody>
-          <a:bodyPr wrap="square" lIns="0" tIns="0" rIns="0" bIns="0" rtlCol="0" anchor="ctr"/>
-          <a:lstStyle/>
-          <a:p>
-            <a:pPr indent="0" marL="0">
-              <a:buNone/>
-            </a:pPr>
-            <a:r>
-              <a:rPr lang="en-US" sz="1400" dirty="0">
-                <a:solidFill>
-                  <a:srgbClr val="A9A3C4"/>
+              <a:t>Таблица умножения · 30 оценок класса · узор из 12 элементов</a:t>
+            </a:r>
+            <a:endParaRPr lang="en-US" sz="2000" b="1" dirty="0">
+              <a:solidFill>
+                <a:schemeClr val="bg1"/>
+              </a:solidFill>
+            </a:endParaRPr>
+          </a:p>
+        </p:txBody>
+      </p:sp>
+      <p:sp>
+        <p:nvSpPr>
+          <p:cNvPr id="9" name="Text 7"/>
+          <p:cNvSpPr txBox="1"/>
+          <p:nvPr/>
+        </p:nvSpPr>
+        <p:spPr>
+          <a:xfrm>
+            <a:off x="914400" y="5029200"/>
+            <a:ext cx="4754880" cy="320040"/>
+          </a:xfrm>
+          <a:prstGeom prst="rect">
+            <a:avLst/>
+          </a:prstGeom>
+          <a:noFill/>
+          <a:ln/>
+        </p:spPr>
+        <p:txBody>
+          <a:bodyPr wrap="square" lIns="0" tIns="0" rIns="0" bIns="0" rtlCol="0" anchor="ctr"/>
+          <a:lstStyle/>
+          <a:p>
+            <a:pPr marL="0" indent="0">
+              <a:buNone/>
+            </a:pPr>
+            <a:r>
+              <a:rPr lang="en-US" sz="1500" b="1" dirty="0">
+                <a:solidFill>
+                  <a:schemeClr val="bg1"/>
                 </a:solidFill>
                 <a:latin typeface="Calibri" pitchFamily="34" charset="0"/>
                 <a:ea typeface="Calibri" pitchFamily="34" charset="-122"/>
                 <a:cs typeface="Calibri" pitchFamily="34" charset="-120"/>
               </a:rPr>
-              <a:t>Таблица умножения · 30 оценок класса · узор из 12 элементов</a:t>
-            </a:r>
-            <a:endParaRPr lang="en-US" sz="1400" dirty="0"/>
-          </a:p>
-        </p:txBody>
-      </p:sp>
-      <p:sp>
-        <p:nvSpPr>
-          <p:cNvPr id="9" name="Text 7"/>
-          <p:cNvSpPr txBox="1"/>
-          <p:nvPr/>
-        </p:nvSpPr>
-        <p:spPr>
-          <a:xfrm>
-            <a:off x="914400" y="5029200"/>
-            <a:ext cx="4754880" cy="320040"/>
-          </a:xfrm>
-          <a:prstGeom prst="rect">
-            <a:avLst/>
-          </a:prstGeom>
-          <a:noFill/>
-          <a:ln/>
-        </p:spPr>
-        <p:txBody>
-          <a:bodyPr wrap="square" lIns="0" tIns="0" rIns="0" bIns="0" rtlCol="0" anchor="ctr"/>
-          <a:lstStyle/>
-          <a:p>
-            <a:pPr indent="0" marL="0">
-              <a:buNone/>
-            </a:pPr>
-            <a:r>
-              <a:rPr lang="en-US" sz="1500" b="1" dirty="0">
-                <a:solidFill>
-                  <a:srgbClr val="4FD1E0"/>
-                </a:solidFill>
-                <a:latin typeface="Calibri" pitchFamily="34" charset="0"/>
-                <a:ea typeface="Calibri" pitchFamily="34" charset="-122"/>
-                <a:cs typeface="Calibri" pitchFamily="34" charset="-120"/>
-              </a:rPr>
               <a:t>Управляется счётчиком</a:t>
             </a:r>
-            <a:endParaRPr lang="en-US" sz="1500" dirty="0"/>
+            <a:endParaRPr lang="en-US" sz="1500" dirty="0">
+              <a:solidFill>
+                <a:schemeClr val="bg1"/>
+              </a:solidFill>
+            </a:endParaRPr>
           </a:p>
         </p:txBody>
       </p:sp>
@@ -13063,138 +13319,151 @@
           <a:bodyPr wrap="square" lIns="0" tIns="0" rIns="0" bIns="0" rtlCol="0" anchor="ctr"/>
           <a:lstStyle/>
           <a:p>
-            <a:pPr indent="0" marL="0">
+            <a:pPr marL="0" indent="0">
               <a:buNone/>
             </a:pPr>
             <a:r>
               <a:rPr lang="en-US" sz="1900" b="1" dirty="0">
                 <a:solidFill>
-                  <a:srgbClr val="3DD6A0"/>
+                  <a:schemeClr val="bg1"/>
+                </a:solidFill>
+                <a:latin typeface="Arial Black" panose="020B0A04020102020204" pitchFamily="34" charset="0"/>
+                <a:ea typeface="Calibri" pitchFamily="34" charset="-122"/>
+                <a:cs typeface="Calibri" pitchFamily="34" charset="-120"/>
+              </a:rPr>
+              <a:t>С неизвестным числом повторений</a:t>
+            </a:r>
+            <a:endParaRPr lang="en-US" sz="1900" dirty="0">
+              <a:solidFill>
+                <a:schemeClr val="bg1"/>
+              </a:solidFill>
+              <a:latin typeface="Arial Black" panose="020B0A04020102020204" pitchFamily="34" charset="0"/>
+            </a:endParaRPr>
+          </a:p>
+        </p:txBody>
+      </p:sp>
+      <p:sp>
+        <p:nvSpPr>
+          <p:cNvPr id="12" name="Text 10"/>
+          <p:cNvSpPr txBox="1"/>
+          <p:nvPr/>
+        </p:nvSpPr>
+        <p:spPr>
+          <a:xfrm>
+            <a:off x="6492240" y="3886200"/>
+            <a:ext cx="4754880" cy="320040"/>
+          </a:xfrm>
+          <a:prstGeom prst="rect">
+            <a:avLst/>
+          </a:prstGeom>
+          <a:noFill/>
+          <a:ln/>
+        </p:spPr>
+        <p:txBody>
+          <a:bodyPr wrap="square" lIns="0" tIns="0" rIns="0" bIns="0" rtlCol="0" anchor="ctr"/>
+          <a:lstStyle/>
+          <a:p>
+            <a:pPr marL="0" indent="0">
+              <a:buNone/>
+            </a:pPr>
+            <a:r>
+              <a:rPr lang="en-US" sz="2000" b="1" dirty="0">
+                <a:solidFill>
+                  <a:srgbClr val="FFFFFF"/>
                 </a:solidFill>
                 <a:latin typeface="Calibri" pitchFamily="34" charset="0"/>
                 <a:ea typeface="Calibri" pitchFamily="34" charset="-122"/>
                 <a:cs typeface="Calibri" pitchFamily="34" charset="-120"/>
               </a:rPr>
-              <a:t>С неизвестным числом повторений</a:t>
-            </a:r>
-            <a:endParaRPr lang="en-US" sz="1900" dirty="0"/>
-          </a:p>
-        </p:txBody>
-      </p:sp>
-      <p:sp>
-        <p:nvSpPr>
-          <p:cNvPr id="12" name="Text 10"/>
-          <p:cNvSpPr txBox="1"/>
-          <p:nvPr/>
-        </p:nvSpPr>
-        <p:spPr>
-          <a:xfrm>
-            <a:off x="6492240" y="3886200"/>
-            <a:ext cx="4754880" cy="320040"/>
-          </a:xfrm>
-          <a:prstGeom prst="rect">
-            <a:avLst/>
-          </a:prstGeom>
-          <a:noFill/>
-          <a:ln/>
-        </p:spPr>
-        <p:txBody>
-          <a:bodyPr wrap="square" lIns="0" tIns="0" rIns="0" bIns="0" rtlCol="0" anchor="ctr"/>
-          <a:lstStyle/>
-          <a:p>
-            <a:pPr indent="0" marL="0">
-              <a:buNone/>
-            </a:pPr>
-            <a:r>
-              <a:rPr lang="en-US" sz="1500" dirty="0">
-                <a:solidFill>
-                  <a:srgbClr val="FFFFFF"/>
+              <a:t>Зависит от данных</a:t>
+            </a:r>
+            <a:endParaRPr lang="en-US" sz="2000" b="1" dirty="0"/>
+          </a:p>
+        </p:txBody>
+      </p:sp>
+      <p:sp>
+        <p:nvSpPr>
+          <p:cNvPr id="13" name="Text 11"/>
+          <p:cNvSpPr txBox="1"/>
+          <p:nvPr/>
+        </p:nvSpPr>
+        <p:spPr>
+          <a:xfrm>
+            <a:off x="6492240" y="4251960"/>
+            <a:ext cx="4754880" cy="777240"/>
+          </a:xfrm>
+          <a:prstGeom prst="rect">
+            <a:avLst/>
+          </a:prstGeom>
+          <a:noFill/>
+          <a:ln/>
+        </p:spPr>
+        <p:txBody>
+          <a:bodyPr wrap="square" lIns="0" tIns="0" rIns="0" bIns="0" rtlCol="0" anchor="ctr"/>
+          <a:lstStyle/>
+          <a:p>
+            <a:pPr marL="0" indent="0">
+              <a:buNone/>
+            </a:pPr>
+            <a:r>
+              <a:rPr lang="en-US" sz="2000" b="1" dirty="0">
+                <a:solidFill>
+                  <a:schemeClr val="bg1"/>
                 </a:solidFill>
                 <a:latin typeface="Calibri" pitchFamily="34" charset="0"/>
                 <a:ea typeface="Calibri" pitchFamily="34" charset="-122"/>
                 <a:cs typeface="Calibri" pitchFamily="34" charset="-120"/>
               </a:rPr>
-              <a:t>Зависит от данных</a:t>
-            </a:r>
-            <a:endParaRPr lang="en-US" sz="1500" dirty="0"/>
-          </a:p>
-        </p:txBody>
-      </p:sp>
-      <p:sp>
-        <p:nvSpPr>
-          <p:cNvPr id="13" name="Text 11"/>
-          <p:cNvSpPr txBox="1"/>
-          <p:nvPr/>
-        </p:nvSpPr>
-        <p:spPr>
-          <a:xfrm>
-            <a:off x="6492240" y="4251960"/>
-            <a:ext cx="4754880" cy="777240"/>
-          </a:xfrm>
-          <a:prstGeom prst="rect">
-            <a:avLst/>
-          </a:prstGeom>
-          <a:noFill/>
-          <a:ln/>
-        </p:spPr>
-        <p:txBody>
-          <a:bodyPr wrap="square" lIns="0" tIns="0" rIns="0" bIns="0" rtlCol="0" anchor="ctr"/>
-          <a:lstStyle/>
-          <a:p>
-            <a:pPr indent="0" marL="0">
-              <a:buNone/>
-            </a:pPr>
-            <a:r>
-              <a:rPr lang="en-US" sz="1400" dirty="0">
-                <a:solidFill>
-                  <a:srgbClr val="A9A3C4"/>
+              <a:t>Вводить оценки, пока не введут ноль · делить, пока не станет нулём</a:t>
+            </a:r>
+            <a:endParaRPr lang="en-US" sz="2000" b="1" dirty="0">
+              <a:solidFill>
+                <a:schemeClr val="bg1"/>
+              </a:solidFill>
+            </a:endParaRPr>
+          </a:p>
+        </p:txBody>
+      </p:sp>
+      <p:sp>
+        <p:nvSpPr>
+          <p:cNvPr id="14" name="Text 12"/>
+          <p:cNvSpPr txBox="1"/>
+          <p:nvPr/>
+        </p:nvSpPr>
+        <p:spPr>
+          <a:xfrm>
+            <a:off x="6492240" y="5029200"/>
+            <a:ext cx="4754880" cy="320040"/>
+          </a:xfrm>
+          <a:prstGeom prst="rect">
+            <a:avLst/>
+          </a:prstGeom>
+          <a:noFill/>
+          <a:ln/>
+        </p:spPr>
+        <p:txBody>
+          <a:bodyPr wrap="square" lIns="0" tIns="0" rIns="0" bIns="0" rtlCol="0" anchor="ctr"/>
+          <a:lstStyle/>
+          <a:p>
+            <a:pPr marL="0" indent="0">
+              <a:buNone/>
+            </a:pPr>
+            <a:r>
+              <a:rPr lang="en-US" sz="2000" b="1" dirty="0">
+                <a:solidFill>
+                  <a:schemeClr val="bg1"/>
                 </a:solidFill>
                 <a:latin typeface="Calibri" pitchFamily="34" charset="0"/>
                 <a:ea typeface="Calibri" pitchFamily="34" charset="-122"/>
                 <a:cs typeface="Calibri" pitchFamily="34" charset="-120"/>
               </a:rPr>
-              <a:t>Вводить оценки, пока не введут ноль · делить, пока не станет нулём</a:t>
-            </a:r>
-            <a:endParaRPr lang="en-US" sz="1400" dirty="0"/>
-          </a:p>
-        </p:txBody>
-      </p:sp>
-      <p:sp>
-        <p:nvSpPr>
-          <p:cNvPr id="14" name="Text 12"/>
-          <p:cNvSpPr txBox="1"/>
-          <p:nvPr/>
-        </p:nvSpPr>
-        <p:spPr>
-          <a:xfrm>
-            <a:off x="6492240" y="5029200"/>
-            <a:ext cx="4754880" cy="320040"/>
-          </a:xfrm>
-          <a:prstGeom prst="rect">
-            <a:avLst/>
-          </a:prstGeom>
-          <a:noFill/>
-          <a:ln/>
-        </p:spPr>
-        <p:txBody>
-          <a:bodyPr wrap="square" lIns="0" tIns="0" rIns="0" bIns="0" rtlCol="0" anchor="ctr"/>
-          <a:lstStyle/>
-          <a:p>
-            <a:pPr indent="0" marL="0">
-              <a:buNone/>
-            </a:pPr>
-            <a:r>
-              <a:rPr lang="en-US" sz="1500" b="1" dirty="0">
-                <a:solidFill>
-                  <a:srgbClr val="3DD6A0"/>
-                </a:solidFill>
-                <a:latin typeface="Calibri" pitchFamily="34" charset="0"/>
-                <a:ea typeface="Calibri" pitchFamily="34" charset="-122"/>
-                <a:cs typeface="Calibri" pitchFamily="34" charset="-120"/>
-              </a:rPr>
               <a:t>Управляется условием</a:t>
             </a:r>
-            <a:endParaRPr lang="en-US" sz="1500" dirty="0"/>
+            <a:endParaRPr lang="en-US" sz="2000" dirty="0">
+              <a:solidFill>
+                <a:schemeClr val="bg1"/>
+              </a:solidFill>
+            </a:endParaRPr>
           </a:p>
         </p:txBody>
       </p:sp>
@@ -13246,11 +13515,11 @@
           <a:bodyPr wrap="square" lIns="0" tIns="0" rIns="0" bIns="0" rtlCol="0" anchor="ctr"/>
           <a:lstStyle/>
           <a:p>
-            <a:pPr indent="0" marL="0">
-              <a:buNone/>
-            </a:pPr>
-            <a:r>
-              <a:rPr lang="en-US" sz="1600" dirty="0">
+            <a:pPr marL="0" indent="0">
+              <a:buNone/>
+            </a:pPr>
+            <a:r>
+              <a:rPr lang="en-US" sz="2400" b="1" dirty="0">
                 <a:solidFill>
                   <a:srgbClr val="FFFFFF"/>
                 </a:solidFill>
@@ -13260,7 +13529,7 @@
               </a:rPr>
               <a:t>В теле цикла обязательно меняется величина, влияющая на завершение. Иначе цикл не кончится: телефон зависнет, батарейка сядет.</a:t>
             </a:r>
-            <a:endParaRPr lang="en-US" sz="1600" dirty="0"/>
+            <a:endParaRPr lang="en-US" sz="2400" b="1" dirty="0"/>
           </a:p>
         </p:txBody>
       </p:sp>
@@ -13280,6 +13549,7 @@
         <a:solidFill>
           <a:srgbClr val="17132E"/>
         </a:solidFill>
+        <a:effectLst/>
       </p:bgPr>
     </p:bg>
     <p:spTree>
@@ -13339,11 +13609,11 @@
           <a:bodyPr wrap="square" lIns="0" tIns="0" rIns="0" bIns="0" rtlCol="0" anchor="ctr"/>
           <a:lstStyle/>
           <a:p>
-            <a:pPr algn="ctr" indent="0" marL="0">
-              <a:buNone/>
-            </a:pPr>
-            <a:r>
-              <a:rPr lang="en-US" sz="1400" b="1" spc="200" kern="0" dirty="0">
+            <a:pPr marL="0" indent="0" algn="ctr">
+              <a:buNone/>
+            </a:pPr>
+            <a:r>
+              <a:rPr lang="en-US" sz="1400" b="1" kern="0" spc="200" dirty="0">
                 <a:solidFill>
                   <a:srgbClr val="17132E"/>
                 </a:solidFill>
@@ -13405,7 +13675,7 @@
           <a:bodyPr wrap="square" lIns="0" tIns="0" rIns="0" bIns="0" rtlCol="0" anchor="ctr"/>
           <a:lstStyle/>
           <a:p>
-            <a:pPr algn="ctr" indent="0" marL="0">
+            <a:pPr marL="0" indent="0" algn="ctr">
               <a:buNone/>
             </a:pPr>
             <a:r>
@@ -13444,13 +13714,13 @@
           <a:bodyPr wrap="square" lIns="0" tIns="0" rIns="0" bIns="0" rtlCol="0" anchor="ctr"/>
           <a:lstStyle/>
           <a:p>
-            <a:pPr indent="0" marL="0">
+            <a:pPr marL="0" indent="0">
               <a:buNone/>
             </a:pPr>
             <a:r>
               <a:rPr lang="en-US" sz="3400" b="1" dirty="0">
                 <a:solidFill>
-                  <a:srgbClr val="FFFFFF"/>
+                  <a:schemeClr val="bg1"/>
                 </a:solidFill>
                 <a:latin typeface="Cambria" pitchFamily="34" charset="0"/>
                 <a:ea typeface="Cambria" pitchFamily="34" charset="-122"/>
@@ -13458,7 +13728,11 @@
               </a:rPr>
               <a:t>Сколько чисел даёт range(1, 6)?</a:t>
             </a:r>
-            <a:endParaRPr lang="en-US" sz="3400" dirty="0"/>
+            <a:endParaRPr lang="en-US" sz="3400" dirty="0">
+              <a:solidFill>
+                <a:schemeClr val="bg1"/>
+              </a:solidFill>
+            </a:endParaRPr>
           </a:p>
         </p:txBody>
       </p:sp>
@@ -13483,13 +13757,13 @@
           <a:bodyPr wrap="square" lIns="0" tIns="0" rIns="0" bIns="0" rtlCol="0" anchor="ctr"/>
           <a:lstStyle/>
           <a:p>
-            <a:pPr indent="0" marL="0">
-              <a:buNone/>
-            </a:pPr>
-            <a:r>
-              <a:rPr lang="en-US" sz="1700" i="1" dirty="0">
-                <a:solidFill>
-                  <a:srgbClr val="4FD1E0"/>
+            <a:pPr marL="0" indent="0">
+              <a:buNone/>
+            </a:pPr>
+            <a:r>
+              <a:rPr lang="en-US" sz="2400" b="1" i="1" dirty="0">
+                <a:solidFill>
+                  <a:schemeClr val="bg1"/>
                 </a:solidFill>
                 <a:latin typeface="Calibri" pitchFamily="34" charset="0"/>
                 <a:ea typeface="Calibri" pitchFamily="34" charset="-122"/>
@@ -13497,7 +13771,11 @@
               </a:rPr>
               <a:t>И второй вопрос: какое первое и какое последнее?</a:t>
             </a:r>
-            <a:endParaRPr lang="en-US" sz="1700" dirty="0"/>
+            <a:endParaRPr lang="en-US" sz="2400" b="1" dirty="0">
+              <a:solidFill>
+                <a:schemeClr val="bg1"/>
+              </a:solidFill>
+            </a:endParaRPr>
           </a:p>
         </p:txBody>
       </p:sp>
@@ -13549,11 +13827,11 @@
           <a:bodyPr wrap="square" lIns="0" tIns="0" rIns="0" bIns="0" rtlCol="0" anchor="ctr"/>
           <a:lstStyle/>
           <a:p>
-            <a:pPr indent="0" marL="0">
-              <a:buNone/>
-            </a:pPr>
-            <a:r>
-              <a:rPr lang="en-US" sz="1400" b="1" spc="200" kern="0" dirty="0">
+            <a:pPr marL="0" indent="0">
+              <a:buNone/>
+            </a:pPr>
+            <a:r>
+              <a:rPr lang="en-US" sz="1400" b="1" kern="0" spc="200" dirty="0">
                 <a:solidFill>
                   <a:srgbClr val="A9A3C4"/>
                 </a:solidFill>
@@ -13583,6 +13861,7 @@
         <a:solidFill>
           <a:srgbClr val="17132E"/>
         </a:solidFill>
+        <a:effectLst/>
       </p:bgPr>
     </p:bg>
     <p:spTree>
@@ -13642,11 +13921,11 @@
           <a:bodyPr wrap="square" lIns="0" tIns="0" rIns="0" bIns="0" rtlCol="0" anchor="ctr"/>
           <a:lstStyle/>
           <a:p>
-            <a:pPr algn="ctr" indent="0" marL="0">
-              <a:buNone/>
-            </a:pPr>
-            <a:r>
-              <a:rPr lang="en-US" sz="1500" b="1" spc="200" kern="0" dirty="0">
+            <a:pPr marL="0" indent="0" algn="ctr">
+              <a:buNone/>
+            </a:pPr>
+            <a:r>
+              <a:rPr lang="en-US" sz="1500" b="1" kern="0" spc="200" dirty="0">
                 <a:solidFill>
                   <a:srgbClr val="17132E"/>
                 </a:solidFill>
@@ -13681,7 +13960,7 @@
           <a:bodyPr wrap="square" lIns="0" tIns="0" rIns="0" bIns="0" rtlCol="0" anchor="ctr"/>
           <a:lstStyle/>
           <a:p>
-            <a:pPr indent="0" marL="0">
+            <a:pPr marL="0" indent="0">
               <a:buNone/>
             </a:pPr>
             <a:r>
@@ -13747,7 +14026,7 @@
           <a:bodyPr wrap="square" lIns="0" tIns="0" rIns="0" bIns="0" rtlCol="0" anchor="ctr"/>
           <a:lstStyle/>
           <a:p>
-            <a:pPr indent="0" marL="0">
+            <a:pPr marL="0" indent="0">
               <a:lnSpc>
                 <a:spcPct val="110000"/>
               </a:lnSpc>
@@ -13816,13 +14095,13 @@
           <a:bodyPr wrap="square" lIns="0" tIns="0" rIns="0" bIns="0" rtlCol="0" anchor="ctr"/>
           <a:lstStyle/>
           <a:p>
-            <a:pPr indent="0" marL="0">
-              <a:buNone/>
-            </a:pPr>
-            <a:r>
-              <a:rPr lang="en-US" sz="1900" dirty="0">
-                <a:solidFill>
-                  <a:srgbClr val="FFFFFF"/>
+            <a:pPr marL="0" indent="0">
+              <a:buNone/>
+            </a:pPr>
+            <a:r>
+              <a:rPr lang="en-US" sz="2400" b="1" dirty="0">
+                <a:solidFill>
+                  <a:schemeClr val="bg1"/>
                 </a:solidFill>
                 <a:latin typeface="Calibri" pitchFamily="34" charset="0"/>
                 <a:ea typeface="Calibri" pitchFamily="34" charset="-122"/>
@@ -13830,7 +14109,11 @@
               </a:rPr>
               <a:t>Пять чисел. Первое — 1, последнее — 5. Конечное значение 6 в диапазон НЕ входит.</a:t>
             </a:r>
-            <a:endParaRPr lang="en-US" sz="1900" dirty="0"/>
+            <a:endParaRPr lang="en-US" sz="2400" b="1" dirty="0">
+              <a:solidFill>
+                <a:schemeClr val="bg1"/>
+              </a:solidFill>
+            </a:endParaRPr>
           </a:p>
         </p:txBody>
       </p:sp>
@@ -13850,6 +14133,7 @@
         <a:solidFill>
           <a:srgbClr val="17132E"/>
         </a:solidFill>
+        <a:effectLst/>
       </p:bgPr>
     </p:bg>
     <p:spTree>
@@ -13887,7 +14171,7 @@
           <a:bodyPr wrap="square" lIns="0" tIns="0" rIns="0" bIns="0" rtlCol="0" anchor="ctr"/>
           <a:lstStyle/>
           <a:p>
-            <a:pPr indent="0" marL="0">
+            <a:pPr marL="0" indent="0">
               <a:buNone/>
             </a:pPr>
             <a:r>
@@ -13926,7 +14210,7 @@
           <a:bodyPr wrap="square" lIns="0" tIns="0" rIns="0" bIns="0" rtlCol="0" anchor="ctr"/>
           <a:lstStyle/>
           <a:p>
-            <a:pPr indent="0" marL="0">
+            <a:pPr marL="0" indent="0">
               <a:buNone/>
             </a:pPr>
             <a:r>
@@ -13990,11 +14274,11 @@
           <a:bodyPr wrap="square" lIns="0" tIns="0" rIns="0" bIns="0" rtlCol="0" anchor="ctr"/>
           <a:lstStyle/>
           <a:p>
-            <a:pPr algn="ctr" indent="0" marL="0">
-              <a:buNone/>
-            </a:pPr>
-            <a:r>
-              <a:rPr lang="en-US" sz="1400" dirty="0">
+            <a:pPr marL="0" indent="0" algn="ctr">
+              <a:buNone/>
+            </a:pPr>
+            <a:r>
+              <a:rPr lang="en-US" sz="2000" b="1" dirty="0">
                 <a:solidFill>
                   <a:srgbClr val="FFFFFF"/>
                 </a:solidFill>
@@ -14004,7 +14288,7 @@
               </a:rPr>
               <a:t>Начало</a:t>
             </a:r>
-            <a:endParaRPr lang="en-US" sz="1400" dirty="0"/>
+            <a:endParaRPr lang="en-US" sz="2000" b="1" dirty="0"/>
           </a:p>
         </p:txBody>
       </p:sp>
@@ -14078,11 +14362,11 @@
           <a:bodyPr wrap="square" lIns="0" tIns="0" rIns="0" bIns="0" rtlCol="0" anchor="ctr"/>
           <a:lstStyle/>
           <a:p>
-            <a:pPr algn="ctr" indent="0" marL="0">
-              <a:buNone/>
-            </a:pPr>
-            <a:r>
-              <a:rPr lang="en-US" sz="1400" dirty="0">
+            <a:pPr marL="0" indent="0" algn="ctr">
+              <a:buNone/>
+            </a:pPr>
+            <a:r>
+              <a:rPr lang="en-US" sz="2000" b="1" dirty="0">
                 <a:solidFill>
                   <a:srgbClr val="FFFFFF"/>
                 </a:solidFill>
@@ -14092,7 +14376,7 @@
               </a:rPr>
               <a:t>сумма = 0</a:t>
             </a:r>
-            <a:endParaRPr lang="en-US" sz="1400" dirty="0"/>
+            <a:endParaRPr lang="en-US" sz="2000" b="1" dirty="0"/>
           </a:p>
         </p:txBody>
       </p:sp>
@@ -14166,11 +14450,11 @@
           <a:bodyPr wrap="square" lIns="0" tIns="0" rIns="0" bIns="0" rtlCol="0" anchor="ctr"/>
           <a:lstStyle/>
           <a:p>
-            <a:pPr algn="ctr" indent="0" marL="0">
-              <a:buNone/>
-            </a:pPr>
-            <a:r>
-              <a:rPr lang="en-US" sz="1400" dirty="0">
+            <a:pPr marL="0" indent="0" algn="ctr">
+              <a:buNone/>
+            </a:pPr>
+            <a:r>
+              <a:rPr lang="en-US" sz="2000" b="1" dirty="0">
                 <a:solidFill>
                   <a:srgbClr val="FFFFFF"/>
                 </a:solidFill>
@@ -14180,7 +14464,7 @@
               </a:rPr>
               <a:t>i = 1</a:t>
             </a:r>
-            <a:endParaRPr lang="en-US" sz="1400" dirty="0"/>
+            <a:endParaRPr lang="en-US" sz="2000" b="1" dirty="0"/>
           </a:p>
         </p:txBody>
       </p:sp>
@@ -14254,11 +14538,11 @@
           <a:bodyPr wrap="square" lIns="0" tIns="0" rIns="0" bIns="0" rtlCol="0" anchor="ctr"/>
           <a:lstStyle/>
           <a:p>
-            <a:pPr algn="ctr" indent="0" marL="0">
-              <a:buNone/>
-            </a:pPr>
-            <a:r>
-              <a:rPr lang="en-US" sz="1500" b="1" dirty="0">
+            <a:pPr marL="0" indent="0" algn="ctr">
+              <a:buNone/>
+            </a:pPr>
+            <a:r>
+              <a:rPr lang="en-US" sz="2000" b="1" dirty="0">
                 <a:solidFill>
                   <a:srgbClr val="FFFFFF"/>
                 </a:solidFill>
@@ -14268,7 +14552,7 @@
               </a:rPr>
               <a:t>i ≤ 10 ?</a:t>
             </a:r>
-            <a:endParaRPr lang="en-US" sz="1500" dirty="0"/>
+            <a:endParaRPr lang="en-US" sz="2000" b="1" dirty="0"/>
           </a:p>
         </p:txBody>
       </p:sp>
@@ -14317,11 +14601,11 @@
           <a:bodyPr wrap="square" lIns="0" tIns="0" rIns="0" bIns="0" rtlCol="0" anchor="ctr"/>
           <a:lstStyle/>
           <a:p>
-            <a:pPr algn="ctr" indent="0" marL="0">
-              <a:buNone/>
-            </a:pPr>
-            <a:r>
-              <a:rPr lang="en-US" sz="1300" b="1" dirty="0">
+            <a:pPr marL="0" indent="0" algn="ctr">
+              <a:buNone/>
+            </a:pPr>
+            <a:r>
+              <a:rPr lang="en-US" sz="2000" b="1" dirty="0">
                 <a:solidFill>
                   <a:srgbClr val="3DD6A0"/>
                 </a:solidFill>
@@ -14331,7 +14615,7 @@
               </a:rPr>
               <a:t>да</a:t>
             </a:r>
-            <a:endParaRPr lang="en-US" sz="1300" dirty="0"/>
+            <a:endParaRPr lang="en-US" sz="2000" b="1" dirty="0"/>
           </a:p>
         </p:txBody>
       </p:sp>
@@ -14381,11 +14665,11 @@
           <a:bodyPr wrap="square" lIns="0" tIns="0" rIns="0" bIns="0" rtlCol="0" anchor="ctr"/>
           <a:lstStyle/>
           <a:p>
-            <a:pPr algn="ctr" indent="0" marL="0">
-              <a:buNone/>
-            </a:pPr>
-            <a:r>
-              <a:rPr lang="en-US" sz="1200" dirty="0">
+            <a:pPr marL="0" indent="0" algn="ctr">
+              <a:buNone/>
+            </a:pPr>
+            <a:r>
+              <a:rPr lang="en-US" sz="2000" b="1" dirty="0">
                 <a:solidFill>
                   <a:srgbClr val="FFFFFF"/>
                 </a:solidFill>
@@ -14395,7 +14679,7 @@
               </a:rPr>
               <a:t>сумма = сумма + i</a:t>
             </a:r>
-            <a:endParaRPr lang="en-US" sz="1200" dirty="0"/>
+            <a:endParaRPr lang="en-US" sz="2000" b="1" dirty="0"/>
           </a:p>
         </p:txBody>
       </p:sp>
@@ -14469,11 +14753,11 @@
           <a:bodyPr wrap="square" lIns="0" tIns="0" rIns="0" bIns="0" rtlCol="0" anchor="ctr"/>
           <a:lstStyle/>
           <a:p>
-            <a:pPr algn="ctr" indent="0" marL="0">
-              <a:buNone/>
-            </a:pPr>
-            <a:r>
-              <a:rPr lang="en-US" sz="1200" dirty="0">
+            <a:pPr marL="0" indent="0" algn="ctr">
+              <a:buNone/>
+            </a:pPr>
+            <a:r>
+              <a:rPr lang="en-US" sz="2000" b="1" dirty="0">
                 <a:solidFill>
                   <a:srgbClr val="FFFFFF"/>
                 </a:solidFill>
@@ -14483,7 +14767,7 @@
               </a:rPr>
               <a:t>i = i + 1</a:t>
             </a:r>
-            <a:endParaRPr lang="en-US" sz="1200" dirty="0"/>
+            <a:endParaRPr lang="en-US" sz="2000" b="1" dirty="0"/>
           </a:p>
         </p:txBody>
       </p:sp>
@@ -14578,11 +14862,11 @@
           <a:bodyPr wrap="square" lIns="0" tIns="0" rIns="0" bIns="0" rtlCol="0" anchor="ctr"/>
           <a:lstStyle/>
           <a:p>
-            <a:pPr indent="0" marL="0">
-              <a:buNone/>
-            </a:pPr>
-            <a:r>
-              <a:rPr lang="en-US" sz="1300" b="1" dirty="0">
+            <a:pPr marL="0" indent="0">
+              <a:buNone/>
+            </a:pPr>
+            <a:r>
+              <a:rPr lang="en-US" sz="2000" b="1" dirty="0">
                 <a:solidFill>
                   <a:srgbClr val="E8B84B"/>
                 </a:solidFill>
@@ -14592,7 +14876,7 @@
               </a:rPr>
               <a:t>возврат назад</a:t>
             </a:r>
-            <a:endParaRPr lang="en-US" sz="1300" dirty="0"/>
+            <a:endParaRPr lang="en-US" sz="2000" b="1" dirty="0"/>
           </a:p>
         </p:txBody>
       </p:sp>
@@ -14641,11 +14925,11 @@
           <a:bodyPr wrap="square" lIns="0" tIns="0" rIns="0" bIns="0" rtlCol="0" anchor="ctr"/>
           <a:lstStyle/>
           <a:p>
-            <a:pPr algn="ctr" indent="0" marL="0">
-              <a:buNone/>
-            </a:pPr>
-            <a:r>
-              <a:rPr lang="en-US" sz="1300" b="1" dirty="0">
+            <a:pPr marL="0" indent="0" algn="ctr">
+              <a:buNone/>
+            </a:pPr>
+            <a:r>
+              <a:rPr lang="en-US" sz="2000" b="1" dirty="0">
                 <a:solidFill>
                   <a:srgbClr val="F2789F"/>
                 </a:solidFill>
@@ -14655,7 +14939,7 @@
               </a:rPr>
               <a:t>нет</a:t>
             </a:r>
-            <a:endParaRPr lang="en-US" sz="1300" dirty="0"/>
+            <a:endParaRPr lang="en-US" sz="2000" b="1" dirty="0"/>
           </a:p>
         </p:txBody>
       </p:sp>
@@ -14705,11 +14989,11 @@
           <a:bodyPr wrap="square" lIns="0" tIns="0" rIns="0" bIns="0" rtlCol="0" anchor="ctr"/>
           <a:lstStyle/>
           <a:p>
-            <a:pPr algn="ctr" indent="0" marL="0">
-              <a:buNone/>
-            </a:pPr>
-            <a:r>
-              <a:rPr lang="en-US" sz="1300" dirty="0">
+            <a:pPr marL="0" indent="0" algn="ctr">
+              <a:buNone/>
+            </a:pPr>
+            <a:r>
+              <a:rPr lang="en-US" sz="2000" b="1" dirty="0">
                 <a:solidFill>
                   <a:srgbClr val="FFFFFF"/>
                 </a:solidFill>
@@ -14719,7 +15003,7 @@
               </a:rPr>
               <a:t>вывод суммы</a:t>
             </a:r>
-            <a:endParaRPr lang="en-US" sz="1300" dirty="0"/>
+            <a:endParaRPr lang="en-US" sz="2000" b="1" dirty="0"/>
           </a:p>
         </p:txBody>
       </p:sp>
@@ -14793,11 +15077,11 @@
           <a:bodyPr wrap="square" lIns="0" tIns="0" rIns="0" bIns="0" rtlCol="0" anchor="ctr"/>
           <a:lstStyle/>
           <a:p>
-            <a:pPr algn="ctr" indent="0" marL="0">
-              <a:buNone/>
-            </a:pPr>
-            <a:r>
-              <a:rPr lang="en-US" sz="1400" dirty="0">
+            <a:pPr marL="0" indent="0" algn="ctr">
+              <a:buNone/>
+            </a:pPr>
+            <a:r>
+              <a:rPr lang="en-US" sz="2000" b="1" dirty="0">
                 <a:solidFill>
                   <a:srgbClr val="FFFFFF"/>
                 </a:solidFill>
@@ -14807,7 +15091,7 @@
               </a:rPr>
               <a:t>Конец</a:t>
             </a:r>
-            <a:endParaRPr lang="en-US" sz="1400" dirty="0"/>
+            <a:endParaRPr lang="en-US" sz="2000" b="1" dirty="0"/>
           </a:p>
         </p:txBody>
       </p:sp>
@@ -14827,6 +15111,7 @@
         <a:solidFill>
           <a:srgbClr val="17132E"/>
         </a:solidFill>
+        <a:effectLst/>
       </p:bgPr>
     </p:bg>
     <p:spTree>
@@ -14864,7 +15149,7 @@
           <a:bodyPr wrap="square" lIns="0" tIns="0" rIns="0" bIns="0" rtlCol="0" anchor="ctr"/>
           <a:lstStyle/>
           <a:p>
-            <a:pPr indent="0" marL="0">
+            <a:pPr marL="0" indent="0">
               <a:buNone/>
             </a:pPr>
             <a:r>
@@ -14903,13 +15188,13 @@
           <a:bodyPr wrap="square" lIns="0" tIns="0" rIns="0" bIns="0" rtlCol="0" anchor="ctr"/>
           <a:lstStyle/>
           <a:p>
-            <a:pPr indent="0" marL="0">
-              <a:buNone/>
-            </a:pPr>
-            <a:r>
-              <a:rPr lang="en-US" sz="1600" i="1" dirty="0">
-                <a:solidFill>
-                  <a:srgbClr val="A9A3C4"/>
+            <a:pPr marL="0" indent="0">
+              <a:buNone/>
+            </a:pPr>
+            <a:r>
+              <a:rPr lang="en-US" sz="2000" b="1" i="1" dirty="0">
+                <a:solidFill>
+                  <a:schemeClr val="bg1"/>
                 </a:solidFill>
                 <a:latin typeface="Calibri" pitchFamily="34" charset="0"/>
                 <a:ea typeface="Calibri" pitchFamily="34" charset="-122"/>
@@ -14917,7 +15202,11 @@
               </a:rPr>
               <a:t>Выполняем вручную и записываем значения на каждом шаге</a:t>
             </a:r>
-            <a:endParaRPr lang="en-US" sz="1600" dirty="0"/>
+            <a:endParaRPr lang="en-US" sz="2000" b="1" dirty="0">
+              <a:solidFill>
+                <a:schemeClr val="bg1"/>
+              </a:solidFill>
+            </a:endParaRPr>
           </a:p>
         </p:txBody>
       </p:sp>
@@ -14962,7 +15251,7 @@
           <a:bodyPr wrap="square" lIns="0" tIns="0" rIns="0" bIns="0" rtlCol="0" anchor="ctr"/>
           <a:lstStyle/>
           <a:p>
-            <a:pPr algn="ctr" indent="0" marL="0">
+            <a:pPr marL="0" indent="0" algn="ctr">
               <a:buNone/>
             </a:pPr>
             <a:r>
@@ -15021,7 +15310,7 @@
           <a:bodyPr wrap="square" lIns="0" tIns="0" rIns="0" bIns="0" rtlCol="0" anchor="ctr"/>
           <a:lstStyle/>
           <a:p>
-            <a:pPr algn="ctr" indent="0" marL="0">
+            <a:pPr marL="0" indent="0" algn="ctr">
               <a:buNone/>
             </a:pPr>
             <a:r>
@@ -15080,7 +15369,7 @@
           <a:bodyPr wrap="square" lIns="0" tIns="0" rIns="0" bIns="0" rtlCol="0" anchor="ctr"/>
           <a:lstStyle/>
           <a:p>
-            <a:pPr algn="ctr" indent="0" marL="0">
+            <a:pPr marL="0" indent="0" algn="ctr">
               <a:buNone/>
             </a:pPr>
             <a:r>
@@ -15139,7 +15428,7 @@
           <a:bodyPr wrap="square" lIns="0" tIns="0" rIns="0" bIns="0" rtlCol="0" anchor="ctr"/>
           <a:lstStyle/>
           <a:p>
-            <a:pPr algn="ctr" indent="0" marL="0">
+            <a:pPr marL="0" indent="0" algn="ctr">
               <a:buNone/>
             </a:pPr>
             <a:r>
@@ -15203,13 +15492,13 @@
           <a:bodyPr wrap="square" lIns="0" tIns="0" rIns="0" bIns="0" rtlCol="0" anchor="ctr"/>
           <a:lstStyle/>
           <a:p>
-            <a:pPr algn="ctr" indent="0" marL="0">
-              <a:buNone/>
-            </a:pPr>
-            <a:r>
-              <a:rPr lang="en-US" sz="1500" dirty="0">
-                <a:solidFill>
-                  <a:srgbClr val="FFFFFF"/>
+            <a:pPr marL="0" indent="0" algn="ctr">
+              <a:buNone/>
+            </a:pPr>
+            <a:r>
+              <a:rPr lang="en-US" sz="2400" dirty="0">
+                <a:solidFill>
+                  <a:schemeClr val="bg1"/>
                 </a:solidFill>
                 <a:latin typeface="Calibri" pitchFamily="34" charset="0"/>
                 <a:ea typeface="Calibri" pitchFamily="34" charset="-122"/>
@@ -15217,7 +15506,11 @@
               </a:rPr>
               <a:t>до цикла</a:t>
             </a:r>
-            <a:endParaRPr lang="en-US" sz="1500" dirty="0"/>
+            <a:endParaRPr lang="en-US" sz="2400" dirty="0">
+              <a:solidFill>
+                <a:schemeClr val="bg1"/>
+              </a:solidFill>
+            </a:endParaRPr>
           </a:p>
         </p:txBody>
       </p:sp>
@@ -15267,13 +15560,13 @@
           <a:bodyPr wrap="square" lIns="0" tIns="0" rIns="0" bIns="0" rtlCol="0" anchor="ctr"/>
           <a:lstStyle/>
           <a:p>
-            <a:pPr algn="ctr" indent="0" marL="0">
-              <a:buNone/>
-            </a:pPr>
-            <a:r>
-              <a:rPr lang="en-US" sz="1500" dirty="0">
-                <a:solidFill>
-                  <a:srgbClr val="FFFFFF"/>
+            <a:pPr marL="0" indent="0" algn="ctr">
+              <a:buNone/>
+            </a:pPr>
+            <a:r>
+              <a:rPr lang="en-US" sz="2400" dirty="0">
+                <a:solidFill>
+                  <a:schemeClr val="bg1"/>
                 </a:solidFill>
                 <a:latin typeface="Consolas" pitchFamily="34" charset="0"/>
                 <a:ea typeface="Consolas" pitchFamily="34" charset="-122"/>
@@ -15281,7 +15574,11 @@
               </a:rPr>
               <a:t>1</a:t>
             </a:r>
-            <a:endParaRPr lang="en-US" sz="1500" dirty="0"/>
+            <a:endParaRPr lang="en-US" sz="2400" dirty="0">
+              <a:solidFill>
+                <a:schemeClr val="bg1"/>
+              </a:solidFill>
+            </a:endParaRPr>
           </a:p>
         </p:txBody>
       </p:sp>
@@ -15331,13 +15628,13 @@
           <a:bodyPr wrap="square" lIns="0" tIns="0" rIns="0" bIns="0" rtlCol="0" anchor="ctr"/>
           <a:lstStyle/>
           <a:p>
-            <a:pPr algn="ctr" indent="0" marL="0">
-              <a:buNone/>
-            </a:pPr>
-            <a:r>
-              <a:rPr lang="en-US" sz="1500" dirty="0">
-                <a:solidFill>
-                  <a:srgbClr val="FFFFFF"/>
+            <a:pPr marL="0" indent="0" algn="ctr">
+              <a:buNone/>
+            </a:pPr>
+            <a:r>
+              <a:rPr lang="en-US" sz="2400" dirty="0">
+                <a:solidFill>
+                  <a:schemeClr val="bg1"/>
                 </a:solidFill>
                 <a:latin typeface="Consolas" pitchFamily="34" charset="0"/>
                 <a:ea typeface="Consolas" pitchFamily="34" charset="-122"/>
@@ -15345,7 +15642,11 @@
               </a:rPr>
               <a:t>0</a:t>
             </a:r>
-            <a:endParaRPr lang="en-US" sz="1500" dirty="0"/>
+            <a:endParaRPr lang="en-US" sz="2400" dirty="0">
+              <a:solidFill>
+                <a:schemeClr val="bg1"/>
+              </a:solidFill>
+            </a:endParaRPr>
           </a:p>
         </p:txBody>
       </p:sp>
@@ -15395,13 +15696,13 @@
           <a:bodyPr wrap="square" lIns="0" tIns="0" rIns="0" bIns="0" rtlCol="0" anchor="ctr"/>
           <a:lstStyle/>
           <a:p>
-            <a:pPr algn="ctr" indent="0" marL="0">
-              <a:buNone/>
-            </a:pPr>
-            <a:r>
-              <a:rPr lang="en-US" sz="1500" dirty="0">
-                <a:solidFill>
-                  <a:srgbClr val="FFFFFF"/>
+            <a:pPr marL="0" indent="0" algn="ctr">
+              <a:buNone/>
+            </a:pPr>
+            <a:r>
+              <a:rPr lang="en-US" sz="2400" dirty="0">
+                <a:solidFill>
+                  <a:schemeClr val="bg1"/>
                 </a:solidFill>
                 <a:latin typeface="Calibri" pitchFamily="34" charset="0"/>
                 <a:ea typeface="Calibri" pitchFamily="34" charset="-122"/>
@@ -15409,7 +15710,11 @@
               </a:rPr>
               <a:t>—</a:t>
             </a:r>
-            <a:endParaRPr lang="en-US" sz="1500" dirty="0"/>
+            <a:endParaRPr lang="en-US" sz="2400" dirty="0">
+              <a:solidFill>
+                <a:schemeClr val="bg1"/>
+              </a:solidFill>
+            </a:endParaRPr>
           </a:p>
         </p:txBody>
       </p:sp>
@@ -15459,13 +15764,13 @@
           <a:bodyPr wrap="square" lIns="0" tIns="0" rIns="0" bIns="0" rtlCol="0" anchor="ctr"/>
           <a:lstStyle/>
           <a:p>
-            <a:pPr algn="ctr" indent="0" marL="0">
-              <a:buNone/>
-            </a:pPr>
-            <a:r>
-              <a:rPr lang="en-US" sz="1500" dirty="0">
-                <a:solidFill>
-                  <a:srgbClr val="FFFFFF"/>
+            <a:pPr marL="0" indent="0" algn="ctr">
+              <a:buNone/>
+            </a:pPr>
+            <a:r>
+              <a:rPr lang="en-US" sz="2400" dirty="0">
+                <a:solidFill>
+                  <a:schemeClr val="bg1"/>
                 </a:solidFill>
                 <a:latin typeface="Calibri" pitchFamily="34" charset="0"/>
                 <a:ea typeface="Calibri" pitchFamily="34" charset="-122"/>
@@ -15473,7 +15778,11 @@
               </a:rPr>
               <a:t>шаг 1</a:t>
             </a:r>
-            <a:endParaRPr lang="en-US" sz="1500" dirty="0"/>
+            <a:endParaRPr lang="en-US" sz="2400" dirty="0">
+              <a:solidFill>
+                <a:schemeClr val="bg1"/>
+              </a:solidFill>
+            </a:endParaRPr>
           </a:p>
         </p:txBody>
       </p:sp>
@@ -15523,13 +15832,13 @@
           <a:bodyPr wrap="square" lIns="0" tIns="0" rIns="0" bIns="0" rtlCol="0" anchor="ctr"/>
           <a:lstStyle/>
           <a:p>
-            <a:pPr algn="ctr" indent="0" marL="0">
-              <a:buNone/>
-            </a:pPr>
-            <a:r>
-              <a:rPr lang="en-US" sz="1500" dirty="0">
-                <a:solidFill>
-                  <a:srgbClr val="FFFFFF"/>
+            <a:pPr marL="0" indent="0" algn="ctr">
+              <a:buNone/>
+            </a:pPr>
+            <a:r>
+              <a:rPr lang="en-US" sz="2400" dirty="0">
+                <a:solidFill>
+                  <a:schemeClr val="bg1"/>
                 </a:solidFill>
                 <a:latin typeface="Consolas" pitchFamily="34" charset="0"/>
                 <a:ea typeface="Consolas" pitchFamily="34" charset="-122"/>
@@ -15537,7 +15846,11 @@
               </a:rPr>
               <a:t>1</a:t>
             </a:r>
-            <a:endParaRPr lang="en-US" sz="1500" dirty="0"/>
+            <a:endParaRPr lang="en-US" sz="2400" dirty="0">
+              <a:solidFill>
+                <a:schemeClr val="bg1"/>
+              </a:solidFill>
+            </a:endParaRPr>
           </a:p>
         </p:txBody>
       </p:sp>
@@ -15587,13 +15900,13 @@
           <a:bodyPr wrap="square" lIns="0" tIns="0" rIns="0" bIns="0" rtlCol="0" anchor="ctr"/>
           <a:lstStyle/>
           <a:p>
-            <a:pPr algn="ctr" indent="0" marL="0">
-              <a:buNone/>
-            </a:pPr>
-            <a:r>
-              <a:rPr lang="en-US" sz="1500" dirty="0">
-                <a:solidFill>
-                  <a:srgbClr val="FFFFFF"/>
+            <a:pPr marL="0" indent="0" algn="ctr">
+              <a:buNone/>
+            </a:pPr>
+            <a:r>
+              <a:rPr lang="en-US" sz="2400" dirty="0">
+                <a:solidFill>
+                  <a:schemeClr val="bg1"/>
                 </a:solidFill>
                 <a:latin typeface="Consolas" pitchFamily="34" charset="0"/>
                 <a:ea typeface="Consolas" pitchFamily="34" charset="-122"/>
@@ -15601,7 +15914,11 @@
               </a:rPr>
               <a:t>1</a:t>
             </a:r>
-            <a:endParaRPr lang="en-US" sz="1500" dirty="0"/>
+            <a:endParaRPr lang="en-US" sz="2400" dirty="0">
+              <a:solidFill>
+                <a:schemeClr val="bg1"/>
+              </a:solidFill>
+            </a:endParaRPr>
           </a:p>
         </p:txBody>
       </p:sp>
@@ -15651,13 +15968,13 @@
           <a:bodyPr wrap="square" lIns="0" tIns="0" rIns="0" bIns="0" rtlCol="0" anchor="ctr"/>
           <a:lstStyle/>
           <a:p>
-            <a:pPr algn="ctr" indent="0" marL="0">
-              <a:buNone/>
-            </a:pPr>
-            <a:r>
-              <a:rPr lang="en-US" sz="1500" dirty="0">
-                <a:solidFill>
-                  <a:srgbClr val="FFFFFF"/>
+            <a:pPr marL="0" indent="0" algn="ctr">
+              <a:buNone/>
+            </a:pPr>
+            <a:r>
+              <a:rPr lang="en-US" sz="2400" dirty="0">
+                <a:solidFill>
+                  <a:schemeClr val="bg1"/>
                 </a:solidFill>
                 <a:latin typeface="Calibri" pitchFamily="34" charset="0"/>
                 <a:ea typeface="Calibri" pitchFamily="34" charset="-122"/>
@@ -15665,7 +15982,11 @@
               </a:rPr>
               <a:t>истина</a:t>
             </a:r>
-            <a:endParaRPr lang="en-US" sz="1500" dirty="0"/>
+            <a:endParaRPr lang="en-US" sz="2400" dirty="0">
+              <a:solidFill>
+                <a:schemeClr val="bg1"/>
+              </a:solidFill>
+            </a:endParaRPr>
           </a:p>
         </p:txBody>
       </p:sp>
@@ -15715,13 +16036,13 @@
           <a:bodyPr wrap="square" lIns="0" tIns="0" rIns="0" bIns="0" rtlCol="0" anchor="ctr"/>
           <a:lstStyle/>
           <a:p>
-            <a:pPr algn="ctr" indent="0" marL="0">
-              <a:buNone/>
-            </a:pPr>
-            <a:r>
-              <a:rPr lang="en-US" sz="1500" dirty="0">
-                <a:solidFill>
-                  <a:srgbClr val="FFFFFF"/>
+            <a:pPr marL="0" indent="0" algn="ctr">
+              <a:buNone/>
+            </a:pPr>
+            <a:r>
+              <a:rPr lang="en-US" sz="2400" dirty="0">
+                <a:solidFill>
+                  <a:schemeClr val="bg1"/>
                 </a:solidFill>
                 <a:latin typeface="Calibri" pitchFamily="34" charset="0"/>
                 <a:ea typeface="Calibri" pitchFamily="34" charset="-122"/>
@@ -15729,7 +16050,11 @@
               </a:rPr>
               <a:t>шаг 2</a:t>
             </a:r>
-            <a:endParaRPr lang="en-US" sz="1500" dirty="0"/>
+            <a:endParaRPr lang="en-US" sz="2400" dirty="0">
+              <a:solidFill>
+                <a:schemeClr val="bg1"/>
+              </a:solidFill>
+            </a:endParaRPr>
           </a:p>
         </p:txBody>
       </p:sp>
@@ -15779,13 +16104,13 @@
           <a:bodyPr wrap="square" lIns="0" tIns="0" rIns="0" bIns="0" rtlCol="0" anchor="ctr"/>
           <a:lstStyle/>
           <a:p>
-            <a:pPr algn="ctr" indent="0" marL="0">
-              <a:buNone/>
-            </a:pPr>
-            <a:r>
-              <a:rPr lang="en-US" sz="1500" dirty="0">
-                <a:solidFill>
-                  <a:srgbClr val="FFFFFF"/>
+            <a:pPr marL="0" indent="0" algn="ctr">
+              <a:buNone/>
+            </a:pPr>
+            <a:r>
+              <a:rPr lang="en-US" sz="2400" dirty="0">
+                <a:solidFill>
+                  <a:schemeClr val="bg1"/>
                 </a:solidFill>
                 <a:latin typeface="Consolas" pitchFamily="34" charset="0"/>
                 <a:ea typeface="Consolas" pitchFamily="34" charset="-122"/>
@@ -15793,7 +16118,11 @@
               </a:rPr>
               <a:t>2</a:t>
             </a:r>
-            <a:endParaRPr lang="en-US" sz="1500" dirty="0"/>
+            <a:endParaRPr lang="en-US" sz="2400" dirty="0">
+              <a:solidFill>
+                <a:schemeClr val="bg1"/>
+              </a:solidFill>
+            </a:endParaRPr>
           </a:p>
         </p:txBody>
       </p:sp>
@@ -15843,13 +16172,13 @@
           <a:bodyPr wrap="square" lIns="0" tIns="0" rIns="0" bIns="0" rtlCol="0" anchor="ctr"/>
           <a:lstStyle/>
           <a:p>
-            <a:pPr algn="ctr" indent="0" marL="0">
-              <a:buNone/>
-            </a:pPr>
-            <a:r>
-              <a:rPr lang="en-US" sz="1500" dirty="0">
-                <a:solidFill>
-                  <a:srgbClr val="FFFFFF"/>
+            <a:pPr marL="0" indent="0" algn="ctr">
+              <a:buNone/>
+            </a:pPr>
+            <a:r>
+              <a:rPr lang="en-US" sz="2400" dirty="0">
+                <a:solidFill>
+                  <a:schemeClr val="bg1"/>
                 </a:solidFill>
                 <a:latin typeface="Consolas" pitchFamily="34" charset="0"/>
                 <a:ea typeface="Consolas" pitchFamily="34" charset="-122"/>
@@ -15857,7 +16186,11 @@
               </a:rPr>
               <a:t>3</a:t>
             </a:r>
-            <a:endParaRPr lang="en-US" sz="1500" dirty="0"/>
+            <a:endParaRPr lang="en-US" sz="2400" dirty="0">
+              <a:solidFill>
+                <a:schemeClr val="bg1"/>
+              </a:solidFill>
+            </a:endParaRPr>
           </a:p>
         </p:txBody>
       </p:sp>
@@ -15907,13 +16240,13 @@
           <a:bodyPr wrap="square" lIns="0" tIns="0" rIns="0" bIns="0" rtlCol="0" anchor="ctr"/>
           <a:lstStyle/>
           <a:p>
-            <a:pPr algn="ctr" indent="0" marL="0">
-              <a:buNone/>
-            </a:pPr>
-            <a:r>
-              <a:rPr lang="en-US" sz="1500" dirty="0">
-                <a:solidFill>
-                  <a:srgbClr val="FFFFFF"/>
+            <a:pPr marL="0" indent="0" algn="ctr">
+              <a:buNone/>
+            </a:pPr>
+            <a:r>
+              <a:rPr lang="en-US" sz="2400" dirty="0">
+                <a:solidFill>
+                  <a:schemeClr val="bg1"/>
                 </a:solidFill>
                 <a:latin typeface="Calibri" pitchFamily="34" charset="0"/>
                 <a:ea typeface="Calibri" pitchFamily="34" charset="-122"/>
@@ -15921,7 +16254,11 @@
               </a:rPr>
               <a:t>истина</a:t>
             </a:r>
-            <a:endParaRPr lang="en-US" sz="1500" dirty="0"/>
+            <a:endParaRPr lang="en-US" sz="2400" dirty="0">
+              <a:solidFill>
+                <a:schemeClr val="bg1"/>
+              </a:solidFill>
+            </a:endParaRPr>
           </a:p>
         </p:txBody>
       </p:sp>
@@ -15971,13 +16308,13 @@
           <a:bodyPr wrap="square" lIns="0" tIns="0" rIns="0" bIns="0" rtlCol="0" anchor="ctr"/>
           <a:lstStyle/>
           <a:p>
-            <a:pPr algn="ctr" indent="0" marL="0">
-              <a:buNone/>
-            </a:pPr>
-            <a:r>
-              <a:rPr lang="en-US" sz="1500" dirty="0">
-                <a:solidFill>
-                  <a:srgbClr val="FFFFFF"/>
+            <a:pPr marL="0" indent="0" algn="ctr">
+              <a:buNone/>
+            </a:pPr>
+            <a:r>
+              <a:rPr lang="en-US" sz="2400" dirty="0">
+                <a:solidFill>
+                  <a:schemeClr val="bg1"/>
                 </a:solidFill>
                 <a:latin typeface="Calibri" pitchFamily="34" charset="0"/>
                 <a:ea typeface="Calibri" pitchFamily="34" charset="-122"/>
@@ -15985,7 +16322,11 @@
               </a:rPr>
               <a:t>шаг 3</a:t>
             </a:r>
-            <a:endParaRPr lang="en-US" sz="1500" dirty="0"/>
+            <a:endParaRPr lang="en-US" sz="2400" dirty="0">
+              <a:solidFill>
+                <a:schemeClr val="bg1"/>
+              </a:solidFill>
+            </a:endParaRPr>
           </a:p>
         </p:txBody>
       </p:sp>
@@ -16035,13 +16376,13 @@
           <a:bodyPr wrap="square" lIns="0" tIns="0" rIns="0" bIns="0" rtlCol="0" anchor="ctr"/>
           <a:lstStyle/>
           <a:p>
-            <a:pPr algn="ctr" indent="0" marL="0">
-              <a:buNone/>
-            </a:pPr>
-            <a:r>
-              <a:rPr lang="en-US" sz="1500" dirty="0">
-                <a:solidFill>
-                  <a:srgbClr val="FFFFFF"/>
+            <a:pPr marL="0" indent="0" algn="ctr">
+              <a:buNone/>
+            </a:pPr>
+            <a:r>
+              <a:rPr lang="en-US" sz="2400" dirty="0">
+                <a:solidFill>
+                  <a:schemeClr val="bg1"/>
                 </a:solidFill>
                 <a:latin typeface="Consolas" pitchFamily="34" charset="0"/>
                 <a:ea typeface="Consolas" pitchFamily="34" charset="-122"/>
@@ -16049,7 +16390,11 @@
               </a:rPr>
               <a:t>3</a:t>
             </a:r>
-            <a:endParaRPr lang="en-US" sz="1500" dirty="0"/>
+            <a:endParaRPr lang="en-US" sz="2400" dirty="0">
+              <a:solidFill>
+                <a:schemeClr val="bg1"/>
+              </a:solidFill>
+            </a:endParaRPr>
           </a:p>
         </p:txBody>
       </p:sp>
@@ -16099,13 +16444,13 @@
           <a:bodyPr wrap="square" lIns="0" tIns="0" rIns="0" bIns="0" rtlCol="0" anchor="ctr"/>
           <a:lstStyle/>
           <a:p>
-            <a:pPr algn="ctr" indent="0" marL="0">
-              <a:buNone/>
-            </a:pPr>
-            <a:r>
-              <a:rPr lang="en-US" sz="1500" dirty="0">
-                <a:solidFill>
-                  <a:srgbClr val="FFFFFF"/>
+            <a:pPr marL="0" indent="0" algn="ctr">
+              <a:buNone/>
+            </a:pPr>
+            <a:r>
+              <a:rPr lang="en-US" sz="2400" dirty="0">
+                <a:solidFill>
+                  <a:schemeClr val="bg1"/>
                 </a:solidFill>
                 <a:latin typeface="Consolas" pitchFamily="34" charset="0"/>
                 <a:ea typeface="Consolas" pitchFamily="34" charset="-122"/>
@@ -16113,7 +16458,11 @@
               </a:rPr>
               <a:t>6</a:t>
             </a:r>
-            <a:endParaRPr lang="en-US" sz="1500" dirty="0"/>
+            <a:endParaRPr lang="en-US" sz="2400" dirty="0">
+              <a:solidFill>
+                <a:schemeClr val="bg1"/>
+              </a:solidFill>
+            </a:endParaRPr>
           </a:p>
         </p:txBody>
       </p:sp>
@@ -16163,13 +16512,13 @@
           <a:bodyPr wrap="square" lIns="0" tIns="0" rIns="0" bIns="0" rtlCol="0" anchor="ctr"/>
           <a:lstStyle/>
           <a:p>
-            <a:pPr algn="ctr" indent="0" marL="0">
-              <a:buNone/>
-            </a:pPr>
-            <a:r>
-              <a:rPr lang="en-US" sz="1500" dirty="0">
-                <a:solidFill>
-                  <a:srgbClr val="FFFFFF"/>
+            <a:pPr marL="0" indent="0" algn="ctr">
+              <a:buNone/>
+            </a:pPr>
+            <a:r>
+              <a:rPr lang="en-US" sz="2400" dirty="0">
+                <a:solidFill>
+                  <a:schemeClr val="bg1"/>
                 </a:solidFill>
                 <a:latin typeface="Calibri" pitchFamily="34" charset="0"/>
                 <a:ea typeface="Calibri" pitchFamily="34" charset="-122"/>
@@ -16177,7 +16526,11 @@
               </a:rPr>
               <a:t>истина</a:t>
             </a:r>
-            <a:endParaRPr lang="en-US" sz="1500" dirty="0"/>
+            <a:endParaRPr lang="en-US" sz="2400" dirty="0">
+              <a:solidFill>
+                <a:schemeClr val="bg1"/>
+              </a:solidFill>
+            </a:endParaRPr>
           </a:p>
         </p:txBody>
       </p:sp>
@@ -16227,13 +16580,13 @@
           <a:bodyPr wrap="square" lIns="0" tIns="0" rIns="0" bIns="0" rtlCol="0" anchor="ctr"/>
           <a:lstStyle/>
           <a:p>
-            <a:pPr algn="ctr" indent="0" marL="0">
-              <a:buNone/>
-            </a:pPr>
-            <a:r>
-              <a:rPr lang="en-US" sz="1500" dirty="0">
-                <a:solidFill>
-                  <a:srgbClr val="FFFFFF"/>
+            <a:pPr marL="0" indent="0" algn="ctr">
+              <a:buNone/>
+            </a:pPr>
+            <a:r>
+              <a:rPr lang="en-US" sz="2400" dirty="0">
+                <a:solidFill>
+                  <a:schemeClr val="bg1"/>
                 </a:solidFill>
                 <a:latin typeface="Calibri" pitchFamily="34" charset="0"/>
                 <a:ea typeface="Calibri" pitchFamily="34" charset="-122"/>
@@ -16241,7 +16594,11 @@
               </a:rPr>
               <a:t>…</a:t>
             </a:r>
-            <a:endParaRPr lang="en-US" sz="1500" dirty="0"/>
+            <a:endParaRPr lang="en-US" sz="2400" dirty="0">
+              <a:solidFill>
+                <a:schemeClr val="bg1"/>
+              </a:solidFill>
+            </a:endParaRPr>
           </a:p>
         </p:txBody>
       </p:sp>
@@ -16291,13 +16648,13 @@
           <a:bodyPr wrap="square" lIns="0" tIns="0" rIns="0" bIns="0" rtlCol="0" anchor="ctr"/>
           <a:lstStyle/>
           <a:p>
-            <a:pPr algn="ctr" indent="0" marL="0">
-              <a:buNone/>
-            </a:pPr>
-            <a:r>
-              <a:rPr lang="en-US" sz="1500" dirty="0">
-                <a:solidFill>
-                  <a:srgbClr val="FFFFFF"/>
+            <a:pPr marL="0" indent="0" algn="ctr">
+              <a:buNone/>
+            </a:pPr>
+            <a:r>
+              <a:rPr lang="en-US" sz="2400" dirty="0">
+                <a:solidFill>
+                  <a:schemeClr val="bg1"/>
                 </a:solidFill>
                 <a:latin typeface="Consolas" pitchFamily="34" charset="0"/>
                 <a:ea typeface="Consolas" pitchFamily="34" charset="-122"/>
@@ -16305,7 +16662,11 @@
               </a:rPr>
               <a:t>…</a:t>
             </a:r>
-            <a:endParaRPr lang="en-US" sz="1500" dirty="0"/>
+            <a:endParaRPr lang="en-US" sz="2400" dirty="0">
+              <a:solidFill>
+                <a:schemeClr val="bg1"/>
+              </a:solidFill>
+            </a:endParaRPr>
           </a:p>
         </p:txBody>
       </p:sp>
@@ -16355,13 +16716,13 @@
           <a:bodyPr wrap="square" lIns="0" tIns="0" rIns="0" bIns="0" rtlCol="0" anchor="ctr"/>
           <a:lstStyle/>
           <a:p>
-            <a:pPr algn="ctr" indent="0" marL="0">
-              <a:buNone/>
-            </a:pPr>
-            <a:r>
-              <a:rPr lang="en-US" sz="1500" dirty="0">
-                <a:solidFill>
-                  <a:srgbClr val="FFFFFF"/>
+            <a:pPr marL="0" indent="0" algn="ctr">
+              <a:buNone/>
+            </a:pPr>
+            <a:r>
+              <a:rPr lang="en-US" sz="2400" dirty="0">
+                <a:solidFill>
+                  <a:schemeClr val="bg1"/>
                 </a:solidFill>
                 <a:latin typeface="Consolas" pitchFamily="34" charset="0"/>
                 <a:ea typeface="Consolas" pitchFamily="34" charset="-122"/>
@@ -16369,7 +16730,11 @@
               </a:rPr>
               <a:t>…</a:t>
             </a:r>
-            <a:endParaRPr lang="en-US" sz="1500" dirty="0"/>
+            <a:endParaRPr lang="en-US" sz="2400" dirty="0">
+              <a:solidFill>
+                <a:schemeClr val="bg1"/>
+              </a:solidFill>
+            </a:endParaRPr>
           </a:p>
         </p:txBody>
       </p:sp>
@@ -16419,13 +16784,13 @@
           <a:bodyPr wrap="square" lIns="0" tIns="0" rIns="0" bIns="0" rtlCol="0" anchor="ctr"/>
           <a:lstStyle/>
           <a:p>
-            <a:pPr algn="ctr" indent="0" marL="0">
-              <a:buNone/>
-            </a:pPr>
-            <a:r>
-              <a:rPr lang="en-US" sz="1500" dirty="0">
-                <a:solidFill>
-                  <a:srgbClr val="FFFFFF"/>
+            <a:pPr marL="0" indent="0" algn="ctr">
+              <a:buNone/>
+            </a:pPr>
+            <a:r>
+              <a:rPr lang="en-US" sz="2400" dirty="0">
+                <a:solidFill>
+                  <a:schemeClr val="bg1"/>
                 </a:solidFill>
                 <a:latin typeface="Calibri" pitchFamily="34" charset="0"/>
                 <a:ea typeface="Calibri" pitchFamily="34" charset="-122"/>
@@ -16433,7 +16798,11 @@
               </a:rPr>
               <a:t>…</a:t>
             </a:r>
-            <a:endParaRPr lang="en-US" sz="1500" dirty="0"/>
+            <a:endParaRPr lang="en-US" sz="2400" dirty="0">
+              <a:solidFill>
+                <a:schemeClr val="bg1"/>
+              </a:solidFill>
+            </a:endParaRPr>
           </a:p>
         </p:txBody>
       </p:sp>
@@ -16483,13 +16852,13 @@
           <a:bodyPr wrap="square" lIns="0" tIns="0" rIns="0" bIns="0" rtlCol="0" anchor="ctr"/>
           <a:lstStyle/>
           <a:p>
-            <a:pPr algn="ctr" indent="0" marL="0">
-              <a:buNone/>
-            </a:pPr>
-            <a:r>
-              <a:rPr lang="en-US" sz="1500" dirty="0">
-                <a:solidFill>
-                  <a:srgbClr val="FFFFFF"/>
+            <a:pPr marL="0" indent="0" algn="ctr">
+              <a:buNone/>
+            </a:pPr>
+            <a:r>
+              <a:rPr lang="en-US" sz="2400" dirty="0">
+                <a:solidFill>
+                  <a:schemeClr val="bg1"/>
                 </a:solidFill>
                 <a:latin typeface="Calibri" pitchFamily="34" charset="0"/>
                 <a:ea typeface="Calibri" pitchFamily="34" charset="-122"/>
@@ -16497,7 +16866,11 @@
               </a:rPr>
               <a:t>шаг 10</a:t>
             </a:r>
-            <a:endParaRPr lang="en-US" sz="1500" dirty="0"/>
+            <a:endParaRPr lang="en-US" sz="2400" dirty="0">
+              <a:solidFill>
+                <a:schemeClr val="bg1"/>
+              </a:solidFill>
+            </a:endParaRPr>
           </a:p>
         </p:txBody>
       </p:sp>
@@ -16547,13 +16920,13 @@
           <a:bodyPr wrap="square" lIns="0" tIns="0" rIns="0" bIns="0" rtlCol="0" anchor="ctr"/>
           <a:lstStyle/>
           <a:p>
-            <a:pPr algn="ctr" indent="0" marL="0">
-              <a:buNone/>
-            </a:pPr>
-            <a:r>
-              <a:rPr lang="en-US" sz="1500" dirty="0">
-                <a:solidFill>
-                  <a:srgbClr val="FFFFFF"/>
+            <a:pPr marL="0" indent="0" algn="ctr">
+              <a:buNone/>
+            </a:pPr>
+            <a:r>
+              <a:rPr lang="en-US" sz="2400" dirty="0">
+                <a:solidFill>
+                  <a:schemeClr val="bg1"/>
                 </a:solidFill>
                 <a:latin typeface="Consolas" pitchFamily="34" charset="0"/>
                 <a:ea typeface="Consolas" pitchFamily="34" charset="-122"/>
@@ -16561,7 +16934,11 @@
               </a:rPr>
               <a:t>10</a:t>
             </a:r>
-            <a:endParaRPr lang="en-US" sz="1500" dirty="0"/>
+            <a:endParaRPr lang="en-US" sz="2400" dirty="0">
+              <a:solidFill>
+                <a:schemeClr val="bg1"/>
+              </a:solidFill>
+            </a:endParaRPr>
           </a:p>
         </p:txBody>
       </p:sp>
@@ -16611,13 +16988,13 @@
           <a:bodyPr wrap="square" lIns="0" tIns="0" rIns="0" bIns="0" rtlCol="0" anchor="ctr"/>
           <a:lstStyle/>
           <a:p>
-            <a:pPr algn="ctr" indent="0" marL="0">
-              <a:buNone/>
-            </a:pPr>
-            <a:r>
-              <a:rPr lang="en-US" sz="1500" dirty="0">
-                <a:solidFill>
-                  <a:srgbClr val="FFFFFF"/>
+            <a:pPr marL="0" indent="0" algn="ctr">
+              <a:buNone/>
+            </a:pPr>
+            <a:r>
+              <a:rPr lang="en-US" sz="2400" dirty="0">
+                <a:solidFill>
+                  <a:schemeClr val="bg1"/>
                 </a:solidFill>
                 <a:latin typeface="Consolas" pitchFamily="34" charset="0"/>
                 <a:ea typeface="Consolas" pitchFamily="34" charset="-122"/>
@@ -16625,7 +17002,11 @@
               </a:rPr>
               <a:t>55</a:t>
             </a:r>
-            <a:endParaRPr lang="en-US" sz="1500" dirty="0"/>
+            <a:endParaRPr lang="en-US" sz="2400" dirty="0">
+              <a:solidFill>
+                <a:schemeClr val="bg1"/>
+              </a:solidFill>
+            </a:endParaRPr>
           </a:p>
         </p:txBody>
       </p:sp>
@@ -16675,13 +17056,13 @@
           <a:bodyPr wrap="square" lIns="0" tIns="0" rIns="0" bIns="0" rtlCol="0" anchor="ctr"/>
           <a:lstStyle/>
           <a:p>
-            <a:pPr algn="ctr" indent="0" marL="0">
-              <a:buNone/>
-            </a:pPr>
-            <a:r>
-              <a:rPr lang="en-US" sz="1500" dirty="0">
-                <a:solidFill>
-                  <a:srgbClr val="FFFFFF"/>
+            <a:pPr marL="0" indent="0" algn="ctr">
+              <a:buNone/>
+            </a:pPr>
+            <a:r>
+              <a:rPr lang="en-US" sz="2400" dirty="0">
+                <a:solidFill>
+                  <a:schemeClr val="bg1"/>
                 </a:solidFill>
                 <a:latin typeface="Calibri" pitchFamily="34" charset="0"/>
                 <a:ea typeface="Calibri" pitchFamily="34" charset="-122"/>
@@ -16689,7 +17070,11 @@
               </a:rPr>
               <a:t>истина</a:t>
             </a:r>
-            <a:endParaRPr lang="en-US" sz="1500" dirty="0"/>
+            <a:endParaRPr lang="en-US" sz="2400" dirty="0">
+              <a:solidFill>
+                <a:schemeClr val="bg1"/>
+              </a:solidFill>
+            </a:endParaRPr>
           </a:p>
         </p:txBody>
       </p:sp>
@@ -16739,13 +17124,13 @@
           <a:bodyPr wrap="square" lIns="0" tIns="0" rIns="0" bIns="0" rtlCol="0" anchor="ctr"/>
           <a:lstStyle/>
           <a:p>
-            <a:pPr algn="ctr" indent="0" marL="0">
-              <a:buNone/>
-            </a:pPr>
-            <a:r>
-              <a:rPr lang="en-US" sz="1500" b="1" dirty="0">
-                <a:solidFill>
-                  <a:srgbClr val="F2789F"/>
+            <a:pPr marL="0" indent="0" algn="ctr">
+              <a:buNone/>
+            </a:pPr>
+            <a:r>
+              <a:rPr lang="en-US" sz="2400" b="1" dirty="0">
+                <a:solidFill>
+                  <a:schemeClr val="bg1"/>
                 </a:solidFill>
                 <a:latin typeface="Calibri" pitchFamily="34" charset="0"/>
                 <a:ea typeface="Calibri" pitchFamily="34" charset="-122"/>
@@ -16753,7 +17138,11 @@
               </a:rPr>
               <a:t>выход</a:t>
             </a:r>
-            <a:endParaRPr lang="en-US" sz="1500" dirty="0"/>
+            <a:endParaRPr lang="en-US" sz="2400" dirty="0">
+              <a:solidFill>
+                <a:schemeClr val="bg1"/>
+              </a:solidFill>
+            </a:endParaRPr>
           </a:p>
         </p:txBody>
       </p:sp>
@@ -16803,13 +17192,13 @@
           <a:bodyPr wrap="square" lIns="0" tIns="0" rIns="0" bIns="0" rtlCol="0" anchor="ctr"/>
           <a:lstStyle/>
           <a:p>
-            <a:pPr algn="ctr" indent="0" marL="0">
-              <a:buNone/>
-            </a:pPr>
-            <a:r>
-              <a:rPr lang="en-US" sz="1500" b="1" dirty="0">
-                <a:solidFill>
-                  <a:srgbClr val="F2789F"/>
+            <a:pPr marL="0" indent="0" algn="ctr">
+              <a:buNone/>
+            </a:pPr>
+            <a:r>
+              <a:rPr lang="en-US" sz="2400" b="1" dirty="0">
+                <a:solidFill>
+                  <a:schemeClr val="bg1"/>
                 </a:solidFill>
                 <a:latin typeface="Consolas" pitchFamily="34" charset="0"/>
                 <a:ea typeface="Consolas" pitchFamily="34" charset="-122"/>
@@ -16817,7 +17206,11 @@
               </a:rPr>
               <a:t>11</a:t>
             </a:r>
-            <a:endParaRPr lang="en-US" sz="1500" dirty="0"/>
+            <a:endParaRPr lang="en-US" sz="2400" dirty="0">
+              <a:solidFill>
+                <a:schemeClr val="bg1"/>
+              </a:solidFill>
+            </a:endParaRPr>
           </a:p>
         </p:txBody>
       </p:sp>
@@ -16867,13 +17260,13 @@
           <a:bodyPr wrap="square" lIns="0" tIns="0" rIns="0" bIns="0" rtlCol="0" anchor="ctr"/>
           <a:lstStyle/>
           <a:p>
-            <a:pPr algn="ctr" indent="0" marL="0">
-              <a:buNone/>
-            </a:pPr>
-            <a:r>
-              <a:rPr lang="en-US" sz="1500" b="1" dirty="0">
-                <a:solidFill>
-                  <a:srgbClr val="F2789F"/>
+            <a:pPr marL="0" indent="0" algn="ctr">
+              <a:buNone/>
+            </a:pPr>
+            <a:r>
+              <a:rPr lang="en-US" sz="2400" b="1" dirty="0">
+                <a:solidFill>
+                  <a:schemeClr val="bg1"/>
                 </a:solidFill>
                 <a:latin typeface="Consolas" pitchFamily="34" charset="0"/>
                 <a:ea typeface="Consolas" pitchFamily="34" charset="-122"/>
@@ -16881,7 +17274,11 @@
               </a:rPr>
               <a:t>—</a:t>
             </a:r>
-            <a:endParaRPr lang="en-US" sz="1500" dirty="0"/>
+            <a:endParaRPr lang="en-US" sz="2400" dirty="0">
+              <a:solidFill>
+                <a:schemeClr val="bg1"/>
+              </a:solidFill>
+            </a:endParaRPr>
           </a:p>
         </p:txBody>
       </p:sp>
@@ -16931,13 +17328,13 @@
           <a:bodyPr wrap="square" lIns="0" tIns="0" rIns="0" bIns="0" rtlCol="0" anchor="ctr"/>
           <a:lstStyle/>
           <a:p>
-            <a:pPr algn="ctr" indent="0" marL="0">
-              <a:buNone/>
-            </a:pPr>
-            <a:r>
-              <a:rPr lang="en-US" sz="1500" b="1" dirty="0">
-                <a:solidFill>
-                  <a:srgbClr val="F2789F"/>
+            <a:pPr marL="0" indent="0" algn="ctr">
+              <a:buNone/>
+            </a:pPr>
+            <a:r>
+              <a:rPr lang="en-US" sz="2400" b="1" dirty="0">
+                <a:solidFill>
+                  <a:schemeClr val="bg1"/>
                 </a:solidFill>
                 <a:latin typeface="Calibri" pitchFamily="34" charset="0"/>
                 <a:ea typeface="Calibri" pitchFamily="34" charset="-122"/>
@@ -16945,7 +17342,11 @@
               </a:rPr>
               <a:t>ложь</a:t>
             </a:r>
-            <a:endParaRPr lang="en-US" sz="1500" dirty="0"/>
+            <a:endParaRPr lang="en-US" sz="2400" dirty="0">
+              <a:solidFill>
+                <a:schemeClr val="bg1"/>
+              </a:solidFill>
+            </a:endParaRPr>
           </a:p>
         </p:txBody>
       </p:sp>
@@ -16970,13 +17371,13 @@
           <a:bodyPr wrap="square" lIns="0" tIns="0" rIns="0" bIns="0" rtlCol="0" anchor="ctr"/>
           <a:lstStyle/>
           <a:p>
-            <a:pPr indent="0" marL="0">
-              <a:buNone/>
-            </a:pPr>
-            <a:r>
-              <a:rPr lang="en-US" sz="1600" i="1" dirty="0">
-                <a:solidFill>
-                  <a:srgbClr val="4FD1E0"/>
+            <a:pPr marL="0" indent="0">
+              <a:buNone/>
+            </a:pPr>
+            <a:r>
+              <a:rPr lang="en-US" sz="2000" b="1" i="1" dirty="0">
+                <a:solidFill>
+                  <a:schemeClr val="bg1"/>
                 </a:solidFill>
                 <a:latin typeface="Calibri" pitchFamily="34" charset="0"/>
                 <a:ea typeface="Calibri" pitchFamily="34" charset="-122"/>
@@ -16984,7 +17385,11 @@
               </a:rPr>
               <a:t>В столбце i — значение, с которым выполняется шаг. После шага i увеличивается на 1. При i = 11 условие ложно — цикл завершился, сумма равна 55.</a:t>
             </a:r>
-            <a:endParaRPr lang="en-US" sz="1600" dirty="0"/>
+            <a:endParaRPr lang="en-US" sz="2000" b="1" dirty="0">
+              <a:solidFill>
+                <a:schemeClr val="bg1"/>
+              </a:solidFill>
+            </a:endParaRPr>
           </a:p>
         </p:txBody>
       </p:sp>
@@ -17004,6 +17409,7 @@
         <a:solidFill>
           <a:srgbClr val="17132E"/>
         </a:solidFill>
+        <a:effectLst/>
       </p:bgPr>
     </p:bg>
     <p:spTree>
@@ -17063,11 +17469,11 @@
           <a:bodyPr wrap="square" lIns="0" tIns="0" rIns="0" bIns="0" rtlCol="0" anchor="ctr"/>
           <a:lstStyle/>
           <a:p>
-            <a:pPr algn="ctr" indent="0" marL="0">
-              <a:buNone/>
-            </a:pPr>
-            <a:r>
-              <a:rPr lang="en-US" sz="1400" b="1" spc="200" kern="0" dirty="0">
+            <a:pPr marL="0" indent="0" algn="ctr">
+              <a:buNone/>
+            </a:pPr>
+            <a:r>
+              <a:rPr lang="en-US" sz="1400" b="1" kern="0" spc="200" dirty="0">
                 <a:solidFill>
                   <a:srgbClr val="17132E"/>
                 </a:solidFill>
@@ -17129,7 +17535,7 @@
           <a:bodyPr wrap="square" lIns="0" tIns="0" rIns="0" bIns="0" rtlCol="0" anchor="ctr"/>
           <a:lstStyle/>
           <a:p>
-            <a:pPr algn="ctr" indent="0" marL="0">
+            <a:pPr marL="0" indent="0" algn="ctr">
               <a:buNone/>
             </a:pPr>
             <a:r>
@@ -17168,7 +17574,7 @@
           <a:bodyPr wrap="square" lIns="0" tIns="0" rIns="0" bIns="0" rtlCol="0" anchor="ctr"/>
           <a:lstStyle/>
           <a:p>
-            <a:pPr indent="0" marL="0">
+            <a:pPr marL="0" indent="0">
               <a:buNone/>
             </a:pPr>
             <a:r>
@@ -17207,13 +17613,13 @@
           <a:bodyPr wrap="square" lIns="0" tIns="0" rIns="0" bIns="0" rtlCol="0" anchor="ctr"/>
           <a:lstStyle/>
           <a:p>
-            <a:pPr indent="0" marL="0">
-              <a:buNone/>
-            </a:pPr>
-            <a:r>
-              <a:rPr lang="en-US" sz="1700" i="1" dirty="0">
-                <a:solidFill>
-                  <a:srgbClr val="4FD1E0"/>
+            <a:pPr marL="0" indent="0">
+              <a:buNone/>
+            </a:pPr>
+            <a:r>
+              <a:rPr lang="en-US" sz="2400" b="1" i="1" dirty="0">
+                <a:solidFill>
+                  <a:schemeClr val="bg1"/>
                 </a:solidFill>
                 <a:latin typeface="Calibri" pitchFamily="34" charset="0"/>
                 <a:ea typeface="Calibri" pitchFamily="34" charset="-122"/>
@@ -17221,7 +17627,11 @@
               </a:rPr>
               <a:t>Счётчик меняется от 3 до 12 включительно.</a:t>
             </a:r>
-            <a:endParaRPr lang="en-US" sz="1700" dirty="0"/>
+            <a:endParaRPr lang="en-US" sz="2400" b="1" dirty="0">
+              <a:solidFill>
+                <a:schemeClr val="bg1"/>
+              </a:solidFill>
+            </a:endParaRPr>
           </a:p>
         </p:txBody>
       </p:sp>
@@ -17273,11 +17683,11 @@
           <a:bodyPr wrap="square" lIns="0" tIns="0" rIns="0" bIns="0" rtlCol="0" anchor="ctr"/>
           <a:lstStyle/>
           <a:p>
-            <a:pPr indent="0" marL="0">
-              <a:buNone/>
-            </a:pPr>
-            <a:r>
-              <a:rPr lang="en-US" sz="1400" b="1" spc="200" kern="0" dirty="0">
+            <a:pPr marL="0" indent="0">
+              <a:buNone/>
+            </a:pPr>
+            <a:r>
+              <a:rPr lang="en-US" sz="1400" b="1" kern="0" spc="200" dirty="0">
                 <a:solidFill>
                   <a:srgbClr val="A9A3C4"/>
                 </a:solidFill>
@@ -17307,6 +17717,7 @@
         <a:solidFill>
           <a:srgbClr val="17132E"/>
         </a:solidFill>
+        <a:effectLst/>
       </p:bgPr>
     </p:bg>
     <p:spTree>
@@ -17366,11 +17777,11 @@
           <a:bodyPr wrap="square" lIns="0" tIns="0" rIns="0" bIns="0" rtlCol="0" anchor="ctr"/>
           <a:lstStyle/>
           <a:p>
-            <a:pPr algn="ctr" indent="0" marL="0">
-              <a:buNone/>
-            </a:pPr>
-            <a:r>
-              <a:rPr lang="en-US" sz="1500" b="1" spc="200" kern="0" dirty="0">
+            <a:pPr marL="0" indent="0" algn="ctr">
+              <a:buNone/>
+            </a:pPr>
+            <a:r>
+              <a:rPr lang="en-US" sz="1500" b="1" kern="0" spc="200" dirty="0">
                 <a:solidFill>
                   <a:srgbClr val="17132E"/>
                 </a:solidFill>
@@ -17405,7 +17816,7 @@
           <a:bodyPr wrap="square" lIns="0" tIns="0" rIns="0" bIns="0" rtlCol="0" anchor="ctr"/>
           <a:lstStyle/>
           <a:p>
-            <a:pPr indent="0" marL="0">
+            <a:pPr marL="0" indent="0">
               <a:buNone/>
             </a:pPr>
             <a:r>
@@ -17471,7 +17882,7 @@
           <a:bodyPr wrap="square" lIns="0" tIns="0" rIns="0" bIns="0" rtlCol="0" anchor="ctr"/>
           <a:lstStyle/>
           <a:p>
-            <a:pPr indent="0" marL="0">
+            <a:pPr marL="0" indent="0">
               <a:lnSpc>
                 <a:spcPct val="110000"/>
               </a:lnSpc>
@@ -17540,11 +17951,11 @@
           <a:bodyPr wrap="square" lIns="0" tIns="0" rIns="0" bIns="0" rtlCol="0" anchor="ctr"/>
           <a:lstStyle/>
           <a:p>
-            <a:pPr indent="0" marL="0">
-              <a:buNone/>
-            </a:pPr>
-            <a:r>
-              <a:rPr lang="en-US" sz="1900" dirty="0">
+            <a:pPr marL="0" indent="0">
+              <a:buNone/>
+            </a:pPr>
+            <a:r>
+              <a:rPr lang="en-US" sz="2400" dirty="0">
                 <a:solidFill>
                   <a:srgbClr val="FFFFFF"/>
                 </a:solidFill>
@@ -17554,7 +17965,7 @@
               </a:rPr>
               <a:t>Десять раз: 3, 4, 5, 6, 7, 8, 9, 10, 11, 12. Единицу прибавляют потому, что оба конца входят в счёт.</a:t>
             </a:r>
-            <a:endParaRPr lang="en-US" sz="1900" dirty="0"/>
+            <a:endParaRPr lang="en-US" sz="2400" dirty="0"/>
           </a:p>
         </p:txBody>
       </p:sp>
@@ -17859,4 +18270,319 @@
     </a:ext>
   </a:extLst>
 </a:theme>
+</file>
+
+<file path=ppt/theme/theme2.xml><?xml version="1.0" encoding="utf-8"?>
+<a:theme xmlns:a="http://schemas.openxmlformats.org/drawingml/2006/main" name="Тема Office">
+  <a:themeElements>
+    <a:clrScheme name="Стандартная">
+      <a:dk1>
+        <a:sysClr val="windowText" lastClr="000000"/>
+      </a:dk1>
+      <a:lt1>
+        <a:sysClr val="window" lastClr="FFFFFF"/>
+      </a:lt1>
+      <a:dk2>
+        <a:srgbClr val="0E2841"/>
+      </a:dk2>
+      <a:lt2>
+        <a:srgbClr val="E8E8E8"/>
+      </a:lt2>
+      <a:accent1>
+        <a:srgbClr val="156082"/>
+      </a:accent1>
+      <a:accent2>
+        <a:srgbClr val="E97132"/>
+      </a:accent2>
+      <a:accent3>
+        <a:srgbClr val="196B24"/>
+      </a:accent3>
+      <a:accent4>
+        <a:srgbClr val="0F9ED5"/>
+      </a:accent4>
+      <a:accent5>
+        <a:srgbClr val="A02B93"/>
+      </a:accent5>
+      <a:accent6>
+        <a:srgbClr val="4EA72E"/>
+      </a:accent6>
+      <a:hlink>
+        <a:srgbClr val="467886"/>
+      </a:hlink>
+      <a:folHlink>
+        <a:srgbClr val="96607D"/>
+      </a:folHlink>
+    </a:clrScheme>
+    <a:fontScheme name="Стандартная">
+      <a:majorFont>
+        <a:latin typeface="Aptos Display" panose="02110004020202020204"/>
+        <a:ea typeface=""/>
+        <a:cs typeface=""/>
+        <a:font script="Jpan" typeface="游ゴシック Light"/>
+        <a:font script="Hang" typeface="맑은 고딕"/>
+        <a:font script="Hans" typeface="等线 Light"/>
+        <a:font script="Hant" typeface="新細明體"/>
+        <a:font script="Arab" typeface="Times New Roman"/>
+        <a:font script="Hebr" typeface="Times New Roman"/>
+        <a:font script="Thai" typeface="Angsana New"/>
+        <a:font script="Ethi" typeface="Nyala"/>
+        <a:font script="Beng" typeface="Vrinda"/>
+        <a:font script="Gujr" typeface="Shruti"/>
+        <a:font script="Khmr" typeface="MoolBoran"/>
+        <a:font script="Knda" typeface="Tunga"/>
+        <a:font script="Guru" typeface="Raavi"/>
+        <a:font script="Cans" typeface="Euphemia"/>
+        <a:font script="Cher" typeface="Plantagenet Cherokee"/>
+        <a:font script="Yiii" typeface="Microsoft Yi Baiti"/>
+        <a:font script="Tibt" typeface="Microsoft Himalaya"/>
+        <a:font script="Thaa" typeface="MV Boli"/>
+        <a:font script="Deva" typeface="Mangal"/>
+        <a:font script="Telu" typeface="Gautami"/>
+        <a:font script="Taml" typeface="Latha"/>
+        <a:font script="Syrc" typeface="Estrangelo Edessa"/>
+        <a:font script="Orya" typeface="Kalinga"/>
+        <a:font script="Mlym" typeface="Kartika"/>
+        <a:font script="Laoo" typeface="DokChampa"/>
+        <a:font script="Sinh" typeface="Iskoola Pota"/>
+        <a:font script="Mong" typeface="Mongolian Baiti"/>
+        <a:font script="Viet" typeface="Times New Roman"/>
+        <a:font script="Uigh" typeface="Microsoft Uighur"/>
+        <a:font script="Geor" typeface="Sylfaen"/>
+        <a:font script="Armn" typeface="Arial"/>
+        <a:font script="Bugi" typeface="Leelawadee UI"/>
+        <a:font script="Bopo" typeface="Microsoft JhengHei"/>
+        <a:font script="Java" typeface="Javanese Text"/>
+        <a:font script="Lisu" typeface="Segoe UI"/>
+        <a:font script="Mymr" typeface="Myanmar Text"/>
+        <a:font script="Nkoo" typeface="Ebrima"/>
+        <a:font script="Olck" typeface="Nirmala UI"/>
+        <a:font script="Osma" typeface="Ebrima"/>
+        <a:font script="Phag" typeface="Phagspa"/>
+        <a:font script="Syrn" typeface="Estrangelo Edessa"/>
+        <a:font script="Syrj" typeface="Estrangelo Edessa"/>
+        <a:font script="Syre" typeface="Estrangelo Edessa"/>
+        <a:font script="Sora" typeface="Nirmala UI"/>
+        <a:font script="Tale" typeface="Microsoft Tai Le"/>
+        <a:font script="Talu" typeface="Microsoft New Tai Lue"/>
+        <a:font script="Tfng" typeface="Ebrima"/>
+      </a:majorFont>
+      <a:minorFont>
+        <a:latin typeface="Aptos" panose="02110004020202020204"/>
+        <a:ea typeface=""/>
+        <a:cs typeface=""/>
+        <a:font script="Jpan" typeface="游ゴシック"/>
+        <a:font script="Hang" typeface="맑은 고딕"/>
+        <a:font script="Hans" typeface="等线"/>
+        <a:font script="Hant" typeface="新細明體"/>
+        <a:font script="Arab" typeface="Arial"/>
+        <a:font script="Hebr" typeface="Arial"/>
+        <a:font script="Thai" typeface="Cordia New"/>
+        <a:font script="Ethi" typeface="Nyala"/>
+        <a:font script="Beng" typeface="Vrinda"/>
+        <a:font script="Gujr" typeface="Shruti"/>
+        <a:font script="Khmr" typeface="DaunPenh"/>
+        <a:font script="Knda" typeface="Tunga"/>
+        <a:font script="Guru" typeface="Raavi"/>
+        <a:font script="Cans" typeface="Euphemia"/>
+        <a:font script="Cher" typeface="Plantagenet Cherokee"/>
+        <a:font script="Yiii" typeface="Microsoft Yi Baiti"/>
+        <a:font script="Tibt" typeface="Microsoft Himalaya"/>
+        <a:font script="Thaa" typeface="MV Boli"/>
+        <a:font script="Deva" typeface="Mangal"/>
+        <a:font script="Telu" typeface="Gautami"/>
+        <a:font script="Taml" typeface="Latha"/>
+        <a:font script="Syrc" typeface="Estrangelo Edessa"/>
+        <a:font script="Orya" typeface="Kalinga"/>
+        <a:font script="Mlym" typeface="Kartika"/>
+        <a:font script="Laoo" typeface="DokChampa"/>
+        <a:font script="Sinh" typeface="Iskoola Pota"/>
+        <a:font script="Mong" typeface="Mongolian Baiti"/>
+        <a:font script="Viet" typeface="Arial"/>
+        <a:font script="Uigh" typeface="Microsoft Uighur"/>
+        <a:font script="Geor" typeface="Sylfaen"/>
+        <a:font script="Armn" typeface="Arial"/>
+        <a:font script="Bugi" typeface="Leelawadee UI"/>
+        <a:font script="Bopo" typeface="Microsoft JhengHei"/>
+        <a:font script="Java" typeface="Javanese Text"/>
+        <a:font script="Lisu" typeface="Segoe UI"/>
+        <a:font script="Mymr" typeface="Myanmar Text"/>
+        <a:font script="Nkoo" typeface="Ebrima"/>
+        <a:font script="Olck" typeface="Nirmala UI"/>
+        <a:font script="Osma" typeface="Ebrima"/>
+        <a:font script="Phag" typeface="Phagspa"/>
+        <a:font script="Syrn" typeface="Estrangelo Edessa"/>
+        <a:font script="Syrj" typeface="Estrangelo Edessa"/>
+        <a:font script="Syre" typeface="Estrangelo Edessa"/>
+        <a:font script="Sora" typeface="Nirmala UI"/>
+        <a:font script="Tale" typeface="Microsoft Tai Le"/>
+        <a:font script="Talu" typeface="Microsoft New Tai Lue"/>
+        <a:font script="Tfng" typeface="Ebrima"/>
+      </a:minorFont>
+    </a:fontScheme>
+    <a:fmtScheme name="Стандартная">
+      <a:fillStyleLst>
+        <a:solidFill>
+          <a:schemeClr val="phClr"/>
+        </a:solidFill>
+        <a:gradFill rotWithShape="1">
+          <a:gsLst>
+            <a:gs pos="0">
+              <a:schemeClr val="phClr">
+                <a:lumMod val="110000"/>
+                <a:satMod val="105000"/>
+                <a:tint val="67000"/>
+              </a:schemeClr>
+            </a:gs>
+            <a:gs pos="50000">
+              <a:schemeClr val="phClr">
+                <a:lumMod val="105000"/>
+                <a:satMod val="103000"/>
+                <a:tint val="73000"/>
+              </a:schemeClr>
+            </a:gs>
+            <a:gs pos="100000">
+              <a:schemeClr val="phClr">
+                <a:lumMod val="105000"/>
+                <a:satMod val="109000"/>
+                <a:tint val="81000"/>
+              </a:schemeClr>
+            </a:gs>
+          </a:gsLst>
+          <a:lin ang="5400000" scaled="0"/>
+        </a:gradFill>
+        <a:gradFill rotWithShape="1">
+          <a:gsLst>
+            <a:gs pos="0">
+              <a:schemeClr val="phClr">
+                <a:satMod val="103000"/>
+                <a:lumMod val="102000"/>
+                <a:tint val="94000"/>
+              </a:schemeClr>
+            </a:gs>
+            <a:gs pos="50000">
+              <a:schemeClr val="phClr">
+                <a:satMod val="110000"/>
+                <a:lumMod val="100000"/>
+                <a:shade val="100000"/>
+              </a:schemeClr>
+            </a:gs>
+            <a:gs pos="100000">
+              <a:schemeClr val="phClr">
+                <a:lumMod val="99000"/>
+                <a:satMod val="120000"/>
+                <a:shade val="78000"/>
+              </a:schemeClr>
+            </a:gs>
+          </a:gsLst>
+          <a:lin ang="5400000" scaled="0"/>
+        </a:gradFill>
+      </a:fillStyleLst>
+      <a:lnStyleLst>
+        <a:ln w="12700" cap="flat" cmpd="sng" algn="ctr">
+          <a:solidFill>
+            <a:schemeClr val="phClr"/>
+          </a:solidFill>
+          <a:prstDash val="solid"/>
+          <a:miter lim="800000"/>
+        </a:ln>
+        <a:ln w="19050" cap="flat" cmpd="sng" algn="ctr">
+          <a:solidFill>
+            <a:schemeClr val="phClr"/>
+          </a:solidFill>
+          <a:prstDash val="solid"/>
+          <a:miter lim="800000"/>
+        </a:ln>
+        <a:ln w="25400" cap="flat" cmpd="sng" algn="ctr">
+          <a:solidFill>
+            <a:schemeClr val="phClr"/>
+          </a:solidFill>
+          <a:prstDash val="solid"/>
+          <a:miter lim="800000"/>
+        </a:ln>
+      </a:lnStyleLst>
+      <a:effectStyleLst>
+        <a:effectStyle>
+          <a:effectLst/>
+        </a:effectStyle>
+        <a:effectStyle>
+          <a:effectLst/>
+        </a:effectStyle>
+        <a:effectStyle>
+          <a:effectLst>
+            <a:outerShdw blurRad="57150" dist="19050" dir="5400000" algn="ctr" rotWithShape="0">
+              <a:srgbClr val="000000">
+                <a:alpha val="63000"/>
+              </a:srgbClr>
+            </a:outerShdw>
+          </a:effectLst>
+        </a:effectStyle>
+      </a:effectStyleLst>
+      <a:bgFillStyleLst>
+        <a:solidFill>
+          <a:schemeClr val="phClr"/>
+        </a:solidFill>
+        <a:solidFill>
+          <a:schemeClr val="phClr">
+            <a:tint val="95000"/>
+            <a:satMod val="170000"/>
+          </a:schemeClr>
+        </a:solidFill>
+        <a:gradFill rotWithShape="1">
+          <a:gsLst>
+            <a:gs pos="0">
+              <a:schemeClr val="phClr">
+                <a:tint val="93000"/>
+                <a:satMod val="150000"/>
+                <a:shade val="98000"/>
+                <a:lumMod val="102000"/>
+              </a:schemeClr>
+            </a:gs>
+            <a:gs pos="50000">
+              <a:schemeClr val="phClr">
+                <a:tint val="98000"/>
+                <a:satMod val="130000"/>
+                <a:shade val="90000"/>
+                <a:lumMod val="103000"/>
+              </a:schemeClr>
+            </a:gs>
+            <a:gs pos="100000">
+              <a:schemeClr val="phClr">
+                <a:shade val="63000"/>
+                <a:satMod val="120000"/>
+              </a:schemeClr>
+            </a:gs>
+          </a:gsLst>
+          <a:lin ang="5400000" scaled="0"/>
+        </a:gradFill>
+      </a:bgFillStyleLst>
+    </a:fmtScheme>
+  </a:themeElements>
+  <a:objectDefaults>
+    <a:lnDef>
+      <a:spPr/>
+      <a:bodyPr/>
+      <a:lstStyle/>
+      <a:style>
+        <a:lnRef idx="2">
+          <a:schemeClr val="accent1"/>
+        </a:lnRef>
+        <a:fillRef idx="0">
+          <a:schemeClr val="accent1"/>
+        </a:fillRef>
+        <a:effectRef idx="1">
+          <a:schemeClr val="accent1"/>
+        </a:effectRef>
+        <a:fontRef idx="minor">
+          <a:schemeClr val="tx1"/>
+        </a:fontRef>
+      </a:style>
+    </a:lnDef>
+  </a:objectDefaults>
+  <a:extraClrSchemeLst/>
+  <a:extLst>
+    <a:ext uri="{05A4C25C-085E-4340-85A3-A5531E510DB2}">
+      <thm15:themeFamily xmlns:thm15="http://schemas.microsoft.com/office/thememl/2012/main" name="Office Theme" id="{2E142A2C-CD16-42D6-873A-C26D2A0506FA}" vid="{1BDDFF52-6CD6-40A5-AB3C-68EB2F1E4D0A}"/>
+    </a:ext>
+  </a:extLst>
+</a:theme>
 </file>